--- a/3.2 SEATS.pptx
+++ b/3.2 SEATS.pptx
@@ -29,9 +29,9 @@
     <p:sldId id="271" r:id="rId20"/>
     <p:sldId id="283" r:id="rId21"/>
     <p:sldId id="291" r:id="rId22"/>
-    <p:sldId id="285" r:id="rId23"/>
-    <p:sldId id="286" r:id="rId24"/>
-    <p:sldId id="267" r:id="rId25"/>
+    <p:sldId id="267" r:id="rId23"/>
+    <p:sldId id="285" r:id="rId24"/>
+    <p:sldId id="286" r:id="rId25"/>
     <p:sldId id="292" r:id="rId26"/>
     <p:sldId id="296" r:id="rId27"/>
     <p:sldId id="297" r:id="rId28"/>
@@ -298,7 +298,7 @@
       <p15:notesGuideLst xmlns:p15="http://schemas.microsoft.com/office/powerpoint/2012/main"/>
     </p:ext>
     <p:ext uri="http://customooxmlschemas.google.com/">
-      <go:slidesCustomData xmlns="" xmlns:go="http://customooxmlschemas.google.com/" xmlns:ahyp="http://schemas.microsoft.com/office/drawing/2018/hyperlinkcolor" xmlns:p15="http://schemas.microsoft.com/office/powerpoint/2012/main" xmlns:p14="http://schemas.microsoft.com/office/powerpoint/2010/main" xmlns:com="http://schemas.openxmlformats.org/drawingml/2006/compatibility" xmlns:pvml="urn:schemas-microsoft-com:office:powerpoint" xmlns:v="urn:schemas-microsoft-com:vml" xmlns:o="urn:schemas-microsoft-com:office:office" xmlns:dgm="http://schemas.openxmlformats.org/drawingml/2006/diagram" xmlns:c="http://schemas.openxmlformats.org/drawingml/2006/chart" xmlns:mv="urn:schemas-microsoft-com:mac:vml" xmlns:mc="http://schemas.openxmlformats.org/markup-compatibility/2006" r:id="rId59" roundtripDataSignature="AMtx7mh3YP3xexYcFoahXa2ehi0H5V4Zaw=="/>
+      <go:slidesCustomData xmlns:mc="http://schemas.openxmlformats.org/markup-compatibility/2006" xmlns:mv="urn:schemas-microsoft-com:mac:vml" xmlns:c="http://schemas.openxmlformats.org/drawingml/2006/chart" xmlns:dgm="http://schemas.openxmlformats.org/drawingml/2006/diagram" xmlns:o="urn:schemas-microsoft-com:office:office" xmlns:v="urn:schemas-microsoft-com:vml" xmlns:pvml="urn:schemas-microsoft-com:office:powerpoint" xmlns:com="http://schemas.openxmlformats.org/drawingml/2006/compatibility" xmlns:p14="http://schemas.microsoft.com/office/powerpoint/2010/main" xmlns:p15="http://schemas.microsoft.com/office/powerpoint/2012/main" xmlns:ahyp="http://schemas.microsoft.com/office/drawing/2018/hyperlinkcolor" xmlns:go="http://customooxmlschemas.google.com/" xmlns="" r:id="rId59" roundtripDataSignature="AMtx7mh3YP3xexYcFoahXa2ehi0H5V4Zaw=="/>
     </p:ext>
   </p:extLst>
 </p:presentation>
@@ -1776,7 +1776,7 @@
                 <a:cs typeface="Calibri"/>
                 <a:sym typeface="Calibri"/>
               </a:rPr>
-              <a:t>20</a:t>
+              <a:t>21</a:t>
             </a:fld>
             <a:endParaRPr lang="en-GB" sz="1200" b="0" i="0" u="none" strike="noStrike" cap="none">
               <a:solidFill>
@@ -6525,8 +6525,8 @@
           </a:p>
         </p:txBody>
       </p:sp>
-      <mc:AlternateContent xmlns:mc="http://schemas.openxmlformats.org/markup-compatibility/2006">
-        <mc:Choice xmlns:a14="http://schemas.microsoft.com/office/drawing/2010/main" Requires="a14">
+      <mc:AlternateContent xmlns:mc="http://schemas.openxmlformats.org/markup-compatibility/2006" xmlns:a14="http://schemas.microsoft.com/office/drawing/2010/main">
+        <mc:Choice Requires="a14">
           <p:sp>
             <p:nvSpPr>
               <p:cNvPr id="8" name="Rounded Rectangle 7"/>
@@ -6590,7 +6590,7 @@
             </p:txBody>
           </p:sp>
         </mc:Choice>
-        <mc:Fallback>
+        <mc:Fallback xmlns="">
           <p:sp>
             <p:nvSpPr>
               <p:cNvPr id="8" name="Rounded Rectangle 7"/>
@@ -6629,8 +6629,8 @@
           </p:sp>
         </mc:Fallback>
       </mc:AlternateContent>
-      <mc:AlternateContent xmlns:mc="http://schemas.openxmlformats.org/markup-compatibility/2006">
-        <mc:Choice xmlns:a14="http://schemas.microsoft.com/office/drawing/2010/main" Requires="a14">
+      <mc:AlternateContent xmlns:mc="http://schemas.openxmlformats.org/markup-compatibility/2006" xmlns:a14="http://schemas.microsoft.com/office/drawing/2010/main">
+        <mc:Choice Requires="a14">
           <p:sp>
             <p:nvSpPr>
               <p:cNvPr id="9" name="Rounded Rectangle 8"/>
@@ -6694,7 +6694,7 @@
             </p:txBody>
           </p:sp>
         </mc:Choice>
-        <mc:Fallback>
+        <mc:Fallback xmlns="">
           <p:sp>
             <p:nvSpPr>
               <p:cNvPr id="9" name="Rounded Rectangle 8"/>
@@ -6749,14 +6749,16 @@
           </a:prstGeom>
         </p:spPr>
         <p:style>
-          <a:lnRef idx="1">
-            <a:schemeClr val="accent1"/>
+          <a:lnRef idx="2">
+            <a:schemeClr val="accent2">
+              <a:shade val="15000"/>
+            </a:schemeClr>
           </a:lnRef>
-          <a:fillRef idx="3">
-            <a:schemeClr val="accent1"/>
+          <a:fillRef idx="1">
+            <a:schemeClr val="accent2"/>
           </a:fillRef>
-          <a:effectRef idx="2">
-            <a:schemeClr val="accent1"/>
+          <a:effectRef idx="0">
+            <a:schemeClr val="accent2"/>
           </a:effectRef>
           <a:fontRef idx="minor">
             <a:schemeClr val="lt1"/>
@@ -6896,6 +6898,14 @@
           <a:prstGeom prst="ellipse">
             <a:avLst/>
           </a:prstGeom>
+          <a:solidFill>
+            <a:schemeClr val="accent2"/>
+          </a:solidFill>
+          <a:ln w="28575">
+            <a:solidFill>
+              <a:schemeClr val="tx1"/>
+            </a:solidFill>
+          </a:ln>
         </p:spPr>
         <p:style>
           <a:lnRef idx="1">
@@ -6923,8 +6933,8 @@
           </a:p>
         </p:txBody>
       </p:sp>
-      <mc:AlternateContent xmlns:mc="http://schemas.openxmlformats.org/markup-compatibility/2006">
-        <mc:Choice xmlns:a14="http://schemas.microsoft.com/office/drawing/2010/main" Requires="a14">
+      <mc:AlternateContent xmlns:mc="http://schemas.openxmlformats.org/markup-compatibility/2006" xmlns:a14="http://schemas.microsoft.com/office/drawing/2010/main">
+        <mc:Choice Requires="a14">
           <p:sp>
             <p:nvSpPr>
               <p:cNvPr id="15" name="Rounded Rectangle 14"/>
@@ -7049,7 +7059,7 @@
             </p:txBody>
           </p:sp>
         </mc:Choice>
-        <mc:Fallback>
+        <mc:Fallback xmlns="">
           <p:sp>
             <p:nvSpPr>
               <p:cNvPr id="15" name="Rounded Rectangle 14"/>
@@ -7241,8 +7251,8 @@
           </a:fontRef>
         </p:style>
       </p:cxnSp>
-      <mc:AlternateContent xmlns:mc="http://schemas.openxmlformats.org/markup-compatibility/2006">
-        <mc:Choice xmlns:a14="http://schemas.microsoft.com/office/drawing/2010/main" Requires="a14">
+      <mc:AlternateContent xmlns:mc="http://schemas.openxmlformats.org/markup-compatibility/2006" xmlns:a14="http://schemas.microsoft.com/office/drawing/2010/main">
+        <mc:Choice Requires="a14">
           <p:sp>
             <p:nvSpPr>
               <p:cNvPr id="20" name="Rounded Rectangle 19"/>
@@ -7328,7 +7338,7 @@
             </p:txBody>
           </p:sp>
         </mc:Choice>
-        <mc:Fallback>
+        <mc:Fallback xmlns="">
           <p:sp>
             <p:nvSpPr>
               <p:cNvPr id="20" name="Rounded Rectangle 19"/>
@@ -7443,8 +7453,8 @@
           </a:fontRef>
         </p:style>
       </p:cxnSp>
-      <mc:AlternateContent xmlns:mc="http://schemas.openxmlformats.org/markup-compatibility/2006">
-        <mc:Choice xmlns:a14="http://schemas.microsoft.com/office/drawing/2010/main" Requires="a14">
+      <mc:AlternateContent xmlns:mc="http://schemas.openxmlformats.org/markup-compatibility/2006" xmlns:a14="http://schemas.microsoft.com/office/drawing/2010/main">
+        <mc:Choice Requires="a14">
           <p:sp>
             <p:nvSpPr>
               <p:cNvPr id="23" name="Rounded Rectangle 22"/>
@@ -7567,7 +7577,7 @@
             </p:txBody>
           </p:sp>
         </mc:Choice>
-        <mc:Fallback>
+        <mc:Fallback xmlns="">
           <p:sp>
             <p:nvSpPr>
               <p:cNvPr id="23" name="Rounded Rectangle 22"/>
@@ -7611,8 +7621,8 @@
           </p:sp>
         </mc:Fallback>
       </mc:AlternateContent>
-      <mc:AlternateContent xmlns:mc="http://schemas.openxmlformats.org/markup-compatibility/2006">
-        <mc:Choice xmlns:a14="http://schemas.microsoft.com/office/drawing/2010/main" Requires="a14">
+      <mc:AlternateContent xmlns:mc="http://schemas.openxmlformats.org/markup-compatibility/2006" xmlns:a14="http://schemas.microsoft.com/office/drawing/2010/main">
+        <mc:Choice Requires="a14">
           <p:sp>
             <p:nvSpPr>
               <p:cNvPr id="24" name="Rounded Rectangle 23"/>
@@ -7756,7 +7766,7 @@
             </p:txBody>
           </p:sp>
         </mc:Choice>
-        <mc:Fallback>
+        <mc:Fallback xmlns="">
           <p:sp>
             <p:nvSpPr>
               <p:cNvPr id="24" name="Rounded Rectangle 23"/>
@@ -7887,8 +7897,8 @@
           </a:p>
         </p:txBody>
       </p:sp>
-      <mc:AlternateContent xmlns:mc="http://schemas.openxmlformats.org/markup-compatibility/2006">
-        <mc:Choice xmlns:a14="http://schemas.microsoft.com/office/drawing/2010/main" Requires="a14">
+      <mc:AlternateContent xmlns:mc="http://schemas.openxmlformats.org/markup-compatibility/2006" xmlns:a14="http://schemas.microsoft.com/office/drawing/2010/main">
+        <mc:Choice Requires="a14">
           <p:sp>
             <p:nvSpPr>
               <p:cNvPr id="30" name="Rounded Rectangle 23">
@@ -8109,7 +8119,7 @@
             </p:txBody>
           </p:sp>
         </mc:Choice>
-        <mc:Fallback>
+        <mc:Fallback xmlns="">
           <p:sp>
             <p:nvSpPr>
               <p:cNvPr id="30" name="Rounded Rectangle 23">
@@ -8279,8 +8289,8 @@
           </a:p>
         </p:txBody>
       </p:sp>
-      <mc:AlternateContent xmlns:mc="http://schemas.openxmlformats.org/markup-compatibility/2006">
-        <mc:Choice xmlns:a14="http://schemas.microsoft.com/office/drawing/2010/main" Requires="a14">
+      <mc:AlternateContent xmlns:mc="http://schemas.openxmlformats.org/markup-compatibility/2006" xmlns:a14="http://schemas.microsoft.com/office/drawing/2010/main">
+        <mc:Choice Requires="a14">
           <p:sp>
             <p:nvSpPr>
               <p:cNvPr id="3" name="Content Placeholder 2"/>
@@ -9098,7 +9108,7 @@
             </p:txBody>
           </p:sp>
         </mc:Choice>
-        <mc:Fallback>
+        <mc:Fallback xmlns="">
           <p:sp>
             <p:nvSpPr>
               <p:cNvPr id="3" name="Content Placeholder 2"/>
@@ -9272,8 +9282,8 @@
           <a:chExt cx="0" cy="0"/>
         </a:xfrm>
       </p:grpSpPr>
-      <mc:AlternateContent xmlns:mc="http://schemas.openxmlformats.org/markup-compatibility/2006">
-        <mc:Choice xmlns:a14="http://schemas.microsoft.com/office/drawing/2010/main" Requires="a14">
+      <mc:AlternateContent xmlns:mc="http://schemas.openxmlformats.org/markup-compatibility/2006" xmlns:a14="http://schemas.microsoft.com/office/drawing/2010/main">
+        <mc:Choice Requires="a14">
           <p:sp>
             <p:nvSpPr>
               <p:cNvPr id="3" name="Content Placeholder 2"/>
@@ -9709,7 +9719,7 @@
             </p:txBody>
           </p:sp>
         </mc:Choice>
-        <mc:Fallback>
+        <mc:Fallback xmlns="">
           <p:sp>
             <p:nvSpPr>
               <p:cNvPr id="3" name="Content Placeholder 2"/>
@@ -10151,8 +10161,8 @@
           </a:p>
         </p:txBody>
       </p:sp>
-      <mc:AlternateContent xmlns:mc="http://schemas.openxmlformats.org/markup-compatibility/2006">
-        <mc:Choice xmlns:a14="http://schemas.microsoft.com/office/drawing/2010/main" Requires="a14">
+      <mc:AlternateContent xmlns:mc="http://schemas.openxmlformats.org/markup-compatibility/2006" xmlns:a14="http://schemas.microsoft.com/office/drawing/2010/main">
+        <mc:Choice Requires="a14">
           <p:sp>
             <p:nvSpPr>
               <p:cNvPr id="3" name="Content Placeholder 2">
@@ -11156,7 +11166,7 @@
             </p:txBody>
           </p:sp>
         </mc:Choice>
-        <mc:Fallback>
+        <mc:Fallback xmlns="">
           <p:sp>
             <p:nvSpPr>
               <p:cNvPr id="3" name="Content Placeholder 2">
@@ -11431,7 +11441,7 @@
           <a:p>
             <a:r>
               <a:rPr lang="en-GB" noProof="0" dirty="0"/>
-              <a:t>2.2 SEATS spectral decomposition</a:t>
+              <a:t>2.4 SEATS spectral decomposition</a:t>
             </a:r>
           </a:p>
         </p:txBody>
@@ -11791,8 +11801,8 @@
           </a:extLst>
         </p:spPr>
       </p:pic>
-      <mc:AlternateContent xmlns:mc="http://schemas.openxmlformats.org/markup-compatibility/2006">
-        <mc:Choice xmlns:a14="http://schemas.microsoft.com/office/drawing/2010/main" Requires="a14">
+      <mc:AlternateContent xmlns:mc="http://schemas.openxmlformats.org/markup-compatibility/2006" xmlns:a14="http://schemas.microsoft.com/office/drawing/2010/main">
+        <mc:Choice Requires="a14">
           <p:sp>
             <p:nvSpPr>
               <p:cNvPr id="7" name="TextBox 6"/>
@@ -11976,7 +11986,7 @@
             </p:txBody>
           </p:sp>
         </mc:Choice>
-        <mc:Fallback>
+        <mc:Fallback xmlns="">
           <p:sp>
             <p:nvSpPr>
               <p:cNvPr id="7" name="TextBox 6"/>
@@ -12015,8 +12025,8 @@
           </p:sp>
         </mc:Fallback>
       </mc:AlternateContent>
-      <mc:AlternateContent xmlns:mc="http://schemas.openxmlformats.org/markup-compatibility/2006">
-        <mc:Choice xmlns:a14="http://schemas.microsoft.com/office/drawing/2010/main" Requires="a14">
+      <mc:AlternateContent xmlns:mc="http://schemas.openxmlformats.org/markup-compatibility/2006" xmlns:a14="http://schemas.microsoft.com/office/drawing/2010/main">
+        <mc:Choice Requires="a14">
           <p:sp>
             <p:nvSpPr>
               <p:cNvPr id="12" name="TextBox 11"/>
@@ -12231,7 +12241,7 @@
             </p:txBody>
           </p:sp>
         </mc:Choice>
-        <mc:Fallback>
+        <mc:Fallback xmlns="">
           <p:sp>
             <p:nvSpPr>
               <p:cNvPr id="12" name="TextBox 11"/>
@@ -12348,7 +12358,7 @@
           <a:p>
             <a:r>
               <a:rPr lang="en-GB" noProof="0" dirty="0"/>
-              <a:t>2.2 SEATS spectral decomposition</a:t>
+              <a:t>2.4 SEATS spectral decomposition</a:t>
             </a:r>
           </a:p>
         </p:txBody>
@@ -13449,8 +13459,8 @@
           </a:p>
         </p:txBody>
       </p:sp>
-      <mc:AlternateContent xmlns:mc="http://schemas.openxmlformats.org/markup-compatibility/2006">
-        <mc:Choice xmlns:a14="http://schemas.microsoft.com/office/drawing/2010/main" Requires="a14">
+      <mc:AlternateContent xmlns:mc="http://schemas.openxmlformats.org/markup-compatibility/2006" xmlns:a14="http://schemas.microsoft.com/office/drawing/2010/main">
+        <mc:Choice Requires="a14">
           <p:sp>
             <p:nvSpPr>
               <p:cNvPr id="22" name="TextBox 21">
@@ -13671,7 +13681,7 @@
             </p:txBody>
           </p:sp>
         </mc:Choice>
-        <mc:Fallback>
+        <mc:Fallback xmlns="">
           <p:sp>
             <p:nvSpPr>
               <p:cNvPr id="22" name="TextBox 21">
@@ -13716,8 +13726,8 @@
           </p:sp>
         </mc:Fallback>
       </mc:AlternateContent>
-      <mc:AlternateContent xmlns:mc="http://schemas.openxmlformats.org/markup-compatibility/2006">
-        <mc:Choice xmlns:a14="http://schemas.microsoft.com/office/drawing/2010/main" Requires="a14">
+      <mc:AlternateContent xmlns:mc="http://schemas.openxmlformats.org/markup-compatibility/2006" xmlns:a14="http://schemas.microsoft.com/office/drawing/2010/main">
+        <mc:Choice Requires="a14">
           <p:sp>
             <p:nvSpPr>
               <p:cNvPr id="24" name="TextBox 23">
@@ -13898,7 +13908,7 @@
             </p:txBody>
           </p:sp>
         </mc:Choice>
-        <mc:Fallback>
+        <mc:Fallback xmlns="">
           <p:sp>
             <p:nvSpPr>
               <p:cNvPr id="24" name="TextBox 23">
@@ -13975,6 +13985,388 @@
       </p:grpSpPr>
       <p:sp>
         <p:nvSpPr>
+          <p:cNvPr id="2" name="Title 1"/>
+          <p:cNvSpPr>
+            <a:spLocks noGrp="1"/>
+          </p:cNvSpPr>
+          <p:nvPr>
+            <p:ph type="title"/>
+          </p:nvPr>
+        </p:nvSpPr>
+        <p:spPr/>
+        <p:txBody>
+          <a:bodyPr/>
+          <a:lstStyle/>
+          <a:p>
+            <a:r>
+              <a:rPr lang="en-GB" noProof="0" dirty="0"/>
+              <a:t>3.1 Estimation of the components</a:t>
+            </a:r>
+          </a:p>
+        </p:txBody>
+      </p:sp>
+      <p:sp>
+        <p:nvSpPr>
+          <p:cNvPr id="6" name="Slide Number Placeholder 5"/>
+          <p:cNvSpPr>
+            <a:spLocks noGrp="1"/>
+          </p:cNvSpPr>
+          <p:nvPr>
+            <p:ph type="sldNum" idx="12"/>
+          </p:nvPr>
+        </p:nvSpPr>
+        <p:spPr/>
+        <p:txBody>
+          <a:bodyPr/>
+          <a:lstStyle/>
+          <a:p>
+            <a:fld id="{F12E9969-9346-4095-A7C3-836AAB82C09A}" type="slidenum">
+              <a:rPr lang="en-GB" noProof="0" smtClean="0"/>
+              <a:t>19</a:t>
+            </a:fld>
+            <a:endParaRPr lang="en-GB" noProof="0" dirty="0"/>
+          </a:p>
+        </p:txBody>
+      </p:sp>
+      <p:sp>
+        <p:nvSpPr>
+          <p:cNvPr id="3" name="Content Placeholder 2"/>
+          <p:cNvSpPr>
+            <a:spLocks noGrp="1"/>
+          </p:cNvSpPr>
+          <p:nvPr>
+            <p:ph sz="half" idx="2"/>
+          </p:nvPr>
+        </p:nvSpPr>
+        <p:spPr/>
+        <p:txBody>
+          <a:bodyPr>
+            <a:normAutofit/>
+          </a:bodyPr>
+          <a:lstStyle/>
+          <a:p>
+            <a:r>
+              <a:rPr lang="en-GB" sz="2800" noProof="0" dirty="0"/>
+              <a:t>STS and AMB → UCARIMA models</a:t>
+            </a:r>
+          </a:p>
+          <a:p>
+            <a:pPr lvl="1"/>
+            <a:r>
+              <a:rPr lang="en-GB" sz="2400" noProof="0" dirty="0"/>
+              <a:t>Same estimation algorithms </a:t>
+            </a:r>
+          </a:p>
+          <a:p>
+            <a:pPr lvl="1"/>
+            <a:r>
+              <a:rPr lang="en-GB" sz="2400" noProof="0" dirty="0"/>
+              <a:t>Common analysis tools</a:t>
+            </a:r>
+          </a:p>
+          <a:p>
+            <a:r>
+              <a:rPr lang="en-GB" sz="2800" noProof="0" dirty="0"/>
+              <a:t>3 solutions, strictly equivalent (except for SD)</a:t>
+            </a:r>
+          </a:p>
+          <a:p>
+            <a:pPr lvl="1"/>
+            <a:r>
+              <a:rPr lang="en-GB" sz="2400" noProof="0" dirty="0"/>
+              <a:t>Burman algorithm (WK filters): legacy and default solution, fastest</a:t>
+            </a:r>
+          </a:p>
+          <a:p>
+            <a:pPr lvl="1"/>
+            <a:r>
+              <a:rPr lang="en-GB" sz="2400" b="1" noProof="0" dirty="0"/>
+              <a:t>Kalman smoother</a:t>
+            </a:r>
+            <a:r>
+              <a:rPr lang="en-GB" sz="2400" noProof="0" dirty="0"/>
+              <a:t>: more stable, exact SD</a:t>
+            </a:r>
+          </a:p>
+          <a:p>
+            <a:pPr lvl="1"/>
+            <a:r>
+              <a:rPr lang="en-GB" sz="2400" noProof="0" dirty="0"/>
+              <a:t>[Matrix computation]: Not available in JD+ 3.x</a:t>
+            </a:r>
+          </a:p>
+          <a:p>
+            <a:endParaRPr lang="en-GB" noProof="0" dirty="0"/>
+          </a:p>
+        </p:txBody>
+      </p:sp>
+      <p:sp>
+        <p:nvSpPr>
+          <p:cNvPr id="5" name="Footer Placeholder 4"/>
+          <p:cNvSpPr>
+            <a:spLocks noGrp="1"/>
+          </p:cNvSpPr>
+          <p:nvPr>
+            <p:ph type="ftr" sz="quarter" idx="4294967295"/>
+          </p:nvPr>
+        </p:nvSpPr>
+        <p:spPr>
+          <a:xfrm>
+            <a:off x="0" y="0"/>
+            <a:ext cx="0" cy="0"/>
+          </a:xfrm>
+        </p:spPr>
+        <p:txBody>
+          <a:bodyPr/>
+          <a:lstStyle/>
+          <a:p>
+            <a:r>
+              <a:rPr lang="en-GB" noProof="0" dirty="0"/>
+              <a:t>Model-based decomposition</a:t>
+            </a:r>
+          </a:p>
+        </p:txBody>
+      </p:sp>
+    </p:spTree>
+    <p:extLst>
+      <p:ext uri="{BB962C8B-B14F-4D97-AF65-F5344CB8AC3E}">
+        <p14:creationId xmlns:p14="http://schemas.microsoft.com/office/powerpoint/2010/main" val="227588825"/>
+      </p:ext>
+    </p:extLst>
+  </p:cSld>
+  <p:clrMapOvr>
+    <a:masterClrMapping/>
+  </p:clrMapOvr>
+</p:sld>
+</file>
+
+<file path=ppt/slides/slide2.xml><?xml version="1.0" encoding="utf-8"?>
+<p:sld xmlns:a="http://schemas.openxmlformats.org/drawingml/2006/main" xmlns:r="http://schemas.openxmlformats.org/officeDocument/2006/relationships" xmlns:p="http://schemas.openxmlformats.org/presentationml/2006/main">
+  <p:cSld>
+    <p:spTree>
+      <p:nvGrpSpPr>
+        <p:cNvPr id="1" name=""/>
+        <p:cNvGrpSpPr/>
+        <p:nvPr/>
+      </p:nvGrpSpPr>
+      <p:grpSpPr>
+        <a:xfrm>
+          <a:off x="0" y="0"/>
+          <a:ext cx="0" cy="0"/>
+          <a:chOff x="0" y="0"/>
+          <a:chExt cx="0" cy="0"/>
+        </a:xfrm>
+      </p:grpSpPr>
+      <p:sp>
+        <p:nvSpPr>
+          <p:cNvPr id="2" name="Title 1">
+            <a:extLst>
+              <a:ext uri="{FF2B5EF4-FFF2-40B4-BE49-F238E27FC236}">
+                <a16:creationId xmlns:a16="http://schemas.microsoft.com/office/drawing/2014/main" id="{6F05B4D6-BD49-28BA-B570-742D03DE7C43}"/>
+              </a:ext>
+            </a:extLst>
+          </p:cNvPr>
+          <p:cNvSpPr>
+            <a:spLocks noGrp="1"/>
+          </p:cNvSpPr>
+          <p:nvPr>
+            <p:ph type="title"/>
+          </p:nvPr>
+        </p:nvSpPr>
+        <p:spPr/>
+        <p:txBody>
+          <a:bodyPr/>
+          <a:lstStyle/>
+          <a:p>
+            <a:r>
+              <a:rPr lang="en-GB" noProof="0" dirty="0"/>
+              <a:t>0. Outline</a:t>
+            </a:r>
+          </a:p>
+        </p:txBody>
+      </p:sp>
+      <p:sp>
+        <p:nvSpPr>
+          <p:cNvPr id="6" name="Slide Number Placeholder 5">
+            <a:extLst>
+              <a:ext uri="{FF2B5EF4-FFF2-40B4-BE49-F238E27FC236}">
+                <a16:creationId xmlns:a16="http://schemas.microsoft.com/office/drawing/2014/main" id="{AA56090C-9C88-CB17-62D5-03FB12FC3E0E}"/>
+              </a:ext>
+            </a:extLst>
+          </p:cNvPr>
+          <p:cNvSpPr>
+            <a:spLocks noGrp="1"/>
+          </p:cNvSpPr>
+          <p:nvPr>
+            <p:ph type="sldNum" idx="12"/>
+          </p:nvPr>
+        </p:nvSpPr>
+        <p:spPr/>
+        <p:txBody>
+          <a:bodyPr/>
+          <a:lstStyle/>
+          <a:p>
+            <a:fld id="{F12E9969-9346-4095-A7C3-836AAB82C09A}" type="slidenum">
+              <a:rPr lang="en-GB" noProof="0" smtClean="0"/>
+              <a:t>2</a:t>
+            </a:fld>
+            <a:endParaRPr lang="en-GB" noProof="0" dirty="0"/>
+          </a:p>
+        </p:txBody>
+      </p:sp>
+      <p:sp>
+        <p:nvSpPr>
+          <p:cNvPr id="3" name="Content Placeholder 2">
+            <a:extLst>
+              <a:ext uri="{FF2B5EF4-FFF2-40B4-BE49-F238E27FC236}">
+                <a16:creationId xmlns:a16="http://schemas.microsoft.com/office/drawing/2014/main" id="{BFF2A1C7-B8A7-F246-DD55-FBE3919FBA14}"/>
+              </a:ext>
+            </a:extLst>
+          </p:cNvPr>
+          <p:cNvSpPr>
+            <a:spLocks noGrp="1"/>
+          </p:cNvSpPr>
+          <p:nvPr>
+            <p:ph sz="half" idx="2"/>
+          </p:nvPr>
+        </p:nvSpPr>
+        <p:spPr/>
+        <p:txBody>
+          <a:bodyPr>
+            <a:normAutofit/>
+          </a:bodyPr>
+          <a:lstStyle/>
+          <a:p>
+            <a:r>
+              <a:rPr lang="en-GB" sz="2800" noProof="0" dirty="0"/>
+              <a:t>Unobserved component models</a:t>
+            </a:r>
+          </a:p>
+          <a:p>
+            <a:pPr lvl="1"/>
+            <a:r>
+              <a:rPr lang="en-GB" sz="2400" noProof="0" dirty="0"/>
+              <a:t>STS, AMB</a:t>
+            </a:r>
+          </a:p>
+          <a:p>
+            <a:r>
+              <a:rPr lang="en-GB" sz="2800" noProof="0" dirty="0"/>
+              <a:t>SEATS algorithm</a:t>
+            </a:r>
+          </a:p>
+          <a:p>
+            <a:r>
+              <a:rPr lang="en-GB" sz="2800" noProof="0" dirty="0"/>
+              <a:t>Estimation</a:t>
+            </a:r>
+          </a:p>
+          <a:p>
+            <a:pPr lvl="1"/>
+            <a:r>
+              <a:rPr lang="en-GB" sz="2400" noProof="0" dirty="0"/>
+              <a:t>MMSE estimators, algorithms</a:t>
+            </a:r>
+          </a:p>
+          <a:p>
+            <a:r>
+              <a:rPr lang="en-GB" sz="2800" noProof="0" dirty="0"/>
+              <a:t>Analysis</a:t>
+            </a:r>
+          </a:p>
+          <a:p>
+            <a:pPr lvl="1"/>
+            <a:r>
+              <a:rPr lang="en-GB" sz="2400" noProof="0" dirty="0"/>
+              <a:t>Finite / infinite approaches</a:t>
+            </a:r>
+          </a:p>
+          <a:p>
+            <a:r>
+              <a:rPr lang="en-GB" sz="2800" noProof="0" dirty="0"/>
+              <a:t>SEATS in JD+</a:t>
+            </a:r>
+          </a:p>
+          <a:p>
+            <a:pPr lvl="1"/>
+            <a:r>
+              <a:rPr lang="en-GB" sz="2400" noProof="0" dirty="0"/>
+              <a:t>Parameters, non decomposable models, estimation</a:t>
+            </a:r>
+          </a:p>
+          <a:p>
+            <a:endParaRPr lang="en-GB" noProof="0" dirty="0"/>
+          </a:p>
+          <a:p>
+            <a:endParaRPr lang="en-GB" noProof="0" dirty="0"/>
+          </a:p>
+        </p:txBody>
+      </p:sp>
+      <p:sp>
+        <p:nvSpPr>
+          <p:cNvPr id="5" name="Footer Placeholder 4">
+            <a:extLst>
+              <a:ext uri="{FF2B5EF4-FFF2-40B4-BE49-F238E27FC236}">
+                <a16:creationId xmlns:a16="http://schemas.microsoft.com/office/drawing/2014/main" id="{A36C03FE-6836-C279-9389-A9532A31DB45}"/>
+              </a:ext>
+            </a:extLst>
+          </p:cNvPr>
+          <p:cNvSpPr>
+            <a:spLocks noGrp="1"/>
+          </p:cNvSpPr>
+          <p:nvPr>
+            <p:ph type="ftr" sz="quarter" idx="4294967295"/>
+          </p:nvPr>
+        </p:nvSpPr>
+        <p:spPr>
+          <a:xfrm>
+            <a:off x="0" y="0"/>
+            <a:ext cx="0" cy="0"/>
+          </a:xfrm>
+        </p:spPr>
+        <p:txBody>
+          <a:bodyPr/>
+          <a:lstStyle/>
+          <a:p>
+            <a:r>
+              <a:rPr lang="en-GB" noProof="0" dirty="0"/>
+              <a:t>Model-based decomposition</a:t>
+            </a:r>
+          </a:p>
+        </p:txBody>
+      </p:sp>
+    </p:spTree>
+    <p:extLst>
+      <p:ext uri="{BB962C8B-B14F-4D97-AF65-F5344CB8AC3E}">
+        <p14:creationId xmlns:p14="http://schemas.microsoft.com/office/powerpoint/2010/main" val="2303403916"/>
+      </p:ext>
+    </p:extLst>
+  </p:cSld>
+  <p:clrMapOvr>
+    <a:masterClrMapping/>
+  </p:clrMapOvr>
+</p:sld>
+</file>
+
+<file path=ppt/slides/slide20.xml><?xml version="1.0" encoding="utf-8"?>
+<p:sld xmlns:a="http://schemas.openxmlformats.org/drawingml/2006/main" xmlns:r="http://schemas.openxmlformats.org/officeDocument/2006/relationships" xmlns:p="http://schemas.openxmlformats.org/presentationml/2006/main">
+  <p:cSld>
+    <p:spTree>
+      <p:nvGrpSpPr>
+        <p:cNvPr id="1" name=""/>
+        <p:cNvGrpSpPr/>
+        <p:nvPr/>
+      </p:nvGrpSpPr>
+      <p:grpSpPr>
+        <a:xfrm>
+          <a:off x="0" y="0"/>
+          <a:ext cx="0" cy="0"/>
+          <a:chOff x="0" y="0"/>
+          <a:chExt cx="0" cy="0"/>
+        </a:xfrm>
+      </p:grpSpPr>
+      <p:sp>
+        <p:nvSpPr>
           <p:cNvPr id="2" name="Title 1">
             <a:extLst>
               <a:ext uri="{FF2B5EF4-FFF2-40B4-BE49-F238E27FC236}">
@@ -13999,7 +14391,7 @@
             <a:pPr algn="l"/>
             <a:r>
               <a:rPr lang="en-GB" noProof="0" dirty="0"/>
-              <a:t>3.1 Basic case</a:t>
+              <a:t>3.2 Basic case</a:t>
             </a:r>
           </a:p>
         </p:txBody>
@@ -14027,7 +14419,7 @@
           <a:p>
             <a:fld id="{F12E9969-9346-4095-A7C3-836AAB82C09A}" type="slidenum">
               <a:rPr lang="en-GB" noProof="0" smtClean="0"/>
-              <a:t>19</a:t>
+              <a:t>20</a:t>
             </a:fld>
             <a:endParaRPr lang="en-GB" noProof="0" dirty="0"/>
           </a:p>
@@ -14253,215 +14645,7 @@
 </p:sld>
 </file>
 
-<file path=ppt/slides/slide2.xml><?xml version="1.0" encoding="utf-8"?>
-<p:sld xmlns:a="http://schemas.openxmlformats.org/drawingml/2006/main" xmlns:r="http://schemas.openxmlformats.org/officeDocument/2006/relationships" xmlns:p="http://schemas.openxmlformats.org/presentationml/2006/main">
-  <p:cSld>
-    <p:spTree>
-      <p:nvGrpSpPr>
-        <p:cNvPr id="1" name=""/>
-        <p:cNvGrpSpPr/>
-        <p:nvPr/>
-      </p:nvGrpSpPr>
-      <p:grpSpPr>
-        <a:xfrm>
-          <a:off x="0" y="0"/>
-          <a:ext cx="0" cy="0"/>
-          <a:chOff x="0" y="0"/>
-          <a:chExt cx="0" cy="0"/>
-        </a:xfrm>
-      </p:grpSpPr>
-      <p:sp>
-        <p:nvSpPr>
-          <p:cNvPr id="2" name="Title 1">
-            <a:extLst>
-              <a:ext uri="{FF2B5EF4-FFF2-40B4-BE49-F238E27FC236}">
-                <a16:creationId xmlns:a16="http://schemas.microsoft.com/office/drawing/2014/main" id="{6F05B4D6-BD49-28BA-B570-742D03DE7C43}"/>
-              </a:ext>
-            </a:extLst>
-          </p:cNvPr>
-          <p:cNvSpPr>
-            <a:spLocks noGrp="1"/>
-          </p:cNvSpPr>
-          <p:nvPr>
-            <p:ph type="title"/>
-          </p:nvPr>
-        </p:nvSpPr>
-        <p:spPr/>
-        <p:txBody>
-          <a:bodyPr/>
-          <a:lstStyle/>
-          <a:p>
-            <a:r>
-              <a:rPr lang="en-GB" noProof="0" dirty="0"/>
-              <a:t>0. Outline</a:t>
-            </a:r>
-          </a:p>
-        </p:txBody>
-      </p:sp>
-      <p:sp>
-        <p:nvSpPr>
-          <p:cNvPr id="6" name="Slide Number Placeholder 5">
-            <a:extLst>
-              <a:ext uri="{FF2B5EF4-FFF2-40B4-BE49-F238E27FC236}">
-                <a16:creationId xmlns:a16="http://schemas.microsoft.com/office/drawing/2014/main" id="{AA56090C-9C88-CB17-62D5-03FB12FC3E0E}"/>
-              </a:ext>
-            </a:extLst>
-          </p:cNvPr>
-          <p:cNvSpPr>
-            <a:spLocks noGrp="1"/>
-          </p:cNvSpPr>
-          <p:nvPr>
-            <p:ph type="sldNum" idx="12"/>
-          </p:nvPr>
-        </p:nvSpPr>
-        <p:spPr/>
-        <p:txBody>
-          <a:bodyPr/>
-          <a:lstStyle/>
-          <a:p>
-            <a:fld id="{F12E9969-9346-4095-A7C3-836AAB82C09A}" type="slidenum">
-              <a:rPr lang="en-GB" noProof="0" smtClean="0"/>
-              <a:t>2</a:t>
-            </a:fld>
-            <a:endParaRPr lang="en-GB" noProof="0" dirty="0"/>
-          </a:p>
-        </p:txBody>
-      </p:sp>
-      <p:sp>
-        <p:nvSpPr>
-          <p:cNvPr id="3" name="Content Placeholder 2">
-            <a:extLst>
-              <a:ext uri="{FF2B5EF4-FFF2-40B4-BE49-F238E27FC236}">
-                <a16:creationId xmlns:a16="http://schemas.microsoft.com/office/drawing/2014/main" id="{BFF2A1C7-B8A7-F246-DD55-FBE3919FBA14}"/>
-              </a:ext>
-            </a:extLst>
-          </p:cNvPr>
-          <p:cNvSpPr>
-            <a:spLocks noGrp="1"/>
-          </p:cNvSpPr>
-          <p:nvPr>
-            <p:ph sz="half" idx="2"/>
-          </p:nvPr>
-        </p:nvSpPr>
-        <p:spPr/>
-        <p:txBody>
-          <a:bodyPr>
-            <a:normAutofit/>
-          </a:bodyPr>
-          <a:lstStyle/>
-          <a:p>
-            <a:r>
-              <a:rPr lang="en-GB" sz="2800" noProof="0" dirty="0"/>
-              <a:t>Unobserved component models</a:t>
-            </a:r>
-          </a:p>
-          <a:p>
-            <a:pPr lvl="1"/>
-            <a:r>
-              <a:rPr lang="en-GB" sz="2400" noProof="0" dirty="0"/>
-              <a:t>STS, AMB</a:t>
-            </a:r>
-          </a:p>
-          <a:p>
-            <a:r>
-              <a:rPr lang="en-GB" sz="2800" noProof="0" dirty="0"/>
-              <a:t>SEATS algorithm</a:t>
-            </a:r>
-          </a:p>
-          <a:p>
-            <a:r>
-              <a:rPr lang="en-GB" sz="2800" noProof="0" dirty="0"/>
-              <a:t>Estimation</a:t>
-            </a:r>
-          </a:p>
-          <a:p>
-            <a:pPr lvl="1"/>
-            <a:r>
-              <a:rPr lang="en-GB" sz="2400" noProof="0" dirty="0"/>
-              <a:t>MMSE estimators, algorithms</a:t>
-            </a:r>
-          </a:p>
-          <a:p>
-            <a:r>
-              <a:rPr lang="en-GB" sz="2800" noProof="0" dirty="0"/>
-              <a:t>Analysis</a:t>
-            </a:r>
-          </a:p>
-          <a:p>
-            <a:pPr lvl="1"/>
-            <a:r>
-              <a:rPr lang="en-GB" sz="2400" noProof="0" dirty="0"/>
-              <a:t>Finite / infinite approaches</a:t>
-            </a:r>
-          </a:p>
-          <a:p>
-            <a:r>
-              <a:rPr lang="en-GB" sz="2800" noProof="0" dirty="0"/>
-              <a:t>SEATS in JD+</a:t>
-            </a:r>
-          </a:p>
-          <a:p>
-            <a:pPr lvl="1"/>
-            <a:r>
-              <a:rPr lang="en-GB" sz="2400" noProof="0" dirty="0"/>
-              <a:t>Parameters, non decomposable models, estimation</a:t>
-            </a:r>
-          </a:p>
-          <a:p>
-            <a:endParaRPr lang="en-GB" noProof="0" dirty="0"/>
-          </a:p>
-          <a:p>
-            <a:endParaRPr lang="en-GB" noProof="0" dirty="0"/>
-          </a:p>
-        </p:txBody>
-      </p:sp>
-      <p:sp>
-        <p:nvSpPr>
-          <p:cNvPr id="5" name="Footer Placeholder 4">
-            <a:extLst>
-              <a:ext uri="{FF2B5EF4-FFF2-40B4-BE49-F238E27FC236}">
-                <a16:creationId xmlns:a16="http://schemas.microsoft.com/office/drawing/2014/main" id="{A36C03FE-6836-C279-9389-A9532A31DB45}"/>
-              </a:ext>
-            </a:extLst>
-          </p:cNvPr>
-          <p:cNvSpPr>
-            <a:spLocks noGrp="1"/>
-          </p:cNvSpPr>
-          <p:nvPr>
-            <p:ph type="ftr" sz="quarter" idx="4294967295"/>
-          </p:nvPr>
-        </p:nvSpPr>
-        <p:spPr>
-          <a:xfrm>
-            <a:off x="0" y="0"/>
-            <a:ext cx="0" cy="0"/>
-          </a:xfrm>
-        </p:spPr>
-        <p:txBody>
-          <a:bodyPr/>
-          <a:lstStyle/>
-          <a:p>
-            <a:r>
-              <a:rPr lang="en-GB" noProof="0" dirty="0"/>
-              <a:t>Model-based decomposition</a:t>
-            </a:r>
-          </a:p>
-        </p:txBody>
-      </p:sp>
-    </p:spTree>
-    <p:extLst>
-      <p:ext uri="{BB962C8B-B14F-4D97-AF65-F5344CB8AC3E}">
-        <p14:creationId xmlns:p14="http://schemas.microsoft.com/office/powerpoint/2010/main" val="2303403916"/>
-      </p:ext>
-    </p:extLst>
-  </p:cSld>
-  <p:clrMapOvr>
-    <a:masterClrMapping/>
-  </p:clrMapOvr>
-</p:sld>
-</file>
-
-<file path=ppt/slides/slide20.xml><?xml version="1.0" encoding="utf-8"?>
+<file path=ppt/slides/slide21.xml><?xml version="1.0" encoding="utf-8"?>
 <p:sld xmlns:a="http://schemas.openxmlformats.org/drawingml/2006/main" xmlns:r="http://schemas.openxmlformats.org/officeDocument/2006/relationships" xmlns:p="http://schemas.openxmlformats.org/presentationml/2006/main">
   <p:cSld>
     <p:spTree>
@@ -14502,7 +14686,7 @@
             <a:pPr algn="l"/>
             <a:r>
               <a:rPr lang="en-GB" noProof="0" dirty="0"/>
-              <a:t>3.2 Wiener-Kolmogorov filters</a:t>
+              <a:t>3.3 Wiener-Kolmogorov filters</a:t>
             </a:r>
           </a:p>
         </p:txBody>
@@ -14530,7 +14714,7 @@
           <a:p>
             <a:fld id="{F12E9969-9346-4095-A7C3-836AAB82C09A}" type="slidenum">
               <a:rPr lang="en-GB" noProof="0" smtClean="0"/>
-              <a:t>20</a:t>
+              <a:t>21</a:t>
             </a:fld>
             <a:endParaRPr lang="en-GB" noProof="0" dirty="0"/>
           </a:p>
@@ -14603,180 +14787,6 @@
     <p:extLst>
       <p:ext uri="{BB962C8B-B14F-4D97-AF65-F5344CB8AC3E}">
         <p14:creationId xmlns:p14="http://schemas.microsoft.com/office/powerpoint/2010/main" val="3868093827"/>
-      </p:ext>
-    </p:extLst>
-  </p:cSld>
-  <p:clrMapOvr>
-    <a:masterClrMapping/>
-  </p:clrMapOvr>
-</p:sld>
-</file>
-
-<file path=ppt/slides/slide21.xml><?xml version="1.0" encoding="utf-8"?>
-<p:sld xmlns:a="http://schemas.openxmlformats.org/drawingml/2006/main" xmlns:r="http://schemas.openxmlformats.org/officeDocument/2006/relationships" xmlns:p="http://schemas.openxmlformats.org/presentationml/2006/main">
-  <p:cSld>
-    <p:spTree>
-      <p:nvGrpSpPr>
-        <p:cNvPr id="1" name=""/>
-        <p:cNvGrpSpPr/>
-        <p:nvPr/>
-      </p:nvGrpSpPr>
-      <p:grpSpPr>
-        <a:xfrm>
-          <a:off x="0" y="0"/>
-          <a:ext cx="0" cy="0"/>
-          <a:chOff x="0" y="0"/>
-          <a:chExt cx="0" cy="0"/>
-        </a:xfrm>
-      </p:grpSpPr>
-      <p:sp>
-        <p:nvSpPr>
-          <p:cNvPr id="2" name="Title 1"/>
-          <p:cNvSpPr>
-            <a:spLocks noGrp="1"/>
-          </p:cNvSpPr>
-          <p:nvPr>
-            <p:ph type="title"/>
-          </p:nvPr>
-        </p:nvSpPr>
-        <p:spPr/>
-        <p:txBody>
-          <a:bodyPr/>
-          <a:lstStyle/>
-          <a:p>
-            <a:r>
-              <a:rPr lang="en-GB" noProof="0" dirty="0"/>
-              <a:t>3.3 Estimation of the components</a:t>
-            </a:r>
-          </a:p>
-        </p:txBody>
-      </p:sp>
-      <p:sp>
-        <p:nvSpPr>
-          <p:cNvPr id="6" name="Slide Number Placeholder 5"/>
-          <p:cNvSpPr>
-            <a:spLocks noGrp="1"/>
-          </p:cNvSpPr>
-          <p:nvPr>
-            <p:ph type="sldNum" idx="12"/>
-          </p:nvPr>
-        </p:nvSpPr>
-        <p:spPr/>
-        <p:txBody>
-          <a:bodyPr/>
-          <a:lstStyle/>
-          <a:p>
-            <a:fld id="{F12E9969-9346-4095-A7C3-836AAB82C09A}" type="slidenum">
-              <a:rPr lang="en-GB" noProof="0" smtClean="0"/>
-              <a:t>21</a:t>
-            </a:fld>
-            <a:endParaRPr lang="en-GB" noProof="0" dirty="0"/>
-          </a:p>
-        </p:txBody>
-      </p:sp>
-      <p:sp>
-        <p:nvSpPr>
-          <p:cNvPr id="3" name="Content Placeholder 2"/>
-          <p:cNvSpPr>
-            <a:spLocks noGrp="1"/>
-          </p:cNvSpPr>
-          <p:nvPr>
-            <p:ph sz="half" idx="2"/>
-          </p:nvPr>
-        </p:nvSpPr>
-        <p:spPr/>
-        <p:txBody>
-          <a:bodyPr>
-            <a:normAutofit/>
-          </a:bodyPr>
-          <a:lstStyle/>
-          <a:p>
-            <a:r>
-              <a:rPr lang="en-GB" sz="2800" noProof="0" dirty="0"/>
-              <a:t>STS and AMB → UCARIMA models</a:t>
-            </a:r>
-          </a:p>
-          <a:p>
-            <a:pPr lvl="1"/>
-            <a:r>
-              <a:rPr lang="en-GB" sz="2400" noProof="0" dirty="0"/>
-              <a:t>Same estimation algorithms </a:t>
-            </a:r>
-          </a:p>
-          <a:p>
-            <a:pPr lvl="1"/>
-            <a:r>
-              <a:rPr lang="en-GB" sz="2400" noProof="0" dirty="0"/>
-              <a:t>Common analysis tools</a:t>
-            </a:r>
-          </a:p>
-          <a:p>
-            <a:r>
-              <a:rPr lang="en-GB" sz="2800" noProof="0" dirty="0"/>
-              <a:t>3 solutions, strictly equivalent (except for SD)</a:t>
-            </a:r>
-          </a:p>
-          <a:p>
-            <a:pPr lvl="1"/>
-            <a:r>
-              <a:rPr lang="en-GB" sz="2400" noProof="0" dirty="0"/>
-              <a:t>Burman algorithm (WK filters): legacy and default solution, fastest</a:t>
-            </a:r>
-          </a:p>
-          <a:p>
-            <a:pPr lvl="1"/>
-            <a:r>
-              <a:rPr lang="en-GB" sz="2400" b="1" noProof="0" dirty="0"/>
-              <a:t>Kalman smoother</a:t>
-            </a:r>
-            <a:r>
-              <a:rPr lang="en-GB" sz="2400" noProof="0" dirty="0"/>
-              <a:t>: more stable, exact SD</a:t>
-            </a:r>
-          </a:p>
-          <a:p>
-            <a:pPr lvl="1"/>
-            <a:r>
-              <a:rPr lang="en-GB" sz="2400" noProof="0" dirty="0"/>
-              <a:t>[Matrix computation]: Not available in JD+ 3.x</a:t>
-            </a:r>
-          </a:p>
-          <a:p>
-            <a:endParaRPr lang="en-GB" noProof="0" dirty="0"/>
-          </a:p>
-        </p:txBody>
-      </p:sp>
-      <p:sp>
-        <p:nvSpPr>
-          <p:cNvPr id="5" name="Footer Placeholder 4"/>
-          <p:cNvSpPr>
-            <a:spLocks noGrp="1"/>
-          </p:cNvSpPr>
-          <p:nvPr>
-            <p:ph type="ftr" sz="quarter" idx="4294967295"/>
-          </p:nvPr>
-        </p:nvSpPr>
-        <p:spPr>
-          <a:xfrm>
-            <a:off x="0" y="0"/>
-            <a:ext cx="0" cy="0"/>
-          </a:xfrm>
-        </p:spPr>
-        <p:txBody>
-          <a:bodyPr/>
-          <a:lstStyle/>
-          <a:p>
-            <a:r>
-              <a:rPr lang="en-GB" noProof="0" dirty="0"/>
-              <a:t>Model-based decomposition</a:t>
-            </a:r>
-          </a:p>
-        </p:txBody>
-      </p:sp>
-    </p:spTree>
-    <p:extLst>
-      <p:ext uri="{BB962C8B-B14F-4D97-AF65-F5344CB8AC3E}">
-        <p14:creationId xmlns:p14="http://schemas.microsoft.com/office/powerpoint/2010/main" val="227588825"/>
       </p:ext>
     </p:extLst>
   </p:cSld>
@@ -14943,8 +14953,8 @@
           </a:p>
         </p:txBody>
       </p:sp>
-      <mc:AlternateContent xmlns:mc="http://schemas.openxmlformats.org/markup-compatibility/2006">
-        <mc:Choice xmlns:a14="http://schemas.microsoft.com/office/drawing/2010/main" Requires="a14">
+      <mc:AlternateContent xmlns:mc="http://schemas.openxmlformats.org/markup-compatibility/2006" xmlns:a14="http://schemas.microsoft.com/office/drawing/2010/main">
+        <mc:Choice Requires="a14">
           <p:sp>
             <p:nvSpPr>
               <p:cNvPr id="8" name="Rectangle: Rounded Corners 7">
@@ -15330,7 +15340,7 @@
             </p:txBody>
           </p:sp>
         </mc:Choice>
-        <mc:Fallback>
+        <mc:Fallback xmlns="">
           <p:sp>
             <p:nvSpPr>
               <p:cNvPr id="8" name="Rectangle: Rounded Corners 7">
@@ -15375,8 +15385,8 @@
           </p:sp>
         </mc:Fallback>
       </mc:AlternateContent>
-      <mc:AlternateContent xmlns:mc="http://schemas.openxmlformats.org/markup-compatibility/2006">
-        <mc:Choice xmlns:a14="http://schemas.microsoft.com/office/drawing/2010/main" Requires="a14">
+      <mc:AlternateContent xmlns:mc="http://schemas.openxmlformats.org/markup-compatibility/2006" xmlns:a14="http://schemas.microsoft.com/office/drawing/2010/main">
+        <mc:Choice Requires="a14">
           <p:sp>
             <p:nvSpPr>
               <p:cNvPr id="11" name="Rectangle: Rounded Corners 10">
@@ -15991,7 +16001,7 @@
             </p:txBody>
           </p:sp>
         </mc:Choice>
-        <mc:Fallback>
+        <mc:Fallback xmlns="">
           <p:sp>
             <p:nvSpPr>
               <p:cNvPr id="11" name="Rectangle: Rounded Corners 10">
@@ -16787,8 +16797,8 @@
           </a:p>
         </p:txBody>
       </p:sp>
-      <mc:AlternateContent xmlns:mc="http://schemas.openxmlformats.org/markup-compatibility/2006">
-        <mc:Choice xmlns:a14="http://schemas.microsoft.com/office/drawing/2010/main" Requires="a14">
+      <mc:AlternateContent xmlns:mc="http://schemas.openxmlformats.org/markup-compatibility/2006" xmlns:a14="http://schemas.microsoft.com/office/drawing/2010/main">
+        <mc:Choice Requires="a14">
           <p:sp>
             <p:nvSpPr>
               <p:cNvPr id="3" name="Content Placeholder 2"/>
@@ -18092,7 +18102,7 @@
             </p:txBody>
           </p:sp>
         </mc:Choice>
-        <mc:Fallback>
+        <mc:Fallback xmlns="">
           <p:sp>
             <p:nvSpPr>
               <p:cNvPr id="3" name="Content Placeholder 2"/>
@@ -19728,8 +19738,8 @@
           </a:p>
         </p:txBody>
       </p:sp>
-      <mc:AlternateContent xmlns:mc="http://schemas.openxmlformats.org/markup-compatibility/2006">
-        <mc:Choice xmlns:a14="http://schemas.microsoft.com/office/drawing/2010/main" Requires="a14">
+      <mc:AlternateContent xmlns:mc="http://schemas.openxmlformats.org/markup-compatibility/2006" xmlns:a14="http://schemas.microsoft.com/office/drawing/2010/main">
+        <mc:Choice Requires="a14">
           <p:sp>
             <p:nvSpPr>
               <p:cNvPr id="3" name="Content Placeholder 2">
@@ -20888,7 +20898,7 @@
             </p:txBody>
           </p:sp>
         </mc:Choice>
-        <mc:Fallback>
+        <mc:Fallback xmlns="">
           <p:sp>
             <p:nvSpPr>
               <p:cNvPr id="3" name="Content Placeholder 2">
@@ -21049,8 +21059,8 @@
           </a:p>
         </p:txBody>
       </p:sp>
-      <mc:AlternateContent xmlns:mc="http://schemas.openxmlformats.org/markup-compatibility/2006">
-        <mc:Choice xmlns:a14="http://schemas.microsoft.com/office/drawing/2010/main" Requires="a14">
+      <mc:AlternateContent xmlns:mc="http://schemas.openxmlformats.org/markup-compatibility/2006" xmlns:a14="http://schemas.microsoft.com/office/drawing/2010/main">
+        <mc:Choice Requires="a14">
           <p:sp>
             <p:nvSpPr>
               <p:cNvPr id="3" name="Content Placeholder 2">
@@ -22171,7 +22181,7 @@
             </p:txBody>
           </p:sp>
         </mc:Choice>
-        <mc:Fallback>
+        <mc:Fallback xmlns="">
           <p:sp>
             <p:nvSpPr>
               <p:cNvPr id="3" name="Content Placeholder 2">
@@ -22561,8 +22571,8 @@
           </a:p>
         </p:txBody>
       </p:sp>
-      <mc:AlternateContent xmlns:mc="http://schemas.openxmlformats.org/markup-compatibility/2006">
-        <mc:Choice xmlns:a14="http://schemas.microsoft.com/office/drawing/2010/main" Requires="a14">
+      <mc:AlternateContent xmlns:mc="http://schemas.openxmlformats.org/markup-compatibility/2006" xmlns:a14="http://schemas.microsoft.com/office/drawing/2010/main">
+        <mc:Choice Requires="a14">
           <p:sp>
             <p:nvSpPr>
               <p:cNvPr id="9" name="Rounded Rectangle 8"/>
@@ -22715,7 +22725,7 @@
             </p:txBody>
           </p:sp>
         </mc:Choice>
-        <mc:Fallback>
+        <mc:Fallback xmlns="">
           <p:sp>
             <p:nvSpPr>
               <p:cNvPr id="9" name="Rounded Rectangle 8"/>
@@ -22759,8 +22769,8 @@
           </p:sp>
         </mc:Fallback>
       </mc:AlternateContent>
-      <mc:AlternateContent xmlns:mc="http://schemas.openxmlformats.org/markup-compatibility/2006">
-        <mc:Choice xmlns:a14="http://schemas.microsoft.com/office/drawing/2010/main" Requires="a14">
+      <mc:AlternateContent xmlns:mc="http://schemas.openxmlformats.org/markup-compatibility/2006" xmlns:a14="http://schemas.microsoft.com/office/drawing/2010/main">
+        <mc:Choice Requires="a14">
           <p:sp>
             <p:nvSpPr>
               <p:cNvPr id="10" name="Rounded Rectangle 9"/>
@@ -22870,7 +22880,7 @@
             </p:txBody>
           </p:sp>
         </mc:Choice>
-        <mc:Fallback>
+        <mc:Fallback xmlns="">
           <p:sp>
             <p:nvSpPr>
               <p:cNvPr id="10" name="Rounded Rectangle 9"/>
@@ -22909,8 +22919,8 @@
           </p:sp>
         </mc:Fallback>
       </mc:AlternateContent>
-      <mc:AlternateContent xmlns:mc="http://schemas.openxmlformats.org/markup-compatibility/2006">
-        <mc:Choice xmlns:a14="http://schemas.microsoft.com/office/drawing/2010/main" Requires="a14">
+      <mc:AlternateContent xmlns:mc="http://schemas.openxmlformats.org/markup-compatibility/2006" xmlns:a14="http://schemas.microsoft.com/office/drawing/2010/main">
+        <mc:Choice Requires="a14">
           <p:sp>
             <p:nvSpPr>
               <p:cNvPr id="13" name="Rounded Rectangle 12"/>
@@ -23020,7 +23030,7 @@
             </p:txBody>
           </p:sp>
         </mc:Choice>
-        <mc:Fallback>
+        <mc:Fallback xmlns="">
           <p:sp>
             <p:nvSpPr>
               <p:cNvPr id="13" name="Rounded Rectangle 12"/>
@@ -23059,8 +23069,8 @@
           </p:sp>
         </mc:Fallback>
       </mc:AlternateContent>
-      <mc:AlternateContent xmlns:mc="http://schemas.openxmlformats.org/markup-compatibility/2006">
-        <mc:Choice xmlns:a14="http://schemas.microsoft.com/office/drawing/2010/main" Requires="a14">
+      <mc:AlternateContent xmlns:mc="http://schemas.openxmlformats.org/markup-compatibility/2006" xmlns:a14="http://schemas.microsoft.com/office/drawing/2010/main">
+        <mc:Choice Requires="a14">
           <p:sp>
             <p:nvSpPr>
               <p:cNvPr id="14" name="Rounded Rectangle 13"/>
@@ -23170,7 +23180,7 @@
             </p:txBody>
           </p:sp>
         </mc:Choice>
-        <mc:Fallback>
+        <mc:Fallback xmlns="">
           <p:sp>
             <p:nvSpPr>
               <p:cNvPr id="14" name="Rounded Rectangle 13"/>
@@ -23551,8 +23561,8 @@
           </a:fontRef>
         </p:style>
       </p:cxnSp>
-      <mc:AlternateContent xmlns:mc="http://schemas.openxmlformats.org/markup-compatibility/2006">
-        <mc:Choice xmlns:a14="http://schemas.microsoft.com/office/drawing/2010/main" Requires="a14">
+      <mc:AlternateContent xmlns:mc="http://schemas.openxmlformats.org/markup-compatibility/2006" xmlns:a14="http://schemas.microsoft.com/office/drawing/2010/main">
+        <mc:Choice Requires="a14">
           <p:sp>
             <p:nvSpPr>
               <p:cNvPr id="39" name="TextBox 38"/>
@@ -23680,7 +23690,7 @@
             </p:txBody>
           </p:sp>
         </mc:Choice>
-        <mc:Fallback>
+        <mc:Fallback xmlns="">
           <p:sp>
             <p:nvSpPr>
               <p:cNvPr id="39" name="TextBox 38"/>
@@ -23806,8 +23816,8 @@
           </a:p>
         </p:txBody>
       </p:sp>
-      <mc:AlternateContent xmlns:mc="http://schemas.openxmlformats.org/markup-compatibility/2006">
-        <mc:Choice xmlns:a14="http://schemas.microsoft.com/office/drawing/2010/main" Requires="a14">
+      <mc:AlternateContent xmlns:mc="http://schemas.openxmlformats.org/markup-compatibility/2006" xmlns:a14="http://schemas.microsoft.com/office/drawing/2010/main">
+        <mc:Choice Requires="a14">
           <p:sp>
             <p:nvSpPr>
               <p:cNvPr id="3" name="Content Placeholder 2">
@@ -24779,7 +24789,7 @@
             </p:txBody>
           </p:sp>
         </mc:Choice>
-        <mc:Fallback>
+        <mc:Fallback xmlns="">
           <p:sp>
             <p:nvSpPr>
               <p:cNvPr id="3" name="Content Placeholder 2">
@@ -25002,8 +25012,8 @@
           </a:p>
         </p:txBody>
       </p:sp>
-      <mc:AlternateContent xmlns:mc="http://schemas.openxmlformats.org/markup-compatibility/2006">
-        <mc:Choice xmlns:a14="http://schemas.microsoft.com/office/drawing/2010/main" Requires="a14">
+      <mc:AlternateContent xmlns:mc="http://schemas.openxmlformats.org/markup-compatibility/2006" xmlns:a14="http://schemas.microsoft.com/office/drawing/2010/main">
+        <mc:Choice Requires="a14">
           <p:sp>
             <p:nvSpPr>
               <p:cNvPr id="9" name="Rounded Rectangle 8"/>
@@ -25111,7 +25121,7 @@
             </p:txBody>
           </p:sp>
         </mc:Choice>
-        <mc:Fallback>
+        <mc:Fallback xmlns="">
           <p:sp>
             <p:nvSpPr>
               <p:cNvPr id="9" name="Rounded Rectangle 8"/>
@@ -25150,8 +25160,8 @@
           </p:sp>
         </mc:Fallback>
       </mc:AlternateContent>
-      <mc:AlternateContent xmlns:mc="http://schemas.openxmlformats.org/markup-compatibility/2006">
-        <mc:Choice xmlns:a14="http://schemas.microsoft.com/office/drawing/2010/main" Requires="a14">
+      <mc:AlternateContent xmlns:mc="http://schemas.openxmlformats.org/markup-compatibility/2006" xmlns:a14="http://schemas.microsoft.com/office/drawing/2010/main">
+        <mc:Choice Requires="a14">
           <p:sp>
             <p:nvSpPr>
               <p:cNvPr id="10" name="Rounded Rectangle 9"/>
@@ -25261,7 +25271,7 @@
             </p:txBody>
           </p:sp>
         </mc:Choice>
-        <mc:Fallback>
+        <mc:Fallback xmlns="">
           <p:sp>
             <p:nvSpPr>
               <p:cNvPr id="10" name="Rounded Rectangle 9"/>
@@ -25300,8 +25310,8 @@
           </p:sp>
         </mc:Fallback>
       </mc:AlternateContent>
-      <mc:AlternateContent xmlns:mc="http://schemas.openxmlformats.org/markup-compatibility/2006">
-        <mc:Choice xmlns:a14="http://schemas.microsoft.com/office/drawing/2010/main" Requires="a14">
+      <mc:AlternateContent xmlns:mc="http://schemas.openxmlformats.org/markup-compatibility/2006" xmlns:a14="http://schemas.microsoft.com/office/drawing/2010/main">
+        <mc:Choice Requires="a14">
           <p:sp>
             <p:nvSpPr>
               <p:cNvPr id="13" name="Rounded Rectangle 12"/>
@@ -25411,7 +25421,7 @@
             </p:txBody>
           </p:sp>
         </mc:Choice>
-        <mc:Fallback>
+        <mc:Fallback xmlns="">
           <p:sp>
             <p:nvSpPr>
               <p:cNvPr id="13" name="Rounded Rectangle 12"/>
@@ -25450,8 +25460,8 @@
           </p:sp>
         </mc:Fallback>
       </mc:AlternateContent>
-      <mc:AlternateContent xmlns:mc="http://schemas.openxmlformats.org/markup-compatibility/2006">
-        <mc:Choice xmlns:a14="http://schemas.microsoft.com/office/drawing/2010/main" Requires="a14">
+      <mc:AlternateContent xmlns:mc="http://schemas.openxmlformats.org/markup-compatibility/2006" xmlns:a14="http://schemas.microsoft.com/office/drawing/2010/main">
+        <mc:Choice Requires="a14">
           <p:sp>
             <p:nvSpPr>
               <p:cNvPr id="14" name="Rounded Rectangle 13"/>
@@ -25561,7 +25571,7 @@
             </p:txBody>
           </p:sp>
         </mc:Choice>
-        <mc:Fallback>
+        <mc:Fallback xmlns="">
           <p:sp>
             <p:nvSpPr>
               <p:cNvPr id="14" name="Rounded Rectangle 13"/>
@@ -25942,8 +25952,8 @@
           </a:fontRef>
         </p:style>
       </p:cxnSp>
-      <mc:AlternateContent xmlns:mc="http://schemas.openxmlformats.org/markup-compatibility/2006">
-        <mc:Choice xmlns:a14="http://schemas.microsoft.com/office/drawing/2010/main" Requires="a14">
+      <mc:AlternateContent xmlns:mc="http://schemas.openxmlformats.org/markup-compatibility/2006" xmlns:a14="http://schemas.microsoft.com/office/drawing/2010/main">
+        <mc:Choice Requires="a14">
           <p:sp>
             <p:nvSpPr>
               <p:cNvPr id="39" name="TextBox 38"/>
@@ -26031,7 +26041,7 @@
             </p:txBody>
           </p:sp>
         </mc:Choice>
-        <mc:Fallback>
+        <mc:Fallback xmlns="">
           <p:sp>
             <p:nvSpPr>
               <p:cNvPr id="39" name="TextBox 38"/>
@@ -26955,15 +26965,6 @@
 </file>
 
 <file path=customXml/item1.xml><?xml version="1.0" encoding="utf-8"?>
-<?mso-contentType ?>
-<FormTemplates xmlns="http://schemas.microsoft.com/sharepoint/v3/contenttype/forms">
-  <Display>DocumentLibraryForm</Display>
-  <Edit>DocumentLibraryForm</Edit>
-  <New>DocumentLibraryForm</New>
-</FormTemplates>
-</file>
-
-<file path=customXml/item2.xml><?xml version="1.0" encoding="utf-8"?>
 <ct:contentTypeSchema xmlns:ct="http://schemas.microsoft.com/office/2006/metadata/contentType" xmlns:ma="http://schemas.microsoft.com/office/2006/metadata/properties/metaAttributes" ct:_="" ma:_="" ma:contentTypeName="Document" ma:contentTypeID="0x010100E6AA5C57F8EADE4E9CD6BB064C0C3195" ma:contentTypeVersion="16" ma:contentTypeDescription="Create a new document." ma:contentTypeScope="" ma:versionID="bb51c19a58f458ddcddd050a07659236">
   <xsd:schema xmlns:xsd="http://www.w3.org/2001/XMLSchema" xmlns:xs="http://www.w3.org/2001/XMLSchema" xmlns:p="http://schemas.microsoft.com/office/2006/metadata/properties" xmlns:ns2="0e422b70-e85d-4377-8ee0-b6227433d381" xmlns:ns3="199f642e-5af9-486c-ac06-f366742ef41a" targetNamespace="http://schemas.microsoft.com/office/2006/metadata/properties" ma:root="true" ma:fieldsID="0ee7a3bac0352a48a43420936abd968a" ns2:_="" ns3:_="">
     <xsd:import namespace="0e422b70-e85d-4377-8ee0-b6227433d381"/>
@@ -27204,6 +27205,15 @@
 </ct:contentTypeSchema>
 </file>
 
+<file path=customXml/item2.xml><?xml version="1.0" encoding="utf-8"?>
+<?mso-contentType ?>
+<FormTemplates xmlns="http://schemas.microsoft.com/sharepoint/v3/contenttype/forms">
+  <Display>DocumentLibraryForm</Display>
+  <Edit>DocumentLibraryForm</Edit>
+  <New>DocumentLibraryForm</New>
+</FormTemplates>
+</file>
+
 <file path=customXml/item3.xml><?xml version="1.0" encoding="utf-8"?>
 <p:properties xmlns:p="http://schemas.microsoft.com/office/2006/metadata/properties" xmlns:xsi="http://www.w3.org/2001/XMLSchema-instance" xmlns:pc="http://schemas.microsoft.com/office/infopath/2007/PartnerControls">
   <documentManagement>
@@ -27216,14 +27226,6 @@
 </file>
 
 <file path=customXml/itemProps1.xml><?xml version="1.0" encoding="utf-8"?>
-<ds:datastoreItem xmlns:ds="http://schemas.openxmlformats.org/officeDocument/2006/customXml" ds:itemID="{67DD9E9F-9EEB-4105-B29B-819486C2855A}">
-  <ds:schemaRefs>
-    <ds:schemaRef ds:uri="http://schemas.microsoft.com/sharepoint/v3/contenttype/forms"/>
-  </ds:schemaRefs>
-</ds:datastoreItem>
-</file>
-
-<file path=customXml/itemProps2.xml><?xml version="1.0" encoding="utf-8"?>
 <ds:datastoreItem xmlns:ds="http://schemas.openxmlformats.org/officeDocument/2006/customXml" ds:itemID="{04B464EA-1576-49DD-9675-1E3399D4D196}">
   <ds:schemaRefs>
     <ds:schemaRef ds:uri="http://schemas.microsoft.com/office/2006/metadata/contentType"/>
@@ -27238,6 +27240,14 @@
     <ds:schemaRef ds:uri="http://purl.org/dc/elements/1.1/"/>
     <ds:schemaRef ds:uri="http://purl.org/dc/terms/"/>
     <ds:schemaRef ds:uri="http://schemas.microsoft.com/internal/obd"/>
+  </ds:schemaRefs>
+</ds:datastoreItem>
+</file>
+
+<file path=customXml/itemProps2.xml><?xml version="1.0" encoding="utf-8"?>
+<ds:datastoreItem xmlns:ds="http://schemas.openxmlformats.org/officeDocument/2006/customXml" ds:itemID="{67DD9E9F-9EEB-4105-B29B-819486C2855A}">
+  <ds:schemaRefs>
+    <ds:schemaRef ds:uri="http://schemas.microsoft.com/sharepoint/v3/contenttype/forms"/>
   </ds:schemaRefs>
 </ds:datastoreItem>
 </file>

--- a/3.2 SEATS.pptx
+++ b/3.2 SEATS.pptx
@@ -5,10 +5,10 @@
     <p:sldMasterId id="2147483648" r:id="rId4"/>
   </p:sldMasterIdLst>
   <p:notesMasterIdLst>
-    <p:notesMasterId r:id="rId38"/>
+    <p:notesMasterId r:id="rId40"/>
   </p:notesMasterIdLst>
   <p:handoutMasterIdLst>
-    <p:handoutMasterId r:id="rId39"/>
+    <p:handoutMasterId r:id="rId41"/>
   </p:handoutMasterIdLst>
   <p:sldIdLst>
     <p:sldId id="256" r:id="rId5"/>
@@ -30,25 +30,27 @@
     <p:sldId id="283" r:id="rId21"/>
     <p:sldId id="291" r:id="rId22"/>
     <p:sldId id="267" r:id="rId23"/>
-    <p:sldId id="285" r:id="rId24"/>
-    <p:sldId id="286" r:id="rId25"/>
-    <p:sldId id="292" r:id="rId26"/>
-    <p:sldId id="296" r:id="rId27"/>
-    <p:sldId id="297" r:id="rId28"/>
-    <p:sldId id="298" r:id="rId29"/>
-    <p:sldId id="299" r:id="rId30"/>
-    <p:sldId id="264" r:id="rId31"/>
-    <p:sldId id="260" r:id="rId32"/>
-    <p:sldId id="274" r:id="rId33"/>
-    <p:sldId id="273" r:id="rId34"/>
-    <p:sldId id="275" r:id="rId35"/>
-    <p:sldId id="300" r:id="rId36"/>
-    <p:sldId id="261" r:id="rId37"/>
+    <p:sldId id="304" r:id="rId24"/>
+    <p:sldId id="305" r:id="rId25"/>
+    <p:sldId id="285" r:id="rId26"/>
+    <p:sldId id="286" r:id="rId27"/>
+    <p:sldId id="292" r:id="rId28"/>
+    <p:sldId id="296" r:id="rId29"/>
+    <p:sldId id="297" r:id="rId30"/>
+    <p:sldId id="298" r:id="rId31"/>
+    <p:sldId id="299" r:id="rId32"/>
+    <p:sldId id="264" r:id="rId33"/>
+    <p:sldId id="260" r:id="rId34"/>
+    <p:sldId id="274" r:id="rId35"/>
+    <p:sldId id="273" r:id="rId36"/>
+    <p:sldId id="275" r:id="rId37"/>
+    <p:sldId id="300" r:id="rId38"/>
+    <p:sldId id="261" r:id="rId39"/>
   </p:sldIdLst>
   <p:sldSz cx="12192000" cy="6858000"/>
   <p:notesSz cx="6858000" cy="9144000"/>
   <p:custDataLst>
-    <p:tags r:id="rId40"/>
+    <p:tags r:id="rId42"/>
   </p:custDataLst>
   <p:defaultTextStyle>
     <a:defPPr marR="0" lvl="0" algn="l" rtl="0">
@@ -406,7 +408,7 @@
           <a:p>
             <a:fld id="{0CBFB8CE-488C-4A7E-87F2-3AF6127C51C1}" type="datetimeFigureOut">
               <a:rPr lang="en-IE" smtClean="0"/>
-              <a:t>28/09/2026</a:t>
+              <a:t>29/09/2026</a:t>
             </a:fld>
             <a:endParaRPr lang="en-IE"/>
           </a:p>
@@ -1776,7 +1778,7 @@
                 <a:cs typeface="Calibri"/>
                 <a:sym typeface="Calibri"/>
               </a:rPr>
-              <a:t>21</a:t>
+              <a:t>23</a:t>
             </a:fld>
             <a:endParaRPr lang="en-GB" sz="1200" b="0" i="0" u="none" strike="noStrike" cap="none">
               <a:solidFill>
@@ -6341,8 +6343,12 @@
           <a:lstStyle/>
           <a:p>
             <a:r>
+              <a:rPr lang="en-GB" noProof="0"/>
+              <a:t>3.2 Model-based </a:t>
+            </a:r>
+            <a:r>
               <a:rPr lang="en-GB" noProof="0" dirty="0"/>
-              <a:t>Model-based decomposition</a:t>
+              <a:t>decomposition</a:t>
             </a:r>
           </a:p>
         </p:txBody>
@@ -14367,6 +14373,3839 @@
       </p:grpSpPr>
       <p:sp>
         <p:nvSpPr>
+          <p:cNvPr id="2" name="Titre 1">
+            <a:extLst>
+              <a:ext uri="{FF2B5EF4-FFF2-40B4-BE49-F238E27FC236}">
+                <a16:creationId xmlns:a16="http://schemas.microsoft.com/office/drawing/2014/main" id="{A733737B-F45D-7007-2347-205509A1F884}"/>
+              </a:ext>
+            </a:extLst>
+          </p:cNvPr>
+          <p:cNvSpPr>
+            <a:spLocks noGrp="1"/>
+          </p:cNvSpPr>
+          <p:nvPr>
+            <p:ph type="title"/>
+          </p:nvPr>
+        </p:nvSpPr>
+        <p:spPr/>
+        <p:txBody>
+          <a:bodyPr/>
+          <a:lstStyle/>
+          <a:p>
+            <a:r>
+              <a:rPr lang="en-GB" dirty="0"/>
+              <a:t>Components</a:t>
+            </a:r>
+          </a:p>
+        </p:txBody>
+      </p:sp>
+      <p:sp>
+        <p:nvSpPr>
+          <p:cNvPr id="3" name="Espace réservé du numéro de diapositive 2">
+            <a:extLst>
+              <a:ext uri="{FF2B5EF4-FFF2-40B4-BE49-F238E27FC236}">
+                <a16:creationId xmlns:a16="http://schemas.microsoft.com/office/drawing/2014/main" id="{D8BF47E9-DCF4-BDFB-D0B9-9BE209C89CED}"/>
+              </a:ext>
+            </a:extLst>
+          </p:cNvPr>
+          <p:cNvSpPr>
+            <a:spLocks noGrp="1"/>
+          </p:cNvSpPr>
+          <p:nvPr>
+            <p:ph type="sldNum" idx="12"/>
+          </p:nvPr>
+        </p:nvSpPr>
+        <p:spPr/>
+        <p:txBody>
+          <a:bodyPr/>
+          <a:lstStyle/>
+          <a:p>
+            <a:fld id="{00000000-1234-1234-1234-123412341234}" type="slidenum">
+              <a:rPr lang="en-GB" smtClean="0"/>
+              <a:pPr/>
+              <a:t>20</a:t>
+            </a:fld>
+            <a:endParaRPr lang="en-GB"/>
+          </a:p>
+        </p:txBody>
+      </p:sp>
+      <mc:AlternateContent xmlns:mc="http://schemas.openxmlformats.org/markup-compatibility/2006">
+        <mc:Choice xmlns:a14="http://schemas.microsoft.com/office/drawing/2010/main" Requires="a14">
+          <p:sp>
+            <p:nvSpPr>
+              <p:cNvPr id="4" name="Espace réservé du contenu 3">
+                <a:extLst>
+                  <a:ext uri="{FF2B5EF4-FFF2-40B4-BE49-F238E27FC236}">
+                    <a16:creationId xmlns:a16="http://schemas.microsoft.com/office/drawing/2014/main" id="{8FF581F2-9464-692F-874C-7ECD83894581}"/>
+                  </a:ext>
+                </a:extLst>
+              </p:cNvPr>
+              <p:cNvSpPr>
+                <a:spLocks noGrp="1"/>
+              </p:cNvSpPr>
+              <p:nvPr>
+                <p:ph sz="half" idx="2"/>
+              </p:nvPr>
+            </p:nvSpPr>
+            <p:spPr>
+              <a:xfrm>
+                <a:off x="1102952" y="1604914"/>
+                <a:ext cx="3688683" cy="1474483"/>
+              </a:xfrm>
+              <a:ln>
+                <a:solidFill>
+                  <a:schemeClr val="tx1"/>
+                </a:solidFill>
+              </a:ln>
+            </p:spPr>
+            <p:txBody>
+              <a:bodyPr/>
+              <a:lstStyle/>
+              <a:p>
+                <a14:m>
+                  <m:oMath xmlns:m="http://schemas.openxmlformats.org/officeDocument/2006/math">
+                    <m:r>
+                      <m:rPr>
+                        <m:sty m:val="p"/>
+                      </m:rPr>
+                      <a:rPr lang="el-GR" i="1" smtClean="0">
+                        <a:latin typeface="Cambria Math" panose="02040503050406030204" pitchFamily="18" charset="0"/>
+                        <a:ea typeface="Cambria Math" panose="02040503050406030204" pitchFamily="18" charset="0"/>
+                      </a:rPr>
+                      <m:t>Φ</m:t>
+                    </m:r>
+                    <m:r>
+                      <a:rPr lang="fr-BE" i="1">
+                        <a:latin typeface="Cambria Math" panose="02040503050406030204" pitchFamily="18" charset="0"/>
+                      </a:rPr>
+                      <m:t>(</m:t>
+                    </m:r>
+                    <m:r>
+                      <a:rPr lang="fr-BE" i="1">
+                        <a:latin typeface="Cambria Math" panose="02040503050406030204" pitchFamily="18" charset="0"/>
+                      </a:rPr>
+                      <m:t>𝐵</m:t>
+                    </m:r>
+                    <m:r>
+                      <a:rPr lang="fr-BE" i="1">
+                        <a:latin typeface="Cambria Math" panose="02040503050406030204" pitchFamily="18" charset="0"/>
+                      </a:rPr>
+                      <m:t>)</m:t>
+                    </m:r>
+                    <m:sSub>
+                      <m:sSubPr>
+                        <m:ctrlPr>
+                          <a:rPr lang="fr-BE" b="0" i="1" smtClean="0">
+                            <a:latin typeface="Cambria Math" panose="02040503050406030204" pitchFamily="18" charset="0"/>
+                          </a:rPr>
+                        </m:ctrlPr>
+                      </m:sSubPr>
+                      <m:e>
+                        <m:r>
+                          <a:rPr lang="fr-BE" b="0" i="1" smtClean="0">
+                            <a:latin typeface="Cambria Math" panose="02040503050406030204" pitchFamily="18" charset="0"/>
+                          </a:rPr>
+                          <m:t>𝑦</m:t>
+                        </m:r>
+                      </m:e>
+                      <m:sub>
+                        <m:r>
+                          <a:rPr lang="fr-BE" i="1">
+                            <a:latin typeface="Cambria Math" panose="02040503050406030204" pitchFamily="18" charset="0"/>
+                          </a:rPr>
+                          <m:t>𝑡</m:t>
+                        </m:r>
+                      </m:sub>
+                    </m:sSub>
+                    <m:r>
+                      <a:rPr lang="fr-BE" i="1">
+                        <a:latin typeface="Cambria Math" panose="02040503050406030204" pitchFamily="18" charset="0"/>
+                      </a:rPr>
+                      <m:t>=</m:t>
+                    </m:r>
+                    <m:r>
+                      <m:rPr>
+                        <m:sty m:val="p"/>
+                      </m:rPr>
+                      <a:rPr lang="el-GR" i="1" smtClean="0">
+                        <a:latin typeface="Cambria Math" panose="02040503050406030204" pitchFamily="18" charset="0"/>
+                        <a:ea typeface="Cambria Math" panose="02040503050406030204" pitchFamily="18" charset="0"/>
+                      </a:rPr>
+                      <m:t>Θ</m:t>
+                    </m:r>
+                    <m:r>
+                      <a:rPr lang="fr-BE" i="1">
+                        <a:latin typeface="Cambria Math" panose="02040503050406030204" pitchFamily="18" charset="0"/>
+                      </a:rPr>
+                      <m:t>(</m:t>
+                    </m:r>
+                    <m:r>
+                      <a:rPr lang="fr-BE" i="1">
+                        <a:latin typeface="Cambria Math" panose="02040503050406030204" pitchFamily="18" charset="0"/>
+                      </a:rPr>
+                      <m:t>𝐵</m:t>
+                    </m:r>
+                    <m:r>
+                      <a:rPr lang="fr-BE" i="1">
+                        <a:latin typeface="Cambria Math" panose="02040503050406030204" pitchFamily="18" charset="0"/>
+                      </a:rPr>
+                      <m:t>)</m:t>
+                    </m:r>
+                    <m:sSub>
+                      <m:sSubPr>
+                        <m:ctrlPr>
+                          <a:rPr lang="en-GB" i="1">
+                            <a:latin typeface="Cambria Math" panose="02040503050406030204" pitchFamily="18" charset="0"/>
+                            <a:ea typeface="Cambria Math" panose="02040503050406030204" pitchFamily="18" charset="0"/>
+                          </a:rPr>
+                        </m:ctrlPr>
+                      </m:sSubPr>
+                      <m:e>
+                        <m:r>
+                          <a:rPr lang="en-GB" i="1">
+                            <a:latin typeface="Cambria Math" panose="02040503050406030204" pitchFamily="18" charset="0"/>
+                            <a:ea typeface="Cambria Math" panose="02040503050406030204" pitchFamily="18" charset="0"/>
+                          </a:rPr>
+                          <m:t>𝜀</m:t>
+                        </m:r>
+                      </m:e>
+                      <m:sub>
+                        <m:r>
+                          <a:rPr lang="fr-BE" i="1">
+                            <a:latin typeface="Cambria Math" panose="02040503050406030204" pitchFamily="18" charset="0"/>
+                          </a:rPr>
+                          <m:t>𝑡</m:t>
+                        </m:r>
+                      </m:sub>
+                    </m:sSub>
+                  </m:oMath>
+                </a14:m>
+                <a:endParaRPr lang="en-GB" dirty="0"/>
+              </a:p>
+              <a:p>
+                <a14:m>
+                  <m:oMath xmlns:m="http://schemas.openxmlformats.org/officeDocument/2006/math">
+                    <m:sSub>
+                      <m:sSubPr>
+                        <m:ctrlPr>
+                          <a:rPr lang="el-GR" i="1">
+                            <a:latin typeface="Cambria Math" panose="02040503050406030204" pitchFamily="18" charset="0"/>
+                            <a:ea typeface="Cambria Math" panose="02040503050406030204" pitchFamily="18" charset="0"/>
+                          </a:rPr>
+                        </m:ctrlPr>
+                      </m:sSubPr>
+                      <m:e>
+                        <m:r>
+                          <m:rPr>
+                            <m:sty m:val="p"/>
+                          </m:rPr>
+                          <a:rPr lang="el-GR" i="1">
+                            <a:latin typeface="Cambria Math" panose="02040503050406030204" pitchFamily="18" charset="0"/>
+                            <a:ea typeface="Cambria Math" panose="02040503050406030204" pitchFamily="18" charset="0"/>
+                          </a:rPr>
+                          <m:t>Φ</m:t>
+                        </m:r>
+                      </m:e>
+                      <m:sub>
+                        <m:r>
+                          <a:rPr lang="fr-BE" b="0" i="1" smtClean="0">
+                            <a:latin typeface="Cambria Math" panose="02040503050406030204" pitchFamily="18" charset="0"/>
+                          </a:rPr>
+                          <m:t>𝑠</m:t>
+                        </m:r>
+                      </m:sub>
+                    </m:sSub>
+                    <m:r>
+                      <a:rPr lang="fr-BE" b="0" i="1" smtClean="0">
+                        <a:latin typeface="Cambria Math" panose="02040503050406030204" pitchFamily="18" charset="0"/>
+                      </a:rPr>
+                      <m:t>(</m:t>
+                    </m:r>
+                    <m:r>
+                      <a:rPr lang="fr-BE" b="0" i="1" smtClean="0">
+                        <a:latin typeface="Cambria Math" panose="02040503050406030204" pitchFamily="18" charset="0"/>
+                      </a:rPr>
+                      <m:t>𝐵</m:t>
+                    </m:r>
+                    <m:r>
+                      <a:rPr lang="fr-BE" b="0" i="1" smtClean="0">
+                        <a:latin typeface="Cambria Math" panose="02040503050406030204" pitchFamily="18" charset="0"/>
+                      </a:rPr>
+                      <m:t>)</m:t>
+                    </m:r>
+                    <m:sSub>
+                      <m:sSubPr>
+                        <m:ctrlPr>
+                          <a:rPr lang="fr-BE" b="0" i="1" smtClean="0">
+                            <a:latin typeface="Cambria Math" panose="02040503050406030204" pitchFamily="18" charset="0"/>
+                          </a:rPr>
+                        </m:ctrlPr>
+                      </m:sSubPr>
+                      <m:e>
+                        <m:r>
+                          <a:rPr lang="fr-BE" b="0" i="1" smtClean="0">
+                            <a:latin typeface="Cambria Math" panose="02040503050406030204" pitchFamily="18" charset="0"/>
+                          </a:rPr>
+                          <m:t>𝑠</m:t>
+                        </m:r>
+                      </m:e>
+                      <m:sub>
+                        <m:r>
+                          <a:rPr lang="fr-BE" b="0" i="1" smtClean="0">
+                            <a:latin typeface="Cambria Math" panose="02040503050406030204" pitchFamily="18" charset="0"/>
+                          </a:rPr>
+                          <m:t>𝑡</m:t>
+                        </m:r>
+                      </m:sub>
+                    </m:sSub>
+                    <m:r>
+                      <a:rPr lang="fr-BE" b="0" i="1" smtClean="0">
+                        <a:latin typeface="Cambria Math" panose="02040503050406030204" pitchFamily="18" charset="0"/>
+                      </a:rPr>
+                      <m:t>=</m:t>
+                    </m:r>
+                    <m:sSub>
+                      <m:sSubPr>
+                        <m:ctrlPr>
+                          <a:rPr lang="el-GR" i="1">
+                            <a:latin typeface="Cambria Math" panose="02040503050406030204" pitchFamily="18" charset="0"/>
+                            <a:ea typeface="Cambria Math" panose="02040503050406030204" pitchFamily="18" charset="0"/>
+                          </a:rPr>
+                        </m:ctrlPr>
+                      </m:sSubPr>
+                      <m:e>
+                        <m:r>
+                          <m:rPr>
+                            <m:sty m:val="p"/>
+                          </m:rPr>
+                          <a:rPr lang="el-GR" i="1">
+                            <a:latin typeface="Cambria Math" panose="02040503050406030204" pitchFamily="18" charset="0"/>
+                            <a:ea typeface="Cambria Math" panose="02040503050406030204" pitchFamily="18" charset="0"/>
+                          </a:rPr>
+                          <m:t>Θ</m:t>
+                        </m:r>
+                      </m:e>
+                      <m:sub>
+                        <m:r>
+                          <a:rPr lang="fr-BE" b="0" i="1" smtClean="0">
+                            <a:latin typeface="Cambria Math" panose="02040503050406030204" pitchFamily="18" charset="0"/>
+                          </a:rPr>
+                          <m:t>𝑠</m:t>
+                        </m:r>
+                      </m:sub>
+                    </m:sSub>
+                    <m:r>
+                      <a:rPr lang="fr-BE" b="0" i="1" smtClean="0">
+                        <a:latin typeface="Cambria Math" panose="02040503050406030204" pitchFamily="18" charset="0"/>
+                      </a:rPr>
+                      <m:t>(</m:t>
+                    </m:r>
+                    <m:r>
+                      <a:rPr lang="fr-BE" b="0" i="1" smtClean="0">
+                        <a:latin typeface="Cambria Math" panose="02040503050406030204" pitchFamily="18" charset="0"/>
+                      </a:rPr>
+                      <m:t>𝐵</m:t>
+                    </m:r>
+                    <m:r>
+                      <a:rPr lang="fr-BE" b="0" i="1" smtClean="0">
+                        <a:latin typeface="Cambria Math" panose="02040503050406030204" pitchFamily="18" charset="0"/>
+                      </a:rPr>
+                      <m:t>)</m:t>
+                    </m:r>
+                    <m:sSub>
+                      <m:sSubPr>
+                        <m:ctrlPr>
+                          <a:rPr lang="en-GB" i="1">
+                            <a:latin typeface="Cambria Math" panose="02040503050406030204" pitchFamily="18" charset="0"/>
+                            <a:ea typeface="Cambria Math" panose="02040503050406030204" pitchFamily="18" charset="0"/>
+                          </a:rPr>
+                        </m:ctrlPr>
+                      </m:sSubPr>
+                      <m:e>
+                        <m:r>
+                          <a:rPr lang="en-GB" i="1">
+                            <a:latin typeface="Cambria Math" panose="02040503050406030204" pitchFamily="18" charset="0"/>
+                            <a:ea typeface="Cambria Math" panose="02040503050406030204" pitchFamily="18" charset="0"/>
+                          </a:rPr>
+                          <m:t>𝜀</m:t>
+                        </m:r>
+                      </m:e>
+                      <m:sub>
+                        <m:r>
+                          <a:rPr lang="fr-BE" b="0" i="1" smtClean="0">
+                            <a:latin typeface="Cambria Math" panose="02040503050406030204" pitchFamily="18" charset="0"/>
+                          </a:rPr>
+                          <m:t>𝑠</m:t>
+                        </m:r>
+                        <m:r>
+                          <a:rPr lang="fr-BE" b="0" i="1" smtClean="0">
+                            <a:latin typeface="Cambria Math" panose="02040503050406030204" pitchFamily="18" charset="0"/>
+                          </a:rPr>
+                          <m:t>,</m:t>
+                        </m:r>
+                        <m:r>
+                          <a:rPr lang="fr-BE" b="0" i="1" smtClean="0">
+                            <a:latin typeface="Cambria Math" panose="02040503050406030204" pitchFamily="18" charset="0"/>
+                          </a:rPr>
+                          <m:t>𝑡</m:t>
+                        </m:r>
+                      </m:sub>
+                    </m:sSub>
+                  </m:oMath>
+                </a14:m>
+                <a:endParaRPr lang="en-GB" dirty="0"/>
+              </a:p>
+              <a:p>
+                <a14:m>
+                  <m:oMath xmlns:m="http://schemas.openxmlformats.org/officeDocument/2006/math">
+                    <m:sSub>
+                      <m:sSubPr>
+                        <m:ctrlPr>
+                          <a:rPr lang="el-GR" i="1">
+                            <a:latin typeface="Cambria Math" panose="02040503050406030204" pitchFamily="18" charset="0"/>
+                            <a:ea typeface="Cambria Math" panose="02040503050406030204" pitchFamily="18" charset="0"/>
+                          </a:rPr>
+                        </m:ctrlPr>
+                      </m:sSubPr>
+                      <m:e>
+                        <m:r>
+                          <m:rPr>
+                            <m:sty m:val="p"/>
+                          </m:rPr>
+                          <a:rPr lang="el-GR" i="1">
+                            <a:latin typeface="Cambria Math" panose="02040503050406030204" pitchFamily="18" charset="0"/>
+                            <a:ea typeface="Cambria Math" panose="02040503050406030204" pitchFamily="18" charset="0"/>
+                          </a:rPr>
+                          <m:t>Φ</m:t>
+                        </m:r>
+                      </m:e>
+                      <m:sub>
+                        <m:r>
+                          <a:rPr lang="fr-BE" b="0" i="1" smtClean="0">
+                            <a:latin typeface="Cambria Math" panose="02040503050406030204" pitchFamily="18" charset="0"/>
+                            <a:ea typeface="Cambria Math" panose="02040503050406030204" pitchFamily="18" charset="0"/>
+                          </a:rPr>
+                          <m:t>𝑛</m:t>
+                        </m:r>
+                      </m:sub>
+                    </m:sSub>
+                    <m:r>
+                      <a:rPr lang="fr-BE" i="1">
+                        <a:latin typeface="Cambria Math" panose="02040503050406030204" pitchFamily="18" charset="0"/>
+                      </a:rPr>
+                      <m:t>(</m:t>
+                    </m:r>
+                    <m:r>
+                      <a:rPr lang="fr-BE" i="1">
+                        <a:latin typeface="Cambria Math" panose="02040503050406030204" pitchFamily="18" charset="0"/>
+                      </a:rPr>
+                      <m:t>𝐵</m:t>
+                    </m:r>
+                    <m:r>
+                      <a:rPr lang="fr-BE" i="1">
+                        <a:latin typeface="Cambria Math" panose="02040503050406030204" pitchFamily="18" charset="0"/>
+                      </a:rPr>
+                      <m:t>)</m:t>
+                    </m:r>
+                    <m:sSub>
+                      <m:sSubPr>
+                        <m:ctrlPr>
+                          <a:rPr lang="fr-BE" b="0" i="1" smtClean="0">
+                            <a:latin typeface="Cambria Math" panose="02040503050406030204" pitchFamily="18" charset="0"/>
+                          </a:rPr>
+                        </m:ctrlPr>
+                      </m:sSubPr>
+                      <m:e>
+                        <m:r>
+                          <a:rPr lang="fr-BE" b="0" i="1" smtClean="0">
+                            <a:latin typeface="Cambria Math" panose="02040503050406030204" pitchFamily="18" charset="0"/>
+                          </a:rPr>
+                          <m:t>𝑛</m:t>
+                        </m:r>
+                      </m:e>
+                      <m:sub>
+                        <m:r>
+                          <a:rPr lang="fr-BE" i="1">
+                            <a:latin typeface="Cambria Math" panose="02040503050406030204" pitchFamily="18" charset="0"/>
+                          </a:rPr>
+                          <m:t>𝑡</m:t>
+                        </m:r>
+                      </m:sub>
+                    </m:sSub>
+                    <m:r>
+                      <a:rPr lang="fr-BE" i="1">
+                        <a:latin typeface="Cambria Math" panose="02040503050406030204" pitchFamily="18" charset="0"/>
+                      </a:rPr>
+                      <m:t>=</m:t>
+                    </m:r>
+                    <m:sSub>
+                      <m:sSubPr>
+                        <m:ctrlPr>
+                          <a:rPr lang="el-GR" i="1">
+                            <a:latin typeface="Cambria Math" panose="02040503050406030204" pitchFamily="18" charset="0"/>
+                            <a:ea typeface="Cambria Math" panose="02040503050406030204" pitchFamily="18" charset="0"/>
+                          </a:rPr>
+                        </m:ctrlPr>
+                      </m:sSubPr>
+                      <m:e>
+                        <m:r>
+                          <m:rPr>
+                            <m:sty m:val="p"/>
+                          </m:rPr>
+                          <a:rPr lang="el-GR" i="1">
+                            <a:latin typeface="Cambria Math" panose="02040503050406030204" pitchFamily="18" charset="0"/>
+                            <a:ea typeface="Cambria Math" panose="02040503050406030204" pitchFamily="18" charset="0"/>
+                          </a:rPr>
+                          <m:t>Θ</m:t>
+                        </m:r>
+                      </m:e>
+                      <m:sub>
+                        <m:r>
+                          <a:rPr lang="fr-BE" b="0" i="1" smtClean="0">
+                            <a:latin typeface="Cambria Math" panose="02040503050406030204" pitchFamily="18" charset="0"/>
+                            <a:ea typeface="Cambria Math" panose="02040503050406030204" pitchFamily="18" charset="0"/>
+                          </a:rPr>
+                          <m:t>𝑛</m:t>
+                        </m:r>
+                      </m:sub>
+                    </m:sSub>
+                    <m:r>
+                      <a:rPr lang="fr-BE" i="1">
+                        <a:latin typeface="Cambria Math" panose="02040503050406030204" pitchFamily="18" charset="0"/>
+                      </a:rPr>
+                      <m:t>(</m:t>
+                    </m:r>
+                    <m:r>
+                      <a:rPr lang="fr-BE" i="1">
+                        <a:latin typeface="Cambria Math" panose="02040503050406030204" pitchFamily="18" charset="0"/>
+                      </a:rPr>
+                      <m:t>𝐵</m:t>
+                    </m:r>
+                    <m:r>
+                      <a:rPr lang="fr-BE" i="1">
+                        <a:latin typeface="Cambria Math" panose="02040503050406030204" pitchFamily="18" charset="0"/>
+                      </a:rPr>
+                      <m:t>)</m:t>
+                    </m:r>
+                    <m:sSub>
+                      <m:sSubPr>
+                        <m:ctrlPr>
+                          <a:rPr lang="en-GB" i="1">
+                            <a:latin typeface="Cambria Math" panose="02040503050406030204" pitchFamily="18" charset="0"/>
+                            <a:ea typeface="Cambria Math" panose="02040503050406030204" pitchFamily="18" charset="0"/>
+                          </a:rPr>
+                        </m:ctrlPr>
+                      </m:sSubPr>
+                      <m:e>
+                        <m:r>
+                          <a:rPr lang="en-GB" i="1">
+                            <a:latin typeface="Cambria Math" panose="02040503050406030204" pitchFamily="18" charset="0"/>
+                            <a:ea typeface="Cambria Math" panose="02040503050406030204" pitchFamily="18" charset="0"/>
+                          </a:rPr>
+                          <m:t>𝜀</m:t>
+                        </m:r>
+                      </m:e>
+                      <m:sub>
+                        <m:r>
+                          <a:rPr lang="fr-BE" b="0" i="1" smtClean="0">
+                            <a:latin typeface="Cambria Math" panose="02040503050406030204" pitchFamily="18" charset="0"/>
+                            <a:ea typeface="Cambria Math" panose="02040503050406030204" pitchFamily="18" charset="0"/>
+                          </a:rPr>
+                          <m:t>𝑛</m:t>
+                        </m:r>
+                        <m:r>
+                          <a:rPr lang="fr-BE" i="1">
+                            <a:latin typeface="Cambria Math" panose="02040503050406030204" pitchFamily="18" charset="0"/>
+                          </a:rPr>
+                          <m:t>,</m:t>
+                        </m:r>
+                        <m:r>
+                          <a:rPr lang="fr-BE" i="1">
+                            <a:latin typeface="Cambria Math" panose="02040503050406030204" pitchFamily="18" charset="0"/>
+                          </a:rPr>
+                          <m:t>𝑡</m:t>
+                        </m:r>
+                      </m:sub>
+                    </m:sSub>
+                  </m:oMath>
+                </a14:m>
+                <a:endParaRPr lang="en-GB" dirty="0"/>
+              </a:p>
+              <a:p>
+                <a:endParaRPr lang="en-GB" dirty="0"/>
+              </a:p>
+            </p:txBody>
+          </p:sp>
+        </mc:Choice>
+        <mc:Fallback>
+          <p:sp>
+            <p:nvSpPr>
+              <p:cNvPr id="4" name="Espace réservé du contenu 3">
+                <a:extLst>
+                  <a:ext uri="{FF2B5EF4-FFF2-40B4-BE49-F238E27FC236}">
+                    <a16:creationId xmlns:a16="http://schemas.microsoft.com/office/drawing/2014/main" id="{8FF581F2-9464-692F-874C-7ECD83894581}"/>
+                  </a:ext>
+                </a:extLst>
+              </p:cNvPr>
+              <p:cNvSpPr>
+                <a:spLocks noGrp="1" noRot="1" noChangeAspect="1" noMove="1" noResize="1" noEditPoints="1" noAdjustHandles="1" noChangeArrowheads="1" noChangeShapeType="1" noTextEdit="1"/>
+              </p:cNvSpPr>
+              <p:nvPr>
+                <p:ph sz="half" idx="2"/>
+              </p:nvPr>
+            </p:nvSpPr>
+            <p:spPr>
+              <a:xfrm>
+                <a:off x="1102952" y="1604914"/>
+                <a:ext cx="3688683" cy="1474483"/>
+              </a:xfrm>
+              <a:blipFill>
+                <a:blip r:embed="rId2"/>
+                <a:stretch>
+                  <a:fillRect l="-2142" t="-6148"/>
+                </a:stretch>
+              </a:blipFill>
+              <a:ln>
+                <a:solidFill>
+                  <a:schemeClr val="tx1"/>
+                </a:solidFill>
+              </a:ln>
+            </p:spPr>
+            <p:txBody>
+              <a:bodyPr/>
+              <a:lstStyle/>
+              <a:p>
+                <a:r>
+                  <a:rPr lang="en-GB">
+                    <a:noFill/>
+                  </a:rPr>
+                  <a:t> </a:t>
+                </a:r>
+              </a:p>
+            </p:txBody>
+          </p:sp>
+        </mc:Fallback>
+      </mc:AlternateContent>
+      <mc:AlternateContent xmlns:mc="http://schemas.openxmlformats.org/markup-compatibility/2006">
+        <mc:Choice xmlns:a14="http://schemas.microsoft.com/office/drawing/2010/main" Requires="a14">
+          <p:sp>
+            <p:nvSpPr>
+              <p:cNvPr id="5" name="Espace réservé du contenu 3">
+                <a:extLst>
+                  <a:ext uri="{FF2B5EF4-FFF2-40B4-BE49-F238E27FC236}">
+                    <a16:creationId xmlns:a16="http://schemas.microsoft.com/office/drawing/2014/main" id="{87555583-84DA-1938-6787-961D0EEFA9E0}"/>
+                  </a:ext>
+                </a:extLst>
+              </p:cNvPr>
+              <p:cNvSpPr txBox="1">
+                <a:spLocks/>
+              </p:cNvSpPr>
+              <p:nvPr/>
+            </p:nvSpPr>
+            <p:spPr>
+              <a:xfrm>
+                <a:off x="5210735" y="1423357"/>
+                <a:ext cx="5521967" cy="1891343"/>
+              </a:xfrm>
+              <a:prstGeom prst="rect">
+                <a:avLst/>
+              </a:prstGeom>
+              <a:noFill/>
+              <a:ln>
+                <a:solidFill>
+                  <a:schemeClr val="tx1"/>
+                </a:solidFill>
+              </a:ln>
+            </p:spPr>
+            <p:txBody>
+              <a:bodyPr spcFirstLastPara="1" wrap="square" lIns="91425" tIns="45700" rIns="91425" bIns="45700" anchor="t" anchorCtr="0">
+                <a:noAutofit/>
+              </a:bodyPr>
+              <a:lstStyle>
+                <a:defPPr marR="0" lvl="0" algn="l" rtl="0">
+                  <a:lnSpc>
+                    <a:spcPct val="100000"/>
+                  </a:lnSpc>
+                  <a:spcBef>
+                    <a:spcPts val="0"/>
+                  </a:spcBef>
+                  <a:spcAft>
+                    <a:spcPts val="0"/>
+                  </a:spcAft>
+                </a:defPPr>
+                <a:lvl1pPr marL="342000" marR="0" lvl="0" indent="-342000" algn="l" rtl="0" eaLnBrk="1" hangingPunct="1">
+                  <a:lnSpc>
+                    <a:spcPct val="90000"/>
+                  </a:lnSpc>
+                  <a:spcBef>
+                    <a:spcPts val="0"/>
+                  </a:spcBef>
+                  <a:spcAft>
+                    <a:spcPts val="1000"/>
+                  </a:spcAft>
+                  <a:buClr>
+                    <a:schemeClr val="dk2"/>
+                  </a:buClr>
+                  <a:buSzPts val="2400"/>
+                  <a:buFont typeface="Arial"/>
+                  <a:buChar char="•"/>
+                  <a:defRPr sz="2000" b="0" i="0" u="none" strike="noStrike" cap="none">
+                    <a:solidFill>
+                      <a:srgbClr val="101010"/>
+                    </a:solidFill>
+                    <a:latin typeface="Arial"/>
+                    <a:ea typeface="Arial"/>
+                    <a:cs typeface="Arial"/>
+                    <a:sym typeface="Arial"/>
+                  </a:defRPr>
+                </a:lvl1pPr>
+                <a:lvl2pPr marL="684000" marR="0" lvl="1" indent="-342000" algn="l" rtl="0" eaLnBrk="1" hangingPunct="1">
+                  <a:lnSpc>
+                    <a:spcPct val="100000"/>
+                  </a:lnSpc>
+                  <a:spcBef>
+                    <a:spcPts val="0"/>
+                  </a:spcBef>
+                  <a:spcAft>
+                    <a:spcPts val="800"/>
+                  </a:spcAft>
+                  <a:buClr>
+                    <a:schemeClr val="dk2"/>
+                  </a:buClr>
+                  <a:buSzPts val="2000"/>
+                  <a:buFont typeface="Arial"/>
+                  <a:buChar char="•"/>
+                  <a:defRPr sz="1800" b="0" i="0" u="none" strike="noStrike" cap="none">
+                    <a:solidFill>
+                      <a:srgbClr val="101010"/>
+                    </a:solidFill>
+                    <a:latin typeface="Arial"/>
+                    <a:ea typeface="Arial"/>
+                    <a:cs typeface="Arial"/>
+                    <a:sym typeface="Arial"/>
+                  </a:defRPr>
+                </a:lvl2pPr>
+                <a:lvl3pPr marL="972000" marR="0" lvl="2" indent="-342900" algn="l" rtl="0" eaLnBrk="1" hangingPunct="1">
+                  <a:lnSpc>
+                    <a:spcPct val="90000"/>
+                  </a:lnSpc>
+                  <a:spcBef>
+                    <a:spcPts val="0"/>
+                  </a:spcBef>
+                  <a:spcAft>
+                    <a:spcPts val="1000"/>
+                  </a:spcAft>
+                  <a:buClr>
+                    <a:schemeClr val="dk2"/>
+                  </a:buClr>
+                  <a:buSzPts val="1800"/>
+                  <a:buFont typeface="Arial"/>
+                  <a:buChar char="•"/>
+                  <a:defRPr sz="1600" b="0" i="0" u="none" strike="noStrike" cap="none">
+                    <a:solidFill>
+                      <a:srgbClr val="101010"/>
+                    </a:solidFill>
+                    <a:latin typeface="Arial"/>
+                    <a:ea typeface="Arial"/>
+                    <a:cs typeface="Arial"/>
+                    <a:sym typeface="Arial"/>
+                  </a:defRPr>
+                </a:lvl3pPr>
+                <a:lvl4pPr marL="1296000" marR="0" lvl="3" indent="-342000" algn="l" rtl="0" eaLnBrk="1" hangingPunct="1">
+                  <a:lnSpc>
+                    <a:spcPct val="90000"/>
+                  </a:lnSpc>
+                  <a:spcBef>
+                    <a:spcPts val="0"/>
+                  </a:spcBef>
+                  <a:spcAft>
+                    <a:spcPts val="1000"/>
+                  </a:spcAft>
+                  <a:buClr>
+                    <a:schemeClr val="dk2"/>
+                  </a:buClr>
+                  <a:buSzPts val="1600"/>
+                  <a:buFont typeface="Arial"/>
+                  <a:buChar char="•"/>
+                  <a:defRPr sz="1400" b="0" i="0" u="none" strike="noStrike" cap="none">
+                    <a:solidFill>
+                      <a:srgbClr val="101010"/>
+                    </a:solidFill>
+                    <a:latin typeface="Arial"/>
+                    <a:ea typeface="Arial"/>
+                    <a:cs typeface="Arial"/>
+                    <a:sym typeface="Arial"/>
+                  </a:defRPr>
+                </a:lvl4pPr>
+                <a:lvl5pPr marL="1620000" marR="0" lvl="4" indent="-342000" algn="l" rtl="0" eaLnBrk="1" hangingPunct="1">
+                  <a:lnSpc>
+                    <a:spcPct val="90000"/>
+                  </a:lnSpc>
+                  <a:spcBef>
+                    <a:spcPts val="0"/>
+                  </a:spcBef>
+                  <a:spcAft>
+                    <a:spcPts val="1000"/>
+                  </a:spcAft>
+                  <a:buClr>
+                    <a:schemeClr val="dk2"/>
+                  </a:buClr>
+                  <a:buSzPts val="1600"/>
+                  <a:buFont typeface="Arial"/>
+                  <a:buChar char="•"/>
+                  <a:defRPr sz="1200" b="0" i="0" u="none" strike="noStrike" cap="none">
+                    <a:solidFill>
+                      <a:srgbClr val="101010"/>
+                    </a:solidFill>
+                    <a:latin typeface="Arial"/>
+                    <a:ea typeface="Arial"/>
+                    <a:cs typeface="Arial"/>
+                    <a:sym typeface="Arial"/>
+                  </a:defRPr>
+                </a:lvl5pPr>
+                <a:lvl6pPr marL="2743200" marR="0" lvl="5" indent="-342900" algn="l" rtl="0" eaLnBrk="1" hangingPunct="1">
+                  <a:lnSpc>
+                    <a:spcPct val="90000"/>
+                  </a:lnSpc>
+                  <a:spcBef>
+                    <a:spcPts val="1800"/>
+                  </a:spcBef>
+                  <a:spcAft>
+                    <a:spcPts val="0"/>
+                  </a:spcAft>
+                  <a:buClr>
+                    <a:schemeClr val="dk1"/>
+                  </a:buClr>
+                  <a:buSzPts val="1800"/>
+                  <a:buFont typeface="Arial"/>
+                  <a:buChar char="•"/>
+                  <a:defRPr sz="1800" b="0" i="0" u="none" strike="noStrike" cap="none">
+                    <a:solidFill>
+                      <a:schemeClr val="dk1"/>
+                    </a:solidFill>
+                    <a:latin typeface="Arial"/>
+                    <a:ea typeface="Arial"/>
+                    <a:cs typeface="Arial"/>
+                    <a:sym typeface="Arial"/>
+                  </a:defRPr>
+                </a:lvl6pPr>
+                <a:lvl7pPr marL="3200400" marR="0" lvl="6" indent="-342900" algn="l" rtl="0" eaLnBrk="1" hangingPunct="1">
+                  <a:lnSpc>
+                    <a:spcPct val="90000"/>
+                  </a:lnSpc>
+                  <a:spcBef>
+                    <a:spcPts val="500"/>
+                  </a:spcBef>
+                  <a:spcAft>
+                    <a:spcPts val="0"/>
+                  </a:spcAft>
+                  <a:buClr>
+                    <a:schemeClr val="dk1"/>
+                  </a:buClr>
+                  <a:buSzPts val="1800"/>
+                  <a:buFont typeface="Arial"/>
+                  <a:buChar char="•"/>
+                  <a:defRPr sz="1800" b="0" i="0" u="none" strike="noStrike" cap="none">
+                    <a:solidFill>
+                      <a:schemeClr val="dk1"/>
+                    </a:solidFill>
+                    <a:latin typeface="Arial"/>
+                    <a:ea typeface="Arial"/>
+                    <a:cs typeface="Arial"/>
+                    <a:sym typeface="Arial"/>
+                  </a:defRPr>
+                </a:lvl7pPr>
+                <a:lvl8pPr marL="3657600" marR="0" lvl="7" indent="-342900" algn="l" rtl="0" eaLnBrk="1" hangingPunct="1">
+                  <a:lnSpc>
+                    <a:spcPct val="90000"/>
+                  </a:lnSpc>
+                  <a:spcBef>
+                    <a:spcPts val="500"/>
+                  </a:spcBef>
+                  <a:spcAft>
+                    <a:spcPts val="0"/>
+                  </a:spcAft>
+                  <a:buClr>
+                    <a:schemeClr val="dk1"/>
+                  </a:buClr>
+                  <a:buSzPts val="1800"/>
+                  <a:buFont typeface="Arial"/>
+                  <a:buChar char="•"/>
+                  <a:defRPr sz="1800" b="0" i="0" u="none" strike="noStrike" cap="none">
+                    <a:solidFill>
+                      <a:schemeClr val="dk1"/>
+                    </a:solidFill>
+                    <a:latin typeface="Arial"/>
+                    <a:ea typeface="Arial"/>
+                    <a:cs typeface="Arial"/>
+                    <a:sym typeface="Arial"/>
+                  </a:defRPr>
+                </a:lvl8pPr>
+                <a:lvl9pPr marL="4114800" marR="0" lvl="8" indent="-342900" algn="l" rtl="0" eaLnBrk="1" hangingPunct="1">
+                  <a:lnSpc>
+                    <a:spcPct val="90000"/>
+                  </a:lnSpc>
+                  <a:spcBef>
+                    <a:spcPts val="500"/>
+                  </a:spcBef>
+                  <a:spcAft>
+                    <a:spcPts val="0"/>
+                  </a:spcAft>
+                  <a:buClr>
+                    <a:schemeClr val="dk1"/>
+                  </a:buClr>
+                  <a:buSzPts val="1800"/>
+                  <a:buFont typeface="Arial"/>
+                  <a:buChar char="•"/>
+                  <a:defRPr sz="1800" b="0" i="0" u="none" strike="noStrike" cap="none">
+                    <a:solidFill>
+                      <a:schemeClr val="dk1"/>
+                    </a:solidFill>
+                    <a:latin typeface="Arial"/>
+                    <a:ea typeface="Arial"/>
+                    <a:cs typeface="Arial"/>
+                    <a:sym typeface="Arial"/>
+                  </a:defRPr>
+                </a:lvl9pPr>
+              </a:lstStyle>
+              <a:p>
+                <a14:m>
+                  <m:oMath xmlns:m="http://schemas.openxmlformats.org/officeDocument/2006/math">
+                    <m:sSub>
+                      <m:sSubPr>
+                        <m:ctrlPr>
+                          <a:rPr lang="fr-BE" i="1">
+                            <a:latin typeface="Cambria Math" panose="02040503050406030204" pitchFamily="18" charset="0"/>
+                          </a:rPr>
+                        </m:ctrlPr>
+                      </m:sSubPr>
+                      <m:e>
+                        <m:r>
+                          <a:rPr lang="fr-BE" i="1">
+                            <a:latin typeface="Cambria Math" panose="02040503050406030204" pitchFamily="18" charset="0"/>
+                          </a:rPr>
+                          <m:t>𝑦</m:t>
+                        </m:r>
+                      </m:e>
+                      <m:sub>
+                        <m:r>
+                          <a:rPr lang="fr-BE" i="1">
+                            <a:latin typeface="Cambria Math" panose="02040503050406030204" pitchFamily="18" charset="0"/>
+                          </a:rPr>
+                          <m:t>𝑡</m:t>
+                        </m:r>
+                      </m:sub>
+                    </m:sSub>
+                    <m:r>
+                      <a:rPr lang="fr-BE" i="1">
+                        <a:latin typeface="Cambria Math" panose="02040503050406030204" pitchFamily="18" charset="0"/>
+                      </a:rPr>
+                      <m:t>=</m:t>
+                    </m:r>
+                    <m:sSub>
+                      <m:sSubPr>
+                        <m:ctrlPr>
+                          <a:rPr lang="fr-BE" i="1">
+                            <a:latin typeface="Cambria Math" panose="02040503050406030204" pitchFamily="18" charset="0"/>
+                          </a:rPr>
+                        </m:ctrlPr>
+                      </m:sSubPr>
+                      <m:e>
+                        <m:r>
+                          <a:rPr lang="fr-BE" i="1">
+                            <a:latin typeface="Cambria Math" panose="02040503050406030204" pitchFamily="18" charset="0"/>
+                          </a:rPr>
+                          <m:t>𝑛</m:t>
+                        </m:r>
+                      </m:e>
+                      <m:sub>
+                        <m:r>
+                          <a:rPr lang="fr-BE" i="1">
+                            <a:latin typeface="Cambria Math" panose="02040503050406030204" pitchFamily="18" charset="0"/>
+                          </a:rPr>
+                          <m:t>𝑡</m:t>
+                        </m:r>
+                      </m:sub>
+                    </m:sSub>
+                    <m:r>
+                      <a:rPr lang="fr-BE" i="1">
+                        <a:latin typeface="Cambria Math" panose="02040503050406030204" pitchFamily="18" charset="0"/>
+                      </a:rPr>
+                      <m:t>+</m:t>
+                    </m:r>
+                    <m:sSub>
+                      <m:sSubPr>
+                        <m:ctrlPr>
+                          <a:rPr lang="fr-BE" i="1">
+                            <a:latin typeface="Cambria Math" panose="02040503050406030204" pitchFamily="18" charset="0"/>
+                          </a:rPr>
+                        </m:ctrlPr>
+                      </m:sSubPr>
+                      <m:e>
+                        <m:r>
+                          <a:rPr lang="fr-BE" i="1">
+                            <a:latin typeface="Cambria Math" panose="02040503050406030204" pitchFamily="18" charset="0"/>
+                          </a:rPr>
+                          <m:t>𝑠</m:t>
+                        </m:r>
+                      </m:e>
+                      <m:sub>
+                        <m:r>
+                          <a:rPr lang="fr-BE" i="1">
+                            <a:latin typeface="Cambria Math" panose="02040503050406030204" pitchFamily="18" charset="0"/>
+                          </a:rPr>
+                          <m:t>𝑡</m:t>
+                        </m:r>
+                      </m:sub>
+                    </m:sSub>
+                  </m:oMath>
+                </a14:m>
+                <a:endParaRPr lang="en-GB" dirty="0"/>
+              </a:p>
+              <a:p>
+                <a:pPr marL="0" indent="0">
+                  <a:buNone/>
+                </a:pPr>
+                <a:r>
+                  <a:rPr lang="fr-BE" b="1" dirty="0">
+                    <a:latin typeface="Cambria Math" panose="02040503050406030204" pitchFamily="18" charset="0"/>
+                    <a:ea typeface="Cambria Math" panose="02040503050406030204" pitchFamily="18" charset="0"/>
+                  </a:rPr>
+                  <a:t>	⇓</a:t>
+                </a:r>
+              </a:p>
+              <a:p>
+                <a14:m>
+                  <m:oMath xmlns:m="http://schemas.openxmlformats.org/officeDocument/2006/math">
+                    <m:sSub>
+                      <m:sSubPr>
+                        <m:ctrlPr>
+                          <a:rPr lang="el-GR" i="1">
+                            <a:latin typeface="Cambria Math" panose="02040503050406030204" pitchFamily="18" charset="0"/>
+                            <a:ea typeface="Cambria Math" panose="02040503050406030204" pitchFamily="18" charset="0"/>
+                          </a:rPr>
+                        </m:ctrlPr>
+                      </m:sSubPr>
+                      <m:e>
+                        <m:r>
+                          <m:rPr>
+                            <m:sty m:val="p"/>
+                          </m:rPr>
+                          <a:rPr lang="el-GR" i="1">
+                            <a:latin typeface="Cambria Math" panose="02040503050406030204" pitchFamily="18" charset="0"/>
+                            <a:ea typeface="Cambria Math" panose="02040503050406030204" pitchFamily="18" charset="0"/>
+                          </a:rPr>
+                          <m:t>Φ</m:t>
+                        </m:r>
+                      </m:e>
+                      <m:sub>
+                        <m:r>
+                          <a:rPr lang="fr-BE" i="1">
+                            <a:latin typeface="Cambria Math" panose="02040503050406030204" pitchFamily="18" charset="0"/>
+                          </a:rPr>
+                          <m:t>𝑦</m:t>
+                        </m:r>
+                      </m:sub>
+                    </m:sSub>
+                    <m:d>
+                      <m:dPr>
+                        <m:ctrlPr>
+                          <a:rPr lang="fr-BE" i="1">
+                            <a:latin typeface="Cambria Math" panose="02040503050406030204" pitchFamily="18" charset="0"/>
+                          </a:rPr>
+                        </m:ctrlPr>
+                      </m:dPr>
+                      <m:e>
+                        <m:r>
+                          <a:rPr lang="fr-BE" i="1">
+                            <a:latin typeface="Cambria Math" panose="02040503050406030204" pitchFamily="18" charset="0"/>
+                          </a:rPr>
+                          <m:t>𝐵</m:t>
+                        </m:r>
+                      </m:e>
+                    </m:d>
+                    <m:r>
+                      <a:rPr lang="fr-BE" i="1" smtClean="0">
+                        <a:latin typeface="Cambria Math" panose="02040503050406030204" pitchFamily="18" charset="0"/>
+                      </a:rPr>
+                      <m:t>=</m:t>
+                    </m:r>
+                    <m:sSub>
+                      <m:sSubPr>
+                        <m:ctrlPr>
+                          <a:rPr lang="el-GR" i="1">
+                            <a:latin typeface="Cambria Math" panose="02040503050406030204" pitchFamily="18" charset="0"/>
+                            <a:ea typeface="Cambria Math" panose="02040503050406030204" pitchFamily="18" charset="0"/>
+                          </a:rPr>
+                        </m:ctrlPr>
+                      </m:sSubPr>
+                      <m:e>
+                        <m:r>
+                          <m:rPr>
+                            <m:sty m:val="p"/>
+                          </m:rPr>
+                          <a:rPr lang="el-GR" i="1">
+                            <a:latin typeface="Cambria Math" panose="02040503050406030204" pitchFamily="18" charset="0"/>
+                            <a:ea typeface="Cambria Math" panose="02040503050406030204" pitchFamily="18" charset="0"/>
+                          </a:rPr>
+                          <m:t>Φ</m:t>
+                        </m:r>
+                      </m:e>
+                      <m:sub>
+                        <m:r>
+                          <a:rPr lang="fr-BE" i="1" smtClean="0">
+                            <a:latin typeface="Cambria Math" panose="02040503050406030204" pitchFamily="18" charset="0"/>
+                            <a:ea typeface="Cambria Math" panose="02040503050406030204" pitchFamily="18" charset="0"/>
+                          </a:rPr>
+                          <m:t>𝑠</m:t>
+                        </m:r>
+                      </m:sub>
+                    </m:sSub>
+                    <m:r>
+                      <a:rPr lang="fr-BE" i="1">
+                        <a:latin typeface="Cambria Math" panose="02040503050406030204" pitchFamily="18" charset="0"/>
+                      </a:rPr>
+                      <m:t>(</m:t>
+                    </m:r>
+                    <m:r>
+                      <a:rPr lang="fr-BE" i="1">
+                        <a:latin typeface="Cambria Math" panose="02040503050406030204" pitchFamily="18" charset="0"/>
+                      </a:rPr>
+                      <m:t>𝐵</m:t>
+                    </m:r>
+                    <m:r>
+                      <a:rPr lang="fr-BE" i="1">
+                        <a:latin typeface="Cambria Math" panose="02040503050406030204" pitchFamily="18" charset="0"/>
+                      </a:rPr>
+                      <m:t>)</m:t>
+                    </m:r>
+                    <m:sSub>
+                      <m:sSubPr>
+                        <m:ctrlPr>
+                          <a:rPr lang="el-GR" i="1">
+                            <a:latin typeface="Cambria Math" panose="02040503050406030204" pitchFamily="18" charset="0"/>
+                            <a:ea typeface="Cambria Math" panose="02040503050406030204" pitchFamily="18" charset="0"/>
+                          </a:rPr>
+                        </m:ctrlPr>
+                      </m:sSubPr>
+                      <m:e>
+                        <m:r>
+                          <m:rPr>
+                            <m:sty m:val="p"/>
+                          </m:rPr>
+                          <a:rPr lang="el-GR" i="1">
+                            <a:latin typeface="Cambria Math" panose="02040503050406030204" pitchFamily="18" charset="0"/>
+                            <a:ea typeface="Cambria Math" panose="02040503050406030204" pitchFamily="18" charset="0"/>
+                          </a:rPr>
+                          <m:t>Φ</m:t>
+                        </m:r>
+                      </m:e>
+                      <m:sub>
+                        <m:r>
+                          <a:rPr lang="fr-BE" i="1" smtClean="0">
+                            <a:latin typeface="Cambria Math" panose="02040503050406030204" pitchFamily="18" charset="0"/>
+                            <a:ea typeface="Cambria Math" panose="02040503050406030204" pitchFamily="18" charset="0"/>
+                          </a:rPr>
+                          <m:t>𝑛</m:t>
+                        </m:r>
+                      </m:sub>
+                    </m:sSub>
+                    <m:r>
+                      <a:rPr lang="fr-BE" i="1">
+                        <a:latin typeface="Cambria Math" panose="02040503050406030204" pitchFamily="18" charset="0"/>
+                      </a:rPr>
+                      <m:t>(</m:t>
+                    </m:r>
+                    <m:r>
+                      <a:rPr lang="fr-BE" i="1">
+                        <a:latin typeface="Cambria Math" panose="02040503050406030204" pitchFamily="18" charset="0"/>
+                      </a:rPr>
+                      <m:t>𝐵</m:t>
+                    </m:r>
+                    <m:r>
+                      <a:rPr lang="fr-BE" i="1">
+                        <a:latin typeface="Cambria Math" panose="02040503050406030204" pitchFamily="18" charset="0"/>
+                      </a:rPr>
+                      <m:t>)</m:t>
+                    </m:r>
+                  </m:oMath>
+                </a14:m>
+                <a:endParaRPr lang="en-GB" dirty="0"/>
+              </a:p>
+              <a:p>
+                <a14:m>
+                  <m:oMath xmlns:m="http://schemas.openxmlformats.org/officeDocument/2006/math">
+                    <m:sSub>
+                      <m:sSubPr>
+                        <m:ctrlPr>
+                          <a:rPr lang="el-GR" i="1">
+                            <a:latin typeface="Cambria Math" panose="02040503050406030204" pitchFamily="18" charset="0"/>
+                            <a:ea typeface="Cambria Math" panose="02040503050406030204" pitchFamily="18" charset="0"/>
+                          </a:rPr>
+                        </m:ctrlPr>
+                      </m:sSubPr>
+                      <m:e>
+                        <m:r>
+                          <m:rPr>
+                            <m:sty m:val="p"/>
+                          </m:rPr>
+                          <a:rPr lang="el-GR" i="1">
+                            <a:latin typeface="Cambria Math" panose="02040503050406030204" pitchFamily="18" charset="0"/>
+                            <a:ea typeface="Cambria Math" panose="02040503050406030204" pitchFamily="18" charset="0"/>
+                          </a:rPr>
+                          <m:t>Θ</m:t>
+                        </m:r>
+                      </m:e>
+                      <m:sub>
+                        <m:r>
+                          <a:rPr lang="fr-BE" i="1">
+                            <a:latin typeface="Cambria Math" panose="02040503050406030204" pitchFamily="18" charset="0"/>
+                          </a:rPr>
+                          <m:t>𝑦</m:t>
+                        </m:r>
+                      </m:sub>
+                    </m:sSub>
+                    <m:d>
+                      <m:dPr>
+                        <m:ctrlPr>
+                          <a:rPr lang="fr-BE" i="1">
+                            <a:latin typeface="Cambria Math" panose="02040503050406030204" pitchFamily="18" charset="0"/>
+                          </a:rPr>
+                        </m:ctrlPr>
+                      </m:dPr>
+                      <m:e>
+                        <m:r>
+                          <a:rPr lang="fr-BE" i="1">
+                            <a:latin typeface="Cambria Math" panose="02040503050406030204" pitchFamily="18" charset="0"/>
+                          </a:rPr>
+                          <m:t>𝐵</m:t>
+                        </m:r>
+                      </m:e>
+                    </m:d>
+                    <m:sSub>
+                      <m:sSubPr>
+                        <m:ctrlPr>
+                          <a:rPr lang="en-GB" i="1">
+                            <a:latin typeface="Cambria Math" panose="02040503050406030204" pitchFamily="18" charset="0"/>
+                            <a:ea typeface="Cambria Math" panose="02040503050406030204" pitchFamily="18" charset="0"/>
+                          </a:rPr>
+                        </m:ctrlPr>
+                      </m:sSubPr>
+                      <m:e>
+                        <m:r>
+                          <a:rPr lang="en-GB" i="1">
+                            <a:latin typeface="Cambria Math" panose="02040503050406030204" pitchFamily="18" charset="0"/>
+                            <a:ea typeface="Cambria Math" panose="02040503050406030204" pitchFamily="18" charset="0"/>
+                          </a:rPr>
+                          <m:t>𝜀</m:t>
+                        </m:r>
+                      </m:e>
+                      <m:sub>
+                        <m:r>
+                          <a:rPr lang="fr-BE" i="1">
+                            <a:latin typeface="Cambria Math" panose="02040503050406030204" pitchFamily="18" charset="0"/>
+                          </a:rPr>
+                          <m:t>𝑡</m:t>
+                        </m:r>
+                      </m:sub>
+                    </m:sSub>
+                    <m:r>
+                      <a:rPr lang="fr-BE" i="1">
+                        <a:latin typeface="Cambria Math" panose="02040503050406030204" pitchFamily="18" charset="0"/>
+                      </a:rPr>
+                      <m:t>=</m:t>
+                    </m:r>
+                    <m:sSub>
+                      <m:sSubPr>
+                        <m:ctrlPr>
+                          <a:rPr lang="el-GR" i="1">
+                            <a:latin typeface="Cambria Math" panose="02040503050406030204" pitchFamily="18" charset="0"/>
+                            <a:ea typeface="Cambria Math" panose="02040503050406030204" pitchFamily="18" charset="0"/>
+                          </a:rPr>
+                        </m:ctrlPr>
+                      </m:sSubPr>
+                      <m:e>
+                        <m:r>
+                          <m:rPr>
+                            <m:sty m:val="p"/>
+                          </m:rPr>
+                          <a:rPr lang="el-GR" i="1">
+                            <a:latin typeface="Cambria Math" panose="02040503050406030204" pitchFamily="18" charset="0"/>
+                            <a:ea typeface="Cambria Math" panose="02040503050406030204" pitchFamily="18" charset="0"/>
+                          </a:rPr>
+                          <m:t>Φ</m:t>
+                        </m:r>
+                      </m:e>
+                      <m:sub>
+                        <m:r>
+                          <a:rPr lang="fr-BE" i="1">
+                            <a:latin typeface="Cambria Math" panose="02040503050406030204" pitchFamily="18" charset="0"/>
+                            <a:ea typeface="Cambria Math" panose="02040503050406030204" pitchFamily="18" charset="0"/>
+                          </a:rPr>
+                          <m:t>𝑛</m:t>
+                        </m:r>
+                      </m:sub>
+                    </m:sSub>
+                    <m:r>
+                      <a:rPr lang="fr-BE" i="1">
+                        <a:latin typeface="Cambria Math" panose="02040503050406030204" pitchFamily="18" charset="0"/>
+                      </a:rPr>
+                      <m:t>(</m:t>
+                    </m:r>
+                    <m:r>
+                      <a:rPr lang="fr-BE" i="1">
+                        <a:latin typeface="Cambria Math" panose="02040503050406030204" pitchFamily="18" charset="0"/>
+                      </a:rPr>
+                      <m:t>𝐵</m:t>
+                    </m:r>
+                    <m:r>
+                      <a:rPr lang="fr-BE" i="1">
+                        <a:latin typeface="Cambria Math" panose="02040503050406030204" pitchFamily="18" charset="0"/>
+                      </a:rPr>
+                      <m:t>)</m:t>
+                    </m:r>
+                    <m:sSub>
+                      <m:sSubPr>
+                        <m:ctrlPr>
+                          <a:rPr lang="el-GR" i="1">
+                            <a:latin typeface="Cambria Math" panose="02040503050406030204" pitchFamily="18" charset="0"/>
+                            <a:ea typeface="Cambria Math" panose="02040503050406030204" pitchFamily="18" charset="0"/>
+                          </a:rPr>
+                        </m:ctrlPr>
+                      </m:sSubPr>
+                      <m:e>
+                        <m:r>
+                          <m:rPr>
+                            <m:sty m:val="p"/>
+                          </m:rPr>
+                          <a:rPr lang="el-GR" i="1">
+                            <a:latin typeface="Cambria Math" panose="02040503050406030204" pitchFamily="18" charset="0"/>
+                            <a:ea typeface="Cambria Math" panose="02040503050406030204" pitchFamily="18" charset="0"/>
+                          </a:rPr>
+                          <m:t>Θ</m:t>
+                        </m:r>
+                      </m:e>
+                      <m:sub>
+                        <m:r>
+                          <a:rPr lang="fr-BE" i="1">
+                            <a:latin typeface="Cambria Math" panose="02040503050406030204" pitchFamily="18" charset="0"/>
+                          </a:rPr>
+                          <m:t>𝑠</m:t>
+                        </m:r>
+                      </m:sub>
+                    </m:sSub>
+                    <m:d>
+                      <m:dPr>
+                        <m:ctrlPr>
+                          <a:rPr lang="fr-BE" i="1">
+                            <a:latin typeface="Cambria Math" panose="02040503050406030204" pitchFamily="18" charset="0"/>
+                          </a:rPr>
+                        </m:ctrlPr>
+                      </m:dPr>
+                      <m:e>
+                        <m:r>
+                          <a:rPr lang="fr-BE" i="1">
+                            <a:latin typeface="Cambria Math" panose="02040503050406030204" pitchFamily="18" charset="0"/>
+                          </a:rPr>
+                          <m:t>𝐵</m:t>
+                        </m:r>
+                      </m:e>
+                    </m:d>
+                    <m:sSub>
+                      <m:sSubPr>
+                        <m:ctrlPr>
+                          <a:rPr lang="en-GB" i="1">
+                            <a:latin typeface="Cambria Math" panose="02040503050406030204" pitchFamily="18" charset="0"/>
+                            <a:ea typeface="Cambria Math" panose="02040503050406030204" pitchFamily="18" charset="0"/>
+                          </a:rPr>
+                        </m:ctrlPr>
+                      </m:sSubPr>
+                      <m:e>
+                        <m:r>
+                          <a:rPr lang="en-GB" i="1">
+                            <a:latin typeface="Cambria Math" panose="02040503050406030204" pitchFamily="18" charset="0"/>
+                            <a:ea typeface="Cambria Math" panose="02040503050406030204" pitchFamily="18" charset="0"/>
+                          </a:rPr>
+                          <m:t>𝜀</m:t>
+                        </m:r>
+                      </m:e>
+                      <m:sub>
+                        <m:r>
+                          <a:rPr lang="fr-BE" i="1">
+                            <a:latin typeface="Cambria Math" panose="02040503050406030204" pitchFamily="18" charset="0"/>
+                          </a:rPr>
+                          <m:t>𝑠</m:t>
+                        </m:r>
+                        <m:r>
+                          <a:rPr lang="fr-BE" i="1">
+                            <a:latin typeface="Cambria Math" panose="02040503050406030204" pitchFamily="18" charset="0"/>
+                          </a:rPr>
+                          <m:t>,</m:t>
+                        </m:r>
+                        <m:r>
+                          <a:rPr lang="fr-BE" i="1">
+                            <a:latin typeface="Cambria Math" panose="02040503050406030204" pitchFamily="18" charset="0"/>
+                          </a:rPr>
+                          <m:t>𝑡</m:t>
+                        </m:r>
+                      </m:sub>
+                    </m:sSub>
+                    <m:r>
+                      <a:rPr lang="fr-BE" b="0" i="1" smtClean="0">
+                        <a:latin typeface="Cambria Math" panose="02040503050406030204" pitchFamily="18" charset="0"/>
+                      </a:rPr>
+                      <m:t>+</m:t>
+                    </m:r>
+                    <m:sSub>
+                      <m:sSubPr>
+                        <m:ctrlPr>
+                          <a:rPr lang="el-GR" i="1">
+                            <a:latin typeface="Cambria Math" panose="02040503050406030204" pitchFamily="18" charset="0"/>
+                            <a:ea typeface="Cambria Math" panose="02040503050406030204" pitchFamily="18" charset="0"/>
+                          </a:rPr>
+                        </m:ctrlPr>
+                      </m:sSubPr>
+                      <m:e>
+                        <m:sSub>
+                          <m:sSubPr>
+                            <m:ctrlPr>
+                              <a:rPr lang="el-GR" i="1">
+                                <a:latin typeface="Cambria Math" panose="02040503050406030204" pitchFamily="18" charset="0"/>
+                                <a:ea typeface="Cambria Math" panose="02040503050406030204" pitchFamily="18" charset="0"/>
+                              </a:rPr>
+                            </m:ctrlPr>
+                          </m:sSubPr>
+                          <m:e>
+                            <m:r>
+                              <m:rPr>
+                                <m:sty m:val="p"/>
+                              </m:rPr>
+                              <a:rPr lang="el-GR" i="1">
+                                <a:latin typeface="Cambria Math" panose="02040503050406030204" pitchFamily="18" charset="0"/>
+                                <a:ea typeface="Cambria Math" panose="02040503050406030204" pitchFamily="18" charset="0"/>
+                              </a:rPr>
+                              <m:t>Φ</m:t>
+                            </m:r>
+                          </m:e>
+                          <m:sub>
+                            <m:r>
+                              <a:rPr lang="fr-BE" b="0" i="1" smtClean="0">
+                                <a:latin typeface="Cambria Math" panose="02040503050406030204" pitchFamily="18" charset="0"/>
+                                <a:ea typeface="Cambria Math" panose="02040503050406030204" pitchFamily="18" charset="0"/>
+                              </a:rPr>
+                              <m:t>𝑠</m:t>
+                            </m:r>
+                          </m:sub>
+                        </m:sSub>
+                        <m:r>
+                          <a:rPr lang="fr-BE" i="1">
+                            <a:latin typeface="Cambria Math" panose="02040503050406030204" pitchFamily="18" charset="0"/>
+                          </a:rPr>
+                          <m:t>(</m:t>
+                        </m:r>
+                        <m:r>
+                          <a:rPr lang="fr-BE" i="1">
+                            <a:latin typeface="Cambria Math" panose="02040503050406030204" pitchFamily="18" charset="0"/>
+                          </a:rPr>
+                          <m:t>𝐵</m:t>
+                        </m:r>
+                        <m:r>
+                          <a:rPr lang="fr-BE" i="1">
+                            <a:latin typeface="Cambria Math" panose="02040503050406030204" pitchFamily="18" charset="0"/>
+                          </a:rPr>
+                          <m:t>)</m:t>
+                        </m:r>
+                        <m:r>
+                          <m:rPr>
+                            <m:sty m:val="p"/>
+                          </m:rPr>
+                          <a:rPr lang="el-GR" i="1">
+                            <a:latin typeface="Cambria Math" panose="02040503050406030204" pitchFamily="18" charset="0"/>
+                            <a:ea typeface="Cambria Math" panose="02040503050406030204" pitchFamily="18" charset="0"/>
+                          </a:rPr>
+                          <m:t>Θ</m:t>
+                        </m:r>
+                      </m:e>
+                      <m:sub>
+                        <m:r>
+                          <a:rPr lang="fr-BE" b="0" i="1" smtClean="0">
+                            <a:latin typeface="Cambria Math" panose="02040503050406030204" pitchFamily="18" charset="0"/>
+                            <a:ea typeface="Cambria Math" panose="02040503050406030204" pitchFamily="18" charset="0"/>
+                          </a:rPr>
+                          <m:t>𝑛</m:t>
+                        </m:r>
+                      </m:sub>
+                    </m:sSub>
+                    <m:r>
+                      <a:rPr lang="fr-BE" i="1">
+                        <a:latin typeface="Cambria Math" panose="02040503050406030204" pitchFamily="18" charset="0"/>
+                      </a:rPr>
+                      <m:t>(</m:t>
+                    </m:r>
+                    <m:r>
+                      <a:rPr lang="fr-BE" i="1">
+                        <a:latin typeface="Cambria Math" panose="02040503050406030204" pitchFamily="18" charset="0"/>
+                      </a:rPr>
+                      <m:t>𝐵</m:t>
+                    </m:r>
+                    <m:r>
+                      <a:rPr lang="fr-BE" i="1">
+                        <a:latin typeface="Cambria Math" panose="02040503050406030204" pitchFamily="18" charset="0"/>
+                      </a:rPr>
+                      <m:t>)</m:t>
+                    </m:r>
+                    <m:sSub>
+                      <m:sSubPr>
+                        <m:ctrlPr>
+                          <a:rPr lang="en-GB" i="1">
+                            <a:latin typeface="Cambria Math" panose="02040503050406030204" pitchFamily="18" charset="0"/>
+                            <a:ea typeface="Cambria Math" panose="02040503050406030204" pitchFamily="18" charset="0"/>
+                          </a:rPr>
+                        </m:ctrlPr>
+                      </m:sSubPr>
+                      <m:e>
+                        <m:r>
+                          <a:rPr lang="en-GB" i="1">
+                            <a:latin typeface="Cambria Math" panose="02040503050406030204" pitchFamily="18" charset="0"/>
+                            <a:ea typeface="Cambria Math" panose="02040503050406030204" pitchFamily="18" charset="0"/>
+                          </a:rPr>
+                          <m:t>𝜀</m:t>
+                        </m:r>
+                      </m:e>
+                      <m:sub>
+                        <m:r>
+                          <a:rPr lang="fr-BE" b="0" i="1" smtClean="0">
+                            <a:latin typeface="Cambria Math" panose="02040503050406030204" pitchFamily="18" charset="0"/>
+                            <a:ea typeface="Cambria Math" panose="02040503050406030204" pitchFamily="18" charset="0"/>
+                          </a:rPr>
+                          <m:t>𝑛</m:t>
+                        </m:r>
+                        <m:r>
+                          <a:rPr lang="fr-BE" i="1">
+                            <a:latin typeface="Cambria Math" panose="02040503050406030204" pitchFamily="18" charset="0"/>
+                          </a:rPr>
+                          <m:t>,</m:t>
+                        </m:r>
+                        <m:r>
+                          <a:rPr lang="fr-BE" i="1">
+                            <a:latin typeface="Cambria Math" panose="02040503050406030204" pitchFamily="18" charset="0"/>
+                          </a:rPr>
+                          <m:t>𝑡</m:t>
+                        </m:r>
+                      </m:sub>
+                    </m:sSub>
+                  </m:oMath>
+                </a14:m>
+                <a:endParaRPr lang="en-GB" dirty="0"/>
+              </a:p>
+              <a:p>
+                <a:pPr marL="0" indent="0">
+                  <a:buNone/>
+                </a:pPr>
+                <a:r>
+                  <a:rPr lang="en-GB" dirty="0"/>
+                  <a:t> </a:t>
+                </a:r>
+              </a:p>
+            </p:txBody>
+          </p:sp>
+        </mc:Choice>
+        <mc:Fallback>
+          <p:sp>
+            <p:nvSpPr>
+              <p:cNvPr id="5" name="Espace réservé du contenu 3">
+                <a:extLst>
+                  <a:ext uri="{FF2B5EF4-FFF2-40B4-BE49-F238E27FC236}">
+                    <a16:creationId xmlns:a16="http://schemas.microsoft.com/office/drawing/2014/main" id="{87555583-84DA-1938-6787-961D0EEFA9E0}"/>
+                  </a:ext>
+                </a:extLst>
+              </p:cNvPr>
+              <p:cNvSpPr txBox="1">
+                <a:spLocks noRot="1" noChangeAspect="1" noMove="1" noResize="1" noEditPoints="1" noAdjustHandles="1" noChangeArrowheads="1" noChangeShapeType="1" noTextEdit="1"/>
+              </p:cNvSpPr>
+              <p:nvPr/>
+            </p:nvSpPr>
+            <p:spPr>
+              <a:xfrm>
+                <a:off x="5210735" y="1423357"/>
+                <a:ext cx="5521967" cy="1891343"/>
+              </a:xfrm>
+              <a:prstGeom prst="rect">
+                <a:avLst/>
+              </a:prstGeom>
+              <a:blipFill>
+                <a:blip r:embed="rId3"/>
+                <a:stretch>
+                  <a:fillRect l="-1432" t="-4792"/>
+                </a:stretch>
+              </a:blipFill>
+              <a:ln>
+                <a:solidFill>
+                  <a:schemeClr val="tx1"/>
+                </a:solidFill>
+              </a:ln>
+            </p:spPr>
+            <p:txBody>
+              <a:bodyPr/>
+              <a:lstStyle/>
+              <a:p>
+                <a:r>
+                  <a:rPr lang="en-GB">
+                    <a:noFill/>
+                  </a:rPr>
+                  <a:t> </a:t>
+                </a:r>
+              </a:p>
+            </p:txBody>
+          </p:sp>
+        </mc:Fallback>
+      </mc:AlternateContent>
+    </p:spTree>
+    <p:extLst>
+      <p:ext uri="{BB962C8B-B14F-4D97-AF65-F5344CB8AC3E}">
+        <p14:creationId xmlns:p14="http://schemas.microsoft.com/office/powerpoint/2010/main" val="2566324426"/>
+      </p:ext>
+    </p:extLst>
+  </p:cSld>
+  <p:clrMapOvr>
+    <a:masterClrMapping/>
+  </p:clrMapOvr>
+</p:sld>
+</file>
+
+<file path=ppt/slides/slide21.xml><?xml version="1.0" encoding="utf-8"?>
+<p:sld xmlns:a="http://schemas.openxmlformats.org/drawingml/2006/main" xmlns:r="http://schemas.openxmlformats.org/officeDocument/2006/relationships" xmlns:p="http://schemas.openxmlformats.org/presentationml/2006/main">
+  <p:cSld>
+    <p:spTree>
+      <p:nvGrpSpPr>
+        <p:cNvPr id="1" name="">
+          <a:extLst>
+            <a:ext uri="{FF2B5EF4-FFF2-40B4-BE49-F238E27FC236}">
+              <a16:creationId xmlns:a16="http://schemas.microsoft.com/office/drawing/2014/main" id="{3874773C-01A2-6079-1996-42717C58F404}"/>
+            </a:ext>
+          </a:extLst>
+        </p:cNvPr>
+        <p:cNvGrpSpPr/>
+        <p:nvPr/>
+      </p:nvGrpSpPr>
+      <p:grpSpPr>
+        <a:xfrm>
+          <a:off x="0" y="0"/>
+          <a:ext cx="0" cy="0"/>
+          <a:chOff x="0" y="0"/>
+          <a:chExt cx="0" cy="0"/>
+        </a:xfrm>
+      </p:grpSpPr>
+      <p:sp>
+        <p:nvSpPr>
+          <p:cNvPr id="2" name="Titre 1">
+            <a:extLst>
+              <a:ext uri="{FF2B5EF4-FFF2-40B4-BE49-F238E27FC236}">
+                <a16:creationId xmlns:a16="http://schemas.microsoft.com/office/drawing/2014/main" id="{56DC3698-FDF6-8323-A326-D102A99E42BD}"/>
+              </a:ext>
+            </a:extLst>
+          </p:cNvPr>
+          <p:cNvSpPr>
+            <a:spLocks noGrp="1"/>
+          </p:cNvSpPr>
+          <p:nvPr>
+            <p:ph type="title"/>
+          </p:nvPr>
+        </p:nvSpPr>
+        <p:spPr/>
+        <p:txBody>
+          <a:bodyPr/>
+          <a:lstStyle/>
+          <a:p>
+            <a:r>
+              <a:rPr lang="en-GB" dirty="0"/>
+              <a:t>Estimators</a:t>
+            </a:r>
+          </a:p>
+        </p:txBody>
+      </p:sp>
+      <p:sp>
+        <p:nvSpPr>
+          <p:cNvPr id="3" name="Espace réservé du numéro de diapositive 2">
+            <a:extLst>
+              <a:ext uri="{FF2B5EF4-FFF2-40B4-BE49-F238E27FC236}">
+                <a16:creationId xmlns:a16="http://schemas.microsoft.com/office/drawing/2014/main" id="{F79ED83B-A5E1-1CF7-2E0E-7E070F1DADFC}"/>
+              </a:ext>
+            </a:extLst>
+          </p:cNvPr>
+          <p:cNvSpPr>
+            <a:spLocks noGrp="1"/>
+          </p:cNvSpPr>
+          <p:nvPr>
+            <p:ph type="sldNum" idx="12"/>
+          </p:nvPr>
+        </p:nvSpPr>
+        <p:spPr/>
+        <p:txBody>
+          <a:bodyPr/>
+          <a:lstStyle/>
+          <a:p>
+            <a:fld id="{00000000-1234-1234-1234-123412341234}" type="slidenum">
+              <a:rPr lang="en-GB" smtClean="0"/>
+              <a:pPr/>
+              <a:t>21</a:t>
+            </a:fld>
+            <a:endParaRPr lang="en-GB"/>
+          </a:p>
+        </p:txBody>
+      </p:sp>
+      <mc:AlternateContent xmlns:mc="http://schemas.openxmlformats.org/markup-compatibility/2006">
+        <mc:Choice xmlns:a14="http://schemas.microsoft.com/office/drawing/2010/main" Requires="a14">
+          <p:sp>
+            <p:nvSpPr>
+              <p:cNvPr id="4" name="Espace réservé du contenu 3">
+                <a:extLst>
+                  <a:ext uri="{FF2B5EF4-FFF2-40B4-BE49-F238E27FC236}">
+                    <a16:creationId xmlns:a16="http://schemas.microsoft.com/office/drawing/2014/main" id="{A0144878-1963-39E6-F73A-50144BFC825C}"/>
+                  </a:ext>
+                </a:extLst>
+              </p:cNvPr>
+              <p:cNvSpPr>
+                <a:spLocks noGrp="1"/>
+              </p:cNvSpPr>
+              <p:nvPr>
+                <p:ph sz="half" idx="2"/>
+              </p:nvPr>
+            </p:nvSpPr>
+            <p:spPr>
+              <a:xfrm>
+                <a:off x="1102952" y="1826790"/>
+                <a:ext cx="9150430" cy="3861316"/>
+              </a:xfrm>
+              <a:ln>
+                <a:solidFill>
+                  <a:schemeClr val="tx1"/>
+                </a:solidFill>
+              </a:ln>
+            </p:spPr>
+            <p:txBody>
+              <a:bodyPr/>
+              <a:lstStyle/>
+              <a:p>
+                <a:pPr marL="0" indent="0" algn="ctr">
+                  <a:buNone/>
+                </a:pPr>
+                <a:r>
+                  <a:rPr lang="en-GB" dirty="0"/>
+                  <a:t>MMSE criterion</a:t>
+                </a:r>
+              </a:p>
+              <a:p>
+                <a:pPr marL="0" indent="0" algn="ctr">
+                  <a:buNone/>
+                </a:pPr>
+                <a:r>
+                  <a:rPr lang="en-GB" dirty="0">
+                    <a:latin typeface="Cambria Math" panose="02040503050406030204" pitchFamily="18" charset="0"/>
+                    <a:ea typeface="Cambria Math" panose="02040503050406030204" pitchFamily="18" charset="0"/>
+                  </a:rPr>
+                  <a:t>⇓</a:t>
+                </a:r>
+                <a:endParaRPr lang="en-GB" dirty="0"/>
+              </a:p>
+              <a:p>
+                <a:pPr marL="0" indent="0" algn="ctr">
+                  <a:buNone/>
+                </a:pPr>
+                <a:r>
+                  <a:rPr lang="en-GB" dirty="0"/>
+                  <a:t>Wiener-Kolmogorov filter</a:t>
+                </a:r>
+              </a:p>
+              <a:p>
+                <a:pPr marL="0" indent="0" algn="ctr">
+                  <a:buNone/>
+                </a:pPr>
+                <a:endParaRPr lang="en-GB" dirty="0"/>
+              </a:p>
+              <a:p>
+                <a14:m>
+                  <m:oMath xmlns:m="http://schemas.openxmlformats.org/officeDocument/2006/math">
+                    <m:acc>
+                      <m:accPr>
+                        <m:chr m:val="̂"/>
+                        <m:ctrlPr>
+                          <a:rPr lang="en-GB" i="1" smtClean="0">
+                            <a:latin typeface="Cambria Math" panose="02040503050406030204" pitchFamily="18" charset="0"/>
+                          </a:rPr>
+                        </m:ctrlPr>
+                      </m:accPr>
+                      <m:e>
+                        <m:sSub>
+                          <m:sSubPr>
+                            <m:ctrlPr>
+                              <a:rPr lang="fr-BE" b="0" i="1" smtClean="0">
+                                <a:latin typeface="Cambria Math" panose="02040503050406030204" pitchFamily="18" charset="0"/>
+                              </a:rPr>
+                            </m:ctrlPr>
+                          </m:sSubPr>
+                          <m:e>
+                            <m:r>
+                              <a:rPr lang="fr-BE" b="0" i="1" smtClean="0">
+                                <a:latin typeface="Cambria Math" panose="02040503050406030204" pitchFamily="18" charset="0"/>
+                              </a:rPr>
+                              <m:t>𝑠</m:t>
+                            </m:r>
+                          </m:e>
+                          <m:sub>
+                            <m:r>
+                              <a:rPr lang="fr-BE" b="0" i="1" smtClean="0">
+                                <a:latin typeface="Cambria Math" panose="02040503050406030204" pitchFamily="18" charset="0"/>
+                              </a:rPr>
+                              <m:t>𝑡</m:t>
+                            </m:r>
+                          </m:sub>
+                        </m:sSub>
+                      </m:e>
+                    </m:acc>
+                    <m:r>
+                      <a:rPr lang="fr-BE" b="0" i="1" smtClean="0">
+                        <a:latin typeface="Cambria Math" panose="02040503050406030204" pitchFamily="18" charset="0"/>
+                      </a:rPr>
+                      <m:t>=</m:t>
+                    </m:r>
+                    <m:sSub>
+                      <m:sSubPr>
+                        <m:ctrlPr>
+                          <a:rPr lang="fr-BE" b="0" i="1" smtClean="0">
+                            <a:latin typeface="Cambria Math" panose="02040503050406030204" pitchFamily="18" charset="0"/>
+                          </a:rPr>
+                        </m:ctrlPr>
+                      </m:sSubPr>
+                      <m:e>
+                        <m:r>
+                          <a:rPr lang="fr-BE" b="0" i="1" smtClean="0">
+                            <a:latin typeface="Cambria Math" panose="02040503050406030204" pitchFamily="18" charset="0"/>
+                          </a:rPr>
+                          <m:t>𝑘</m:t>
+                        </m:r>
+                      </m:e>
+                      <m:sub>
+                        <m:r>
+                          <a:rPr lang="fr-BE" b="0" i="1" smtClean="0">
+                            <a:latin typeface="Cambria Math" panose="02040503050406030204" pitchFamily="18" charset="0"/>
+                          </a:rPr>
+                          <m:t>𝑠</m:t>
+                        </m:r>
+                      </m:sub>
+                    </m:sSub>
+                    <m:d>
+                      <m:dPr>
+                        <m:begChr m:val="["/>
+                        <m:endChr m:val="]"/>
+                        <m:ctrlPr>
+                          <a:rPr lang="en-GB" b="0" i="1" smtClean="0">
+                            <a:latin typeface="Cambria Math" panose="02040503050406030204" pitchFamily="18" charset="0"/>
+                          </a:rPr>
+                        </m:ctrlPr>
+                      </m:dPr>
+                      <m:e>
+                        <m:f>
+                          <m:fPr>
+                            <m:ctrlPr>
+                              <a:rPr lang="en-GB" b="0" i="1" smtClean="0">
+                                <a:latin typeface="Cambria Math" panose="02040503050406030204" pitchFamily="18" charset="0"/>
+                              </a:rPr>
+                            </m:ctrlPr>
+                          </m:fPr>
+                          <m:num>
+                            <m:sSub>
+                              <m:sSubPr>
+                                <m:ctrlPr>
+                                  <a:rPr lang="el-GR" b="0" i="1" smtClean="0">
+                                    <a:latin typeface="Cambria Math" panose="02040503050406030204" pitchFamily="18" charset="0"/>
+                                    <a:ea typeface="Cambria Math" panose="02040503050406030204" pitchFamily="18" charset="0"/>
+                                  </a:rPr>
+                                </m:ctrlPr>
+                              </m:sSubPr>
+                              <m:e>
+                                <m:r>
+                                  <m:rPr>
+                                    <m:sty m:val="p"/>
+                                  </m:rPr>
+                                  <a:rPr lang="el-GR" b="0" i="1" smtClean="0">
+                                    <a:latin typeface="Cambria Math" panose="02040503050406030204" pitchFamily="18" charset="0"/>
+                                    <a:ea typeface="Cambria Math" panose="02040503050406030204" pitchFamily="18" charset="0"/>
+                                  </a:rPr>
+                                  <m:t>Θ</m:t>
+                                </m:r>
+                              </m:e>
+                              <m:sub>
+                                <m:r>
+                                  <a:rPr lang="fr-BE" b="0" i="1" smtClean="0">
+                                    <a:latin typeface="Cambria Math" panose="02040503050406030204" pitchFamily="18" charset="0"/>
+                                  </a:rPr>
+                                  <m:t>𝑠</m:t>
+                                </m:r>
+                              </m:sub>
+                            </m:sSub>
+                            <m:r>
+                              <a:rPr lang="fr-BE" b="0" i="1" smtClean="0">
+                                <a:latin typeface="Cambria Math" panose="02040503050406030204" pitchFamily="18" charset="0"/>
+                              </a:rPr>
+                              <m:t>(</m:t>
+                            </m:r>
+                            <m:r>
+                              <a:rPr lang="fr-BE" b="0" i="1" smtClean="0">
+                                <a:latin typeface="Cambria Math" panose="02040503050406030204" pitchFamily="18" charset="0"/>
+                              </a:rPr>
+                              <m:t>𝐵</m:t>
+                            </m:r>
+                            <m:r>
+                              <a:rPr lang="fr-BE" b="0" i="1" smtClean="0">
+                                <a:latin typeface="Cambria Math" panose="02040503050406030204" pitchFamily="18" charset="0"/>
+                              </a:rPr>
+                              <m:t>)</m:t>
+                            </m:r>
+                            <m:sSub>
+                              <m:sSubPr>
+                                <m:ctrlPr>
+                                  <a:rPr lang="el-GR" b="0" i="1" smtClean="0">
+                                    <a:latin typeface="Cambria Math" panose="02040503050406030204" pitchFamily="18" charset="0"/>
+                                    <a:ea typeface="Cambria Math" panose="02040503050406030204" pitchFamily="18" charset="0"/>
+                                  </a:rPr>
+                                </m:ctrlPr>
+                              </m:sSubPr>
+                              <m:e>
+                                <m:r>
+                                  <m:rPr>
+                                    <m:sty m:val="p"/>
+                                  </m:rPr>
+                                  <a:rPr lang="el-GR" b="0" i="1" smtClean="0">
+                                    <a:latin typeface="Cambria Math" panose="02040503050406030204" pitchFamily="18" charset="0"/>
+                                    <a:ea typeface="Cambria Math" panose="02040503050406030204" pitchFamily="18" charset="0"/>
+                                  </a:rPr>
+                                  <m:t>Φ</m:t>
+                                </m:r>
+                              </m:e>
+                              <m:sub>
+                                <m:r>
+                                  <a:rPr lang="fr-BE" b="0" i="1" smtClean="0">
+                                    <a:latin typeface="Cambria Math" panose="02040503050406030204" pitchFamily="18" charset="0"/>
+                                  </a:rPr>
+                                  <m:t>𝑛</m:t>
+                                </m:r>
+                              </m:sub>
+                            </m:sSub>
+                            <m:r>
+                              <a:rPr lang="fr-BE" b="0" i="1" smtClean="0">
+                                <a:latin typeface="Cambria Math" panose="02040503050406030204" pitchFamily="18" charset="0"/>
+                              </a:rPr>
+                              <m:t>(</m:t>
+                            </m:r>
+                            <m:r>
+                              <a:rPr lang="fr-BE" b="0" i="1" smtClean="0">
+                                <a:latin typeface="Cambria Math" panose="02040503050406030204" pitchFamily="18" charset="0"/>
+                              </a:rPr>
+                              <m:t>𝐵</m:t>
+                            </m:r>
+                            <m:r>
+                              <a:rPr lang="fr-BE" b="0" i="1" smtClean="0">
+                                <a:latin typeface="Cambria Math" panose="02040503050406030204" pitchFamily="18" charset="0"/>
+                              </a:rPr>
+                              <m:t>)</m:t>
+                            </m:r>
+                            <m:sSub>
+                              <m:sSubPr>
+                                <m:ctrlPr>
+                                  <a:rPr lang="el-GR" i="1">
+                                    <a:latin typeface="Cambria Math" panose="02040503050406030204" pitchFamily="18" charset="0"/>
+                                    <a:ea typeface="Cambria Math" panose="02040503050406030204" pitchFamily="18" charset="0"/>
+                                  </a:rPr>
+                                </m:ctrlPr>
+                              </m:sSubPr>
+                              <m:e>
+                                <m:r>
+                                  <m:rPr>
+                                    <m:sty m:val="p"/>
+                                  </m:rPr>
+                                  <a:rPr lang="el-GR" i="1">
+                                    <a:latin typeface="Cambria Math" panose="02040503050406030204" pitchFamily="18" charset="0"/>
+                                    <a:ea typeface="Cambria Math" panose="02040503050406030204" pitchFamily="18" charset="0"/>
+                                  </a:rPr>
+                                  <m:t>Θ</m:t>
+                                </m:r>
+                              </m:e>
+                              <m:sub>
+                                <m:r>
+                                  <a:rPr lang="fr-BE" i="1">
+                                    <a:latin typeface="Cambria Math" panose="02040503050406030204" pitchFamily="18" charset="0"/>
+                                  </a:rPr>
+                                  <m:t>𝑠</m:t>
+                                </m:r>
+                              </m:sub>
+                            </m:sSub>
+                            <m:r>
+                              <a:rPr lang="fr-BE" i="1">
+                                <a:latin typeface="Cambria Math" panose="02040503050406030204" pitchFamily="18" charset="0"/>
+                              </a:rPr>
+                              <m:t>(</m:t>
+                            </m:r>
+                            <m:r>
+                              <a:rPr lang="fr-BE" b="0" i="1" smtClean="0">
+                                <a:latin typeface="Cambria Math" panose="02040503050406030204" pitchFamily="18" charset="0"/>
+                              </a:rPr>
+                              <m:t>𝐹</m:t>
+                            </m:r>
+                            <m:r>
+                              <a:rPr lang="fr-BE" i="1">
+                                <a:latin typeface="Cambria Math" panose="02040503050406030204" pitchFamily="18" charset="0"/>
+                              </a:rPr>
+                              <m:t>)</m:t>
+                            </m:r>
+                            <m:sSub>
+                              <m:sSubPr>
+                                <m:ctrlPr>
+                                  <a:rPr lang="el-GR" i="1">
+                                    <a:latin typeface="Cambria Math" panose="02040503050406030204" pitchFamily="18" charset="0"/>
+                                    <a:ea typeface="Cambria Math" panose="02040503050406030204" pitchFamily="18" charset="0"/>
+                                  </a:rPr>
+                                </m:ctrlPr>
+                              </m:sSubPr>
+                              <m:e>
+                                <m:r>
+                                  <m:rPr>
+                                    <m:sty m:val="p"/>
+                                  </m:rPr>
+                                  <a:rPr lang="el-GR" i="1">
+                                    <a:latin typeface="Cambria Math" panose="02040503050406030204" pitchFamily="18" charset="0"/>
+                                    <a:ea typeface="Cambria Math" panose="02040503050406030204" pitchFamily="18" charset="0"/>
+                                  </a:rPr>
+                                  <m:t>Φ</m:t>
+                                </m:r>
+                              </m:e>
+                              <m:sub>
+                                <m:r>
+                                  <a:rPr lang="fr-BE" i="1">
+                                    <a:latin typeface="Cambria Math" panose="02040503050406030204" pitchFamily="18" charset="0"/>
+                                  </a:rPr>
+                                  <m:t>𝑛</m:t>
+                                </m:r>
+                              </m:sub>
+                            </m:sSub>
+                            <m:r>
+                              <a:rPr lang="fr-BE" i="1">
+                                <a:latin typeface="Cambria Math" panose="02040503050406030204" pitchFamily="18" charset="0"/>
+                              </a:rPr>
+                              <m:t>(</m:t>
+                            </m:r>
+                            <m:r>
+                              <a:rPr lang="fr-BE" b="0" i="1" smtClean="0">
+                                <a:latin typeface="Cambria Math" panose="02040503050406030204" pitchFamily="18" charset="0"/>
+                              </a:rPr>
+                              <m:t>𝐹</m:t>
+                            </m:r>
+                            <m:r>
+                              <a:rPr lang="fr-BE" i="1">
+                                <a:latin typeface="Cambria Math" panose="02040503050406030204" pitchFamily="18" charset="0"/>
+                              </a:rPr>
+                              <m:t>)</m:t>
+                            </m:r>
+                          </m:num>
+                          <m:den>
+                            <m:r>
+                              <m:rPr>
+                                <m:sty m:val="p"/>
+                              </m:rPr>
+                              <a:rPr lang="el-GR" i="1">
+                                <a:latin typeface="Cambria Math" panose="02040503050406030204" pitchFamily="18" charset="0"/>
+                                <a:ea typeface="Cambria Math" panose="02040503050406030204" pitchFamily="18" charset="0"/>
+                              </a:rPr>
+                              <m:t>Θ</m:t>
+                            </m:r>
+                            <m:r>
+                              <a:rPr lang="fr-BE" i="1">
+                                <a:latin typeface="Cambria Math" panose="02040503050406030204" pitchFamily="18" charset="0"/>
+                                <a:ea typeface="Cambria Math" panose="02040503050406030204" pitchFamily="18" charset="0"/>
+                              </a:rPr>
+                              <m:t>(</m:t>
+                            </m:r>
+                            <m:r>
+                              <a:rPr lang="fr-BE" i="1">
+                                <a:latin typeface="Cambria Math" panose="02040503050406030204" pitchFamily="18" charset="0"/>
+                                <a:ea typeface="Cambria Math" panose="02040503050406030204" pitchFamily="18" charset="0"/>
+                              </a:rPr>
+                              <m:t>𝐵</m:t>
+                            </m:r>
+                            <m:r>
+                              <a:rPr lang="fr-BE" i="1">
+                                <a:latin typeface="Cambria Math" panose="02040503050406030204" pitchFamily="18" charset="0"/>
+                                <a:ea typeface="Cambria Math" panose="02040503050406030204" pitchFamily="18" charset="0"/>
+                              </a:rPr>
+                              <m:t>)</m:t>
+                            </m:r>
+                            <m:r>
+                              <m:rPr>
+                                <m:sty m:val="p"/>
+                              </m:rPr>
+                              <a:rPr lang="el-GR" i="1">
+                                <a:latin typeface="Cambria Math" panose="02040503050406030204" pitchFamily="18" charset="0"/>
+                                <a:ea typeface="Cambria Math" panose="02040503050406030204" pitchFamily="18" charset="0"/>
+                              </a:rPr>
+                              <m:t>Θ</m:t>
+                            </m:r>
+                            <m:r>
+                              <a:rPr lang="fr-BE" i="1">
+                                <a:latin typeface="Cambria Math" panose="02040503050406030204" pitchFamily="18" charset="0"/>
+                                <a:ea typeface="Cambria Math" panose="02040503050406030204" pitchFamily="18" charset="0"/>
+                              </a:rPr>
+                              <m:t>(</m:t>
+                            </m:r>
+                            <m:r>
+                              <a:rPr lang="fr-BE" i="1">
+                                <a:latin typeface="Cambria Math" panose="02040503050406030204" pitchFamily="18" charset="0"/>
+                                <a:ea typeface="Cambria Math" panose="02040503050406030204" pitchFamily="18" charset="0"/>
+                              </a:rPr>
+                              <m:t>𝐹</m:t>
+                            </m:r>
+                            <m:r>
+                              <a:rPr lang="fr-BE" b="0" i="1" smtClean="0">
+                                <a:latin typeface="Cambria Math" panose="02040503050406030204" pitchFamily="18" charset="0"/>
+                                <a:ea typeface="Cambria Math" panose="02040503050406030204" pitchFamily="18" charset="0"/>
+                              </a:rPr>
+                              <m:t>)</m:t>
+                            </m:r>
+                          </m:den>
+                        </m:f>
+                      </m:e>
+                    </m:d>
+                    <m:sSub>
+                      <m:sSubPr>
+                        <m:ctrlPr>
+                          <a:rPr lang="fr-BE" b="0" i="1" smtClean="0">
+                            <a:latin typeface="Cambria Math" panose="02040503050406030204" pitchFamily="18" charset="0"/>
+                          </a:rPr>
+                        </m:ctrlPr>
+                      </m:sSubPr>
+                      <m:e>
+                        <m:r>
+                          <a:rPr lang="fr-BE" b="0" i="1" smtClean="0">
+                            <a:latin typeface="Cambria Math" panose="02040503050406030204" pitchFamily="18" charset="0"/>
+                          </a:rPr>
+                          <m:t>𝑦</m:t>
+                        </m:r>
+                      </m:e>
+                      <m:sub>
+                        <m:r>
+                          <a:rPr lang="fr-BE" b="0" i="1" smtClean="0">
+                            <a:latin typeface="Cambria Math" panose="02040503050406030204" pitchFamily="18" charset="0"/>
+                          </a:rPr>
+                          <m:t>𝑡</m:t>
+                        </m:r>
+                      </m:sub>
+                    </m:sSub>
+                  </m:oMath>
+                </a14:m>
+                <a:endParaRPr lang="fr-BE" b="0" dirty="0"/>
+              </a:p>
+              <a:p>
+                <a14:m>
+                  <m:oMath xmlns:m="http://schemas.openxmlformats.org/officeDocument/2006/math">
+                    <m:acc>
+                      <m:accPr>
+                        <m:chr m:val="̂"/>
+                        <m:ctrlPr>
+                          <a:rPr lang="fr-BE" i="1">
+                            <a:latin typeface="Cambria Math" panose="02040503050406030204" pitchFamily="18" charset="0"/>
+                          </a:rPr>
+                        </m:ctrlPr>
+                      </m:accPr>
+                      <m:e>
+                        <m:sSub>
+                          <m:sSubPr>
+                            <m:ctrlPr>
+                              <a:rPr lang="fr-BE" i="1">
+                                <a:latin typeface="Cambria Math" panose="02040503050406030204" pitchFamily="18" charset="0"/>
+                              </a:rPr>
+                            </m:ctrlPr>
+                          </m:sSubPr>
+                          <m:e>
+                            <m:r>
+                              <a:rPr lang="fr-BE" i="1">
+                                <a:latin typeface="Cambria Math" panose="02040503050406030204" pitchFamily="18" charset="0"/>
+                              </a:rPr>
+                              <m:t>𝑠</m:t>
+                            </m:r>
+                          </m:e>
+                          <m:sub>
+                            <m:r>
+                              <a:rPr lang="fr-BE" i="1">
+                                <a:latin typeface="Cambria Math" panose="02040503050406030204" pitchFamily="18" charset="0"/>
+                              </a:rPr>
+                              <m:t>𝑡</m:t>
+                            </m:r>
+                          </m:sub>
+                        </m:sSub>
+                      </m:e>
+                    </m:acc>
+                    <m:r>
+                      <a:rPr lang="fr-BE" i="1">
+                        <a:latin typeface="Cambria Math" panose="02040503050406030204" pitchFamily="18" charset="0"/>
+                      </a:rPr>
+                      <m:t>=</m:t>
+                    </m:r>
+                    <m:sSub>
+                      <m:sSubPr>
+                        <m:ctrlPr>
+                          <a:rPr lang="fr-BE" i="1">
+                            <a:latin typeface="Cambria Math" panose="02040503050406030204" pitchFamily="18" charset="0"/>
+                          </a:rPr>
+                        </m:ctrlPr>
+                      </m:sSubPr>
+                      <m:e>
+                        <m:r>
+                          <a:rPr lang="fr-BE" i="1">
+                            <a:latin typeface="Cambria Math" panose="02040503050406030204" pitchFamily="18" charset="0"/>
+                          </a:rPr>
+                          <m:t>𝑘</m:t>
+                        </m:r>
+                      </m:e>
+                      <m:sub>
+                        <m:r>
+                          <a:rPr lang="fr-BE" i="1">
+                            <a:latin typeface="Cambria Math" panose="02040503050406030204" pitchFamily="18" charset="0"/>
+                          </a:rPr>
+                          <m:t>𝑠</m:t>
+                        </m:r>
+                      </m:sub>
+                    </m:sSub>
+                    <m:d>
+                      <m:dPr>
+                        <m:begChr m:val="["/>
+                        <m:endChr m:val="]"/>
+                        <m:ctrlPr>
+                          <a:rPr lang="en-GB" i="1">
+                            <a:latin typeface="Cambria Math" panose="02040503050406030204" pitchFamily="18" charset="0"/>
+                          </a:rPr>
+                        </m:ctrlPr>
+                      </m:dPr>
+                      <m:e>
+                        <m:f>
+                          <m:fPr>
+                            <m:ctrlPr>
+                              <a:rPr lang="el-GR" i="1">
+                                <a:latin typeface="Cambria Math" panose="02040503050406030204" pitchFamily="18" charset="0"/>
+                                <a:ea typeface="Cambria Math" panose="02040503050406030204" pitchFamily="18" charset="0"/>
+                              </a:rPr>
+                            </m:ctrlPr>
+                          </m:fPr>
+                          <m:num>
+                            <m:sSub>
+                              <m:sSubPr>
+                                <m:ctrlPr>
+                                  <a:rPr lang="el-GR" i="1">
+                                    <a:latin typeface="Cambria Math" panose="02040503050406030204" pitchFamily="18" charset="0"/>
+                                    <a:ea typeface="Cambria Math" panose="02040503050406030204" pitchFamily="18" charset="0"/>
+                                  </a:rPr>
+                                </m:ctrlPr>
+                              </m:sSubPr>
+                              <m:e>
+                                <m:r>
+                                  <m:rPr>
+                                    <m:sty m:val="p"/>
+                                  </m:rPr>
+                                  <a:rPr lang="el-GR" i="1">
+                                    <a:latin typeface="Cambria Math" panose="02040503050406030204" pitchFamily="18" charset="0"/>
+                                    <a:ea typeface="Cambria Math" panose="02040503050406030204" pitchFamily="18" charset="0"/>
+                                  </a:rPr>
+                                  <m:t>Θ</m:t>
+                                </m:r>
+                              </m:e>
+                              <m:sub>
+                                <m:r>
+                                  <a:rPr lang="fr-BE" i="1">
+                                    <a:latin typeface="Cambria Math" panose="02040503050406030204" pitchFamily="18" charset="0"/>
+                                  </a:rPr>
+                                  <m:t>𝑠</m:t>
+                                </m:r>
+                              </m:sub>
+                            </m:sSub>
+                            <m:r>
+                              <a:rPr lang="fr-BE" i="1">
+                                <a:latin typeface="Cambria Math" panose="02040503050406030204" pitchFamily="18" charset="0"/>
+                              </a:rPr>
+                              <m:t>(</m:t>
+                            </m:r>
+                            <m:r>
+                              <a:rPr lang="fr-BE" i="1">
+                                <a:latin typeface="Cambria Math" panose="02040503050406030204" pitchFamily="18" charset="0"/>
+                              </a:rPr>
+                              <m:t>𝐵</m:t>
+                            </m:r>
+                            <m:r>
+                              <a:rPr lang="fr-BE" i="1">
+                                <a:latin typeface="Cambria Math" panose="02040503050406030204" pitchFamily="18" charset="0"/>
+                              </a:rPr>
+                              <m:t>)</m:t>
+                            </m:r>
+                            <m:sSub>
+                              <m:sSubPr>
+                                <m:ctrlPr>
+                                  <a:rPr lang="el-GR" i="1">
+                                    <a:latin typeface="Cambria Math" panose="02040503050406030204" pitchFamily="18" charset="0"/>
+                                    <a:ea typeface="Cambria Math" panose="02040503050406030204" pitchFamily="18" charset="0"/>
+                                  </a:rPr>
+                                </m:ctrlPr>
+                              </m:sSubPr>
+                              <m:e>
+                                <m:r>
+                                  <m:rPr>
+                                    <m:sty m:val="p"/>
+                                  </m:rPr>
+                                  <a:rPr lang="el-GR" i="1">
+                                    <a:latin typeface="Cambria Math" panose="02040503050406030204" pitchFamily="18" charset="0"/>
+                                    <a:ea typeface="Cambria Math" panose="02040503050406030204" pitchFamily="18" charset="0"/>
+                                  </a:rPr>
+                                  <m:t>Φ</m:t>
+                                </m:r>
+                              </m:e>
+                              <m:sub>
+                                <m:r>
+                                  <a:rPr lang="fr-BE" i="1">
+                                    <a:latin typeface="Cambria Math" panose="02040503050406030204" pitchFamily="18" charset="0"/>
+                                  </a:rPr>
+                                  <m:t>𝑛</m:t>
+                                </m:r>
+                              </m:sub>
+                            </m:sSub>
+                            <m:r>
+                              <a:rPr lang="fr-BE" i="1">
+                                <a:latin typeface="Cambria Math" panose="02040503050406030204" pitchFamily="18" charset="0"/>
+                              </a:rPr>
+                              <m:t>(</m:t>
+                            </m:r>
+                            <m:r>
+                              <a:rPr lang="fr-BE" i="1">
+                                <a:latin typeface="Cambria Math" panose="02040503050406030204" pitchFamily="18" charset="0"/>
+                              </a:rPr>
+                              <m:t>𝐵</m:t>
+                            </m:r>
+                            <m:r>
+                              <a:rPr lang="fr-BE" i="1">
+                                <a:latin typeface="Cambria Math" panose="02040503050406030204" pitchFamily="18" charset="0"/>
+                              </a:rPr>
+                              <m:t>)</m:t>
+                            </m:r>
+                            <m:sSub>
+                              <m:sSubPr>
+                                <m:ctrlPr>
+                                  <a:rPr lang="el-GR" i="1">
+                                    <a:latin typeface="Cambria Math" panose="02040503050406030204" pitchFamily="18" charset="0"/>
+                                    <a:ea typeface="Cambria Math" panose="02040503050406030204" pitchFamily="18" charset="0"/>
+                                  </a:rPr>
+                                </m:ctrlPr>
+                              </m:sSubPr>
+                              <m:e>
+                                <m:r>
+                                  <m:rPr>
+                                    <m:sty m:val="p"/>
+                                  </m:rPr>
+                                  <a:rPr lang="el-GR" i="1">
+                                    <a:latin typeface="Cambria Math" panose="02040503050406030204" pitchFamily="18" charset="0"/>
+                                    <a:ea typeface="Cambria Math" panose="02040503050406030204" pitchFamily="18" charset="0"/>
+                                  </a:rPr>
+                                  <m:t>Θ</m:t>
+                                </m:r>
+                              </m:e>
+                              <m:sub>
+                                <m:r>
+                                  <a:rPr lang="fr-BE" i="1">
+                                    <a:latin typeface="Cambria Math" panose="02040503050406030204" pitchFamily="18" charset="0"/>
+                                  </a:rPr>
+                                  <m:t>𝑠</m:t>
+                                </m:r>
+                              </m:sub>
+                            </m:sSub>
+                            <m:r>
+                              <a:rPr lang="fr-BE" i="1">
+                                <a:latin typeface="Cambria Math" panose="02040503050406030204" pitchFamily="18" charset="0"/>
+                              </a:rPr>
+                              <m:t>(</m:t>
+                            </m:r>
+                            <m:r>
+                              <a:rPr lang="fr-BE" i="1">
+                                <a:latin typeface="Cambria Math" panose="02040503050406030204" pitchFamily="18" charset="0"/>
+                              </a:rPr>
+                              <m:t>𝐹</m:t>
+                            </m:r>
+                            <m:r>
+                              <a:rPr lang="fr-BE" i="1">
+                                <a:latin typeface="Cambria Math" panose="02040503050406030204" pitchFamily="18" charset="0"/>
+                              </a:rPr>
+                              <m:t>)</m:t>
+                            </m:r>
+                            <m:sSub>
+                              <m:sSubPr>
+                                <m:ctrlPr>
+                                  <a:rPr lang="el-GR" i="1">
+                                    <a:latin typeface="Cambria Math" panose="02040503050406030204" pitchFamily="18" charset="0"/>
+                                    <a:ea typeface="Cambria Math" panose="02040503050406030204" pitchFamily="18" charset="0"/>
+                                  </a:rPr>
+                                </m:ctrlPr>
+                              </m:sSubPr>
+                              <m:e>
+                                <m:r>
+                                  <m:rPr>
+                                    <m:sty m:val="p"/>
+                                  </m:rPr>
+                                  <a:rPr lang="el-GR" i="1">
+                                    <a:latin typeface="Cambria Math" panose="02040503050406030204" pitchFamily="18" charset="0"/>
+                                    <a:ea typeface="Cambria Math" panose="02040503050406030204" pitchFamily="18" charset="0"/>
+                                  </a:rPr>
+                                  <m:t>Φ</m:t>
+                                </m:r>
+                              </m:e>
+                              <m:sub>
+                                <m:r>
+                                  <a:rPr lang="fr-BE" i="1">
+                                    <a:latin typeface="Cambria Math" panose="02040503050406030204" pitchFamily="18" charset="0"/>
+                                  </a:rPr>
+                                  <m:t>𝑛</m:t>
+                                </m:r>
+                              </m:sub>
+                            </m:sSub>
+                            <m:r>
+                              <a:rPr lang="fr-BE" i="1">
+                                <a:latin typeface="Cambria Math" panose="02040503050406030204" pitchFamily="18" charset="0"/>
+                              </a:rPr>
+                              <m:t>(</m:t>
+                            </m:r>
+                            <m:r>
+                              <a:rPr lang="fr-BE" i="1">
+                                <a:latin typeface="Cambria Math" panose="02040503050406030204" pitchFamily="18" charset="0"/>
+                              </a:rPr>
+                              <m:t>𝐹</m:t>
+                            </m:r>
+                            <m:r>
+                              <a:rPr lang="fr-BE" i="1">
+                                <a:latin typeface="Cambria Math" panose="02040503050406030204" pitchFamily="18" charset="0"/>
+                              </a:rPr>
+                              <m:t>)</m:t>
+                            </m:r>
+                          </m:num>
+                          <m:den>
+                            <m:r>
+                              <m:rPr>
+                                <m:sty m:val="p"/>
+                              </m:rPr>
+                              <a:rPr lang="el-GR" i="1" smtClean="0">
+                                <a:latin typeface="Cambria Math" panose="02040503050406030204" pitchFamily="18" charset="0"/>
+                                <a:ea typeface="Cambria Math" panose="02040503050406030204" pitchFamily="18" charset="0"/>
+                              </a:rPr>
+                              <m:t>Θ</m:t>
+                            </m:r>
+                            <m:r>
+                              <a:rPr lang="fr-BE" i="1">
+                                <a:latin typeface="Cambria Math" panose="02040503050406030204" pitchFamily="18" charset="0"/>
+                                <a:ea typeface="Cambria Math" panose="02040503050406030204" pitchFamily="18" charset="0"/>
+                              </a:rPr>
+                              <m:t>(</m:t>
+                            </m:r>
+                            <m:r>
+                              <a:rPr lang="fr-BE" i="1">
+                                <a:latin typeface="Cambria Math" panose="02040503050406030204" pitchFamily="18" charset="0"/>
+                                <a:ea typeface="Cambria Math" panose="02040503050406030204" pitchFamily="18" charset="0"/>
+                              </a:rPr>
+                              <m:t>𝐵</m:t>
+                            </m:r>
+                            <m:r>
+                              <a:rPr lang="fr-BE" i="1">
+                                <a:latin typeface="Cambria Math" panose="02040503050406030204" pitchFamily="18" charset="0"/>
+                                <a:ea typeface="Cambria Math" panose="02040503050406030204" pitchFamily="18" charset="0"/>
+                              </a:rPr>
+                              <m:t>)</m:t>
+                            </m:r>
+                            <m:r>
+                              <m:rPr>
+                                <m:sty m:val="p"/>
+                              </m:rPr>
+                              <a:rPr lang="el-GR" i="1" smtClean="0">
+                                <a:latin typeface="Cambria Math" panose="02040503050406030204" pitchFamily="18" charset="0"/>
+                                <a:ea typeface="Cambria Math" panose="02040503050406030204" pitchFamily="18" charset="0"/>
+                              </a:rPr>
+                              <m:t>Θ</m:t>
+                            </m:r>
+                            <m:r>
+                              <a:rPr lang="fr-BE" i="1">
+                                <a:latin typeface="Cambria Math" panose="02040503050406030204" pitchFamily="18" charset="0"/>
+                                <a:ea typeface="Cambria Math" panose="02040503050406030204" pitchFamily="18" charset="0"/>
+                              </a:rPr>
+                              <m:t>(</m:t>
+                            </m:r>
+                            <m:r>
+                              <a:rPr lang="fr-BE" i="1">
+                                <a:latin typeface="Cambria Math" panose="02040503050406030204" pitchFamily="18" charset="0"/>
+                                <a:ea typeface="Cambria Math" panose="02040503050406030204" pitchFamily="18" charset="0"/>
+                              </a:rPr>
+                              <m:t>𝐹</m:t>
+                            </m:r>
+                            <m:r>
+                              <a:rPr lang="fr-BE" i="1">
+                                <a:latin typeface="Cambria Math" panose="02040503050406030204" pitchFamily="18" charset="0"/>
+                                <a:ea typeface="Cambria Math" panose="02040503050406030204" pitchFamily="18" charset="0"/>
+                              </a:rPr>
+                              <m:t>)</m:t>
+                            </m:r>
+                          </m:den>
+                        </m:f>
+                      </m:e>
+                    </m:d>
+                    <m:d>
+                      <m:dPr>
+                        <m:begChr m:val="["/>
+                        <m:endChr m:val="]"/>
+                        <m:ctrlPr>
+                          <a:rPr lang="en-GB" i="1" smtClean="0">
+                            <a:latin typeface="Cambria Math" panose="02040503050406030204" pitchFamily="18" charset="0"/>
+                            <a:ea typeface="Cambria Math" panose="02040503050406030204" pitchFamily="18" charset="0"/>
+                          </a:rPr>
+                        </m:ctrlPr>
+                      </m:dPr>
+                      <m:e>
+                        <m:f>
+                          <m:fPr>
+                            <m:ctrlPr>
+                              <a:rPr lang="el-GR" i="1">
+                                <a:latin typeface="Cambria Math" panose="02040503050406030204" pitchFamily="18" charset="0"/>
+                                <a:ea typeface="Cambria Math" panose="02040503050406030204" pitchFamily="18" charset="0"/>
+                              </a:rPr>
+                            </m:ctrlPr>
+                          </m:fPr>
+                          <m:num>
+                            <m:r>
+                              <m:rPr>
+                                <m:sty m:val="p"/>
+                              </m:rPr>
+                              <a:rPr lang="el-GR" i="1">
+                                <a:latin typeface="Cambria Math" panose="02040503050406030204" pitchFamily="18" charset="0"/>
+                                <a:ea typeface="Cambria Math" panose="02040503050406030204" pitchFamily="18" charset="0"/>
+                              </a:rPr>
+                              <m:t>Θ</m:t>
+                            </m:r>
+                            <m:r>
+                              <a:rPr lang="fr-BE" i="1">
+                                <a:latin typeface="Cambria Math" panose="02040503050406030204" pitchFamily="18" charset="0"/>
+                                <a:ea typeface="Cambria Math" panose="02040503050406030204" pitchFamily="18" charset="0"/>
+                              </a:rPr>
+                              <m:t>(</m:t>
+                            </m:r>
+                            <m:r>
+                              <a:rPr lang="fr-BE" i="1">
+                                <a:latin typeface="Cambria Math" panose="02040503050406030204" pitchFamily="18" charset="0"/>
+                                <a:ea typeface="Cambria Math" panose="02040503050406030204" pitchFamily="18" charset="0"/>
+                              </a:rPr>
+                              <m:t>𝐵</m:t>
+                            </m:r>
+                            <m:r>
+                              <a:rPr lang="fr-BE" i="1">
+                                <a:latin typeface="Cambria Math" panose="02040503050406030204" pitchFamily="18" charset="0"/>
+                                <a:ea typeface="Cambria Math" panose="02040503050406030204" pitchFamily="18" charset="0"/>
+                              </a:rPr>
+                              <m:t>)</m:t>
+                            </m:r>
+                          </m:num>
+                          <m:den>
+                            <m:r>
+                              <m:rPr>
+                                <m:sty m:val="p"/>
+                              </m:rPr>
+                              <a:rPr lang="el-GR" i="1" smtClean="0">
+                                <a:latin typeface="Cambria Math" panose="02040503050406030204" pitchFamily="18" charset="0"/>
+                                <a:ea typeface="Cambria Math" panose="02040503050406030204" pitchFamily="18" charset="0"/>
+                              </a:rPr>
+                              <m:t>Φ</m:t>
+                            </m:r>
+                            <m:r>
+                              <a:rPr lang="fr-BE" b="0" i="1" smtClean="0">
+                                <a:latin typeface="Cambria Math" panose="02040503050406030204" pitchFamily="18" charset="0"/>
+                                <a:ea typeface="Cambria Math" panose="02040503050406030204" pitchFamily="18" charset="0"/>
+                              </a:rPr>
+                              <m:t>(</m:t>
+                            </m:r>
+                            <m:r>
+                              <a:rPr lang="fr-BE" b="0" i="1" smtClean="0">
+                                <a:latin typeface="Cambria Math" panose="02040503050406030204" pitchFamily="18" charset="0"/>
+                                <a:ea typeface="Cambria Math" panose="02040503050406030204" pitchFamily="18" charset="0"/>
+                              </a:rPr>
+                              <m:t>𝐵</m:t>
+                            </m:r>
+                            <m:r>
+                              <a:rPr lang="fr-BE" b="0" i="1" smtClean="0">
+                                <a:latin typeface="Cambria Math" panose="02040503050406030204" pitchFamily="18" charset="0"/>
+                                <a:ea typeface="Cambria Math" panose="02040503050406030204" pitchFamily="18" charset="0"/>
+                              </a:rPr>
+                              <m:t>)</m:t>
+                            </m:r>
+                          </m:den>
+                        </m:f>
+                      </m:e>
+                    </m:d>
+                    <m:sSub>
+                      <m:sSubPr>
+                        <m:ctrlPr>
+                          <a:rPr lang="fr-BE" i="1" smtClean="0">
+                            <a:latin typeface="Cambria Math" panose="02040503050406030204" pitchFamily="18" charset="0"/>
+                            <a:ea typeface="Cambria Math" panose="02040503050406030204" pitchFamily="18" charset="0"/>
+                          </a:rPr>
+                        </m:ctrlPr>
+                      </m:sSubPr>
+                      <m:e>
+                        <m:r>
+                          <a:rPr lang="fr-BE" i="1" smtClean="0">
+                            <a:latin typeface="Cambria Math" panose="02040503050406030204" pitchFamily="18" charset="0"/>
+                            <a:ea typeface="Cambria Math" panose="02040503050406030204" pitchFamily="18" charset="0"/>
+                          </a:rPr>
+                          <m:t>𝜀</m:t>
+                        </m:r>
+                      </m:e>
+                      <m:sub>
+                        <m:r>
+                          <a:rPr lang="fr-BE" i="1">
+                            <a:latin typeface="Cambria Math" panose="02040503050406030204" pitchFamily="18" charset="0"/>
+                          </a:rPr>
+                          <m:t>𝑡</m:t>
+                        </m:r>
+                      </m:sub>
+                    </m:sSub>
+                    <m:r>
+                      <a:rPr lang="fr-BE" b="0" i="1" smtClean="0">
+                        <a:latin typeface="Cambria Math" panose="02040503050406030204" pitchFamily="18" charset="0"/>
+                      </a:rPr>
+                      <m:t>=</m:t>
+                    </m:r>
+                  </m:oMath>
+                </a14:m>
+                <a:r>
+                  <a:rPr lang="fr-BE" dirty="0"/>
+                  <a:t> </a:t>
+                </a:r>
+                <a14:m>
+                  <m:oMath xmlns:m="http://schemas.openxmlformats.org/officeDocument/2006/math">
+                    <m:sSub>
+                      <m:sSubPr>
+                        <m:ctrlPr>
+                          <a:rPr lang="fr-BE" i="1">
+                            <a:latin typeface="Cambria Math" panose="02040503050406030204" pitchFamily="18" charset="0"/>
+                          </a:rPr>
+                        </m:ctrlPr>
+                      </m:sSubPr>
+                      <m:e>
+                        <m:r>
+                          <a:rPr lang="fr-BE" i="1">
+                            <a:latin typeface="Cambria Math" panose="02040503050406030204" pitchFamily="18" charset="0"/>
+                          </a:rPr>
+                          <m:t>𝑘</m:t>
+                        </m:r>
+                      </m:e>
+                      <m:sub>
+                        <m:r>
+                          <a:rPr lang="fr-BE" i="1">
+                            <a:latin typeface="Cambria Math" panose="02040503050406030204" pitchFamily="18" charset="0"/>
+                          </a:rPr>
+                          <m:t>𝑠</m:t>
+                        </m:r>
+                      </m:sub>
+                    </m:sSub>
+                    <m:d>
+                      <m:dPr>
+                        <m:begChr m:val="["/>
+                        <m:endChr m:val="]"/>
+                        <m:ctrlPr>
+                          <a:rPr lang="el-GR" i="1">
+                            <a:latin typeface="Cambria Math" panose="02040503050406030204" pitchFamily="18" charset="0"/>
+                            <a:ea typeface="Cambria Math" panose="02040503050406030204" pitchFamily="18" charset="0"/>
+                          </a:rPr>
+                        </m:ctrlPr>
+                      </m:dPr>
+                      <m:e>
+                        <m:f>
+                          <m:fPr>
+                            <m:ctrlPr>
+                              <a:rPr lang="el-GR" i="1">
+                                <a:latin typeface="Cambria Math" panose="02040503050406030204" pitchFamily="18" charset="0"/>
+                                <a:ea typeface="Cambria Math" panose="02040503050406030204" pitchFamily="18" charset="0"/>
+                              </a:rPr>
+                            </m:ctrlPr>
+                          </m:fPr>
+                          <m:num>
+                            <m:sSub>
+                              <m:sSubPr>
+                                <m:ctrlPr>
+                                  <a:rPr lang="el-GR" i="1">
+                                    <a:latin typeface="Cambria Math" panose="02040503050406030204" pitchFamily="18" charset="0"/>
+                                    <a:ea typeface="Cambria Math" panose="02040503050406030204" pitchFamily="18" charset="0"/>
+                                  </a:rPr>
+                                </m:ctrlPr>
+                              </m:sSubPr>
+                              <m:e>
+                                <m:r>
+                                  <m:rPr>
+                                    <m:sty m:val="p"/>
+                                  </m:rPr>
+                                  <a:rPr lang="el-GR" i="1">
+                                    <a:latin typeface="Cambria Math" panose="02040503050406030204" pitchFamily="18" charset="0"/>
+                                    <a:ea typeface="Cambria Math" panose="02040503050406030204" pitchFamily="18" charset="0"/>
+                                  </a:rPr>
+                                  <m:t>Θ</m:t>
+                                </m:r>
+                              </m:e>
+                              <m:sub>
+                                <m:r>
+                                  <a:rPr lang="fr-BE" i="1">
+                                    <a:latin typeface="Cambria Math" panose="02040503050406030204" pitchFamily="18" charset="0"/>
+                                  </a:rPr>
+                                  <m:t>𝑠</m:t>
+                                </m:r>
+                              </m:sub>
+                            </m:sSub>
+                            <m:r>
+                              <a:rPr lang="fr-BE" i="1">
+                                <a:latin typeface="Cambria Math" panose="02040503050406030204" pitchFamily="18" charset="0"/>
+                              </a:rPr>
+                              <m:t>(</m:t>
+                            </m:r>
+                            <m:r>
+                              <a:rPr lang="fr-BE" i="1">
+                                <a:latin typeface="Cambria Math" panose="02040503050406030204" pitchFamily="18" charset="0"/>
+                              </a:rPr>
+                              <m:t>𝐵</m:t>
+                            </m:r>
+                            <m:r>
+                              <a:rPr lang="fr-BE" i="1">
+                                <a:latin typeface="Cambria Math" panose="02040503050406030204" pitchFamily="18" charset="0"/>
+                              </a:rPr>
+                              <m:t>) </m:t>
+                            </m:r>
+                            <m:sSub>
+                              <m:sSubPr>
+                                <m:ctrlPr>
+                                  <a:rPr lang="el-GR" i="1">
+                                    <a:latin typeface="Cambria Math" panose="02040503050406030204" pitchFamily="18" charset="0"/>
+                                    <a:ea typeface="Cambria Math" panose="02040503050406030204" pitchFamily="18" charset="0"/>
+                                  </a:rPr>
+                                </m:ctrlPr>
+                              </m:sSubPr>
+                              <m:e>
+                                <m:r>
+                                  <m:rPr>
+                                    <m:sty m:val="p"/>
+                                  </m:rPr>
+                                  <a:rPr lang="el-GR" i="1">
+                                    <a:latin typeface="Cambria Math" panose="02040503050406030204" pitchFamily="18" charset="0"/>
+                                    <a:ea typeface="Cambria Math" panose="02040503050406030204" pitchFamily="18" charset="0"/>
+                                  </a:rPr>
+                                  <m:t>Θ</m:t>
+                                </m:r>
+                              </m:e>
+                              <m:sub>
+                                <m:r>
+                                  <a:rPr lang="fr-BE" i="1">
+                                    <a:latin typeface="Cambria Math" panose="02040503050406030204" pitchFamily="18" charset="0"/>
+                                  </a:rPr>
+                                  <m:t>𝑠</m:t>
+                                </m:r>
+                              </m:sub>
+                            </m:sSub>
+                            <m:r>
+                              <a:rPr lang="fr-BE" i="1">
+                                <a:latin typeface="Cambria Math" panose="02040503050406030204" pitchFamily="18" charset="0"/>
+                              </a:rPr>
+                              <m:t>(</m:t>
+                            </m:r>
+                            <m:r>
+                              <a:rPr lang="fr-BE" i="1">
+                                <a:latin typeface="Cambria Math" panose="02040503050406030204" pitchFamily="18" charset="0"/>
+                              </a:rPr>
+                              <m:t>𝐹</m:t>
+                            </m:r>
+                            <m:r>
+                              <a:rPr lang="fr-BE" i="1">
+                                <a:latin typeface="Cambria Math" panose="02040503050406030204" pitchFamily="18" charset="0"/>
+                              </a:rPr>
+                              <m:t>)</m:t>
+                            </m:r>
+                            <m:sSub>
+                              <m:sSubPr>
+                                <m:ctrlPr>
+                                  <a:rPr lang="el-GR" i="1">
+                                    <a:latin typeface="Cambria Math" panose="02040503050406030204" pitchFamily="18" charset="0"/>
+                                    <a:ea typeface="Cambria Math" panose="02040503050406030204" pitchFamily="18" charset="0"/>
+                                  </a:rPr>
+                                </m:ctrlPr>
+                              </m:sSubPr>
+                              <m:e>
+                                <m:r>
+                                  <m:rPr>
+                                    <m:sty m:val="p"/>
+                                  </m:rPr>
+                                  <a:rPr lang="el-GR" i="1">
+                                    <a:latin typeface="Cambria Math" panose="02040503050406030204" pitchFamily="18" charset="0"/>
+                                    <a:ea typeface="Cambria Math" panose="02040503050406030204" pitchFamily="18" charset="0"/>
+                                  </a:rPr>
+                                  <m:t>Φ</m:t>
+                                </m:r>
+                              </m:e>
+                              <m:sub>
+                                <m:r>
+                                  <a:rPr lang="fr-BE" i="1">
+                                    <a:latin typeface="Cambria Math" panose="02040503050406030204" pitchFamily="18" charset="0"/>
+                                  </a:rPr>
+                                  <m:t>𝑛</m:t>
+                                </m:r>
+                              </m:sub>
+                            </m:sSub>
+                            <m:r>
+                              <a:rPr lang="fr-BE" i="1">
+                                <a:latin typeface="Cambria Math" panose="02040503050406030204" pitchFamily="18" charset="0"/>
+                              </a:rPr>
+                              <m:t>(</m:t>
+                            </m:r>
+                            <m:r>
+                              <a:rPr lang="fr-BE" i="1">
+                                <a:latin typeface="Cambria Math" panose="02040503050406030204" pitchFamily="18" charset="0"/>
+                              </a:rPr>
+                              <m:t>𝐹</m:t>
+                            </m:r>
+                            <m:r>
+                              <a:rPr lang="fr-BE" i="1">
+                                <a:latin typeface="Cambria Math" panose="02040503050406030204" pitchFamily="18" charset="0"/>
+                              </a:rPr>
+                              <m:t>)</m:t>
+                            </m:r>
+                          </m:num>
+                          <m:den>
+                            <m:sSub>
+                              <m:sSubPr>
+                                <m:ctrlPr>
+                                  <a:rPr lang="el-GR" i="1">
+                                    <a:latin typeface="Cambria Math" panose="02040503050406030204" pitchFamily="18" charset="0"/>
+                                    <a:ea typeface="Cambria Math" panose="02040503050406030204" pitchFamily="18" charset="0"/>
+                                  </a:rPr>
+                                </m:ctrlPr>
+                              </m:sSubPr>
+                              <m:e>
+                                <m:r>
+                                  <m:rPr>
+                                    <m:sty m:val="p"/>
+                                  </m:rPr>
+                                  <a:rPr lang="el-GR" i="1">
+                                    <a:latin typeface="Cambria Math" panose="02040503050406030204" pitchFamily="18" charset="0"/>
+                                    <a:ea typeface="Cambria Math" panose="02040503050406030204" pitchFamily="18" charset="0"/>
+                                  </a:rPr>
+                                  <m:t>Φ</m:t>
+                                </m:r>
+                              </m:e>
+                              <m:sub>
+                                <m:r>
+                                  <a:rPr lang="fr-BE" b="0" i="1" smtClean="0">
+                                    <a:latin typeface="Cambria Math" panose="02040503050406030204" pitchFamily="18" charset="0"/>
+                                    <a:ea typeface="Cambria Math" panose="02040503050406030204" pitchFamily="18" charset="0"/>
+                                  </a:rPr>
+                                  <m:t>𝑠</m:t>
+                                </m:r>
+                              </m:sub>
+                            </m:sSub>
+                            <m:r>
+                              <a:rPr lang="fr-BE" i="1">
+                                <a:latin typeface="Cambria Math" panose="02040503050406030204" pitchFamily="18" charset="0"/>
+                              </a:rPr>
+                              <m:t>(</m:t>
+                            </m:r>
+                            <m:r>
+                              <a:rPr lang="fr-BE" i="1">
+                                <a:latin typeface="Cambria Math" panose="02040503050406030204" pitchFamily="18" charset="0"/>
+                              </a:rPr>
+                              <m:t>𝐵</m:t>
+                            </m:r>
+                            <m:r>
+                              <a:rPr lang="fr-BE" i="1">
+                                <a:latin typeface="Cambria Math" panose="02040503050406030204" pitchFamily="18" charset="0"/>
+                              </a:rPr>
+                              <m:t>)</m:t>
+                            </m:r>
+                            <m:r>
+                              <m:rPr>
+                                <m:sty m:val="p"/>
+                              </m:rPr>
+                              <a:rPr lang="el-GR" i="1">
+                                <a:latin typeface="Cambria Math" panose="02040503050406030204" pitchFamily="18" charset="0"/>
+                                <a:ea typeface="Cambria Math" panose="02040503050406030204" pitchFamily="18" charset="0"/>
+                              </a:rPr>
+                              <m:t>Θ</m:t>
+                            </m:r>
+                            <m:r>
+                              <a:rPr lang="fr-BE" i="1">
+                                <a:latin typeface="Cambria Math" panose="02040503050406030204" pitchFamily="18" charset="0"/>
+                                <a:ea typeface="Cambria Math" panose="02040503050406030204" pitchFamily="18" charset="0"/>
+                              </a:rPr>
+                              <m:t>(</m:t>
+                            </m:r>
+                            <m:r>
+                              <a:rPr lang="fr-BE" i="1">
+                                <a:latin typeface="Cambria Math" panose="02040503050406030204" pitchFamily="18" charset="0"/>
+                                <a:ea typeface="Cambria Math" panose="02040503050406030204" pitchFamily="18" charset="0"/>
+                              </a:rPr>
+                              <m:t>𝐹</m:t>
+                            </m:r>
+                            <m:r>
+                              <a:rPr lang="fr-BE" i="1">
+                                <a:latin typeface="Cambria Math" panose="02040503050406030204" pitchFamily="18" charset="0"/>
+                                <a:ea typeface="Cambria Math" panose="02040503050406030204" pitchFamily="18" charset="0"/>
+                              </a:rPr>
+                              <m:t>)</m:t>
+                            </m:r>
+                          </m:den>
+                        </m:f>
+                      </m:e>
+                    </m:d>
+                    <m:sSub>
+                      <m:sSubPr>
+                        <m:ctrlPr>
+                          <a:rPr lang="fr-BE" i="1">
+                            <a:latin typeface="Cambria Math" panose="02040503050406030204" pitchFamily="18" charset="0"/>
+                            <a:ea typeface="Cambria Math" panose="02040503050406030204" pitchFamily="18" charset="0"/>
+                          </a:rPr>
+                        </m:ctrlPr>
+                      </m:sSubPr>
+                      <m:e>
+                        <m:r>
+                          <a:rPr lang="fr-BE" i="1">
+                            <a:latin typeface="Cambria Math" panose="02040503050406030204" pitchFamily="18" charset="0"/>
+                            <a:ea typeface="Cambria Math" panose="02040503050406030204" pitchFamily="18" charset="0"/>
+                          </a:rPr>
+                          <m:t>𝜀</m:t>
+                        </m:r>
+                      </m:e>
+                      <m:sub>
+                        <m:r>
+                          <a:rPr lang="fr-BE" i="1">
+                            <a:latin typeface="Cambria Math" panose="02040503050406030204" pitchFamily="18" charset="0"/>
+                          </a:rPr>
+                          <m:t>𝑡</m:t>
+                        </m:r>
+                      </m:sub>
+                    </m:sSub>
+                  </m:oMath>
+                </a14:m>
+                <a:endParaRPr lang="fr-BE" dirty="0"/>
+              </a:p>
+              <a:p>
+                <a14:m>
+                  <m:oMath xmlns:m="http://schemas.openxmlformats.org/officeDocument/2006/math">
+                    <m:acc>
+                      <m:accPr>
+                        <m:chr m:val="̂"/>
+                        <m:ctrlPr>
+                          <a:rPr lang="fr-BE" i="1">
+                            <a:latin typeface="Cambria Math" panose="02040503050406030204" pitchFamily="18" charset="0"/>
+                          </a:rPr>
+                        </m:ctrlPr>
+                      </m:accPr>
+                      <m:e>
+                        <m:sSub>
+                          <m:sSubPr>
+                            <m:ctrlPr>
+                              <a:rPr lang="fr-BE" i="1">
+                                <a:latin typeface="Cambria Math" panose="02040503050406030204" pitchFamily="18" charset="0"/>
+                              </a:rPr>
+                            </m:ctrlPr>
+                          </m:sSubPr>
+                          <m:e>
+                            <m:r>
+                              <a:rPr lang="fr-BE" i="1">
+                                <a:latin typeface="Cambria Math" panose="02040503050406030204" pitchFamily="18" charset="0"/>
+                              </a:rPr>
+                              <m:t>𝑠</m:t>
+                            </m:r>
+                          </m:e>
+                          <m:sub>
+                            <m:r>
+                              <a:rPr lang="fr-BE" i="1">
+                                <a:latin typeface="Cambria Math" panose="02040503050406030204" pitchFamily="18" charset="0"/>
+                              </a:rPr>
+                              <m:t>𝑡</m:t>
+                            </m:r>
+                          </m:sub>
+                        </m:sSub>
+                      </m:e>
+                    </m:acc>
+                    <m:r>
+                      <a:rPr lang="fr-BE" i="1">
+                        <a:latin typeface="Cambria Math" panose="02040503050406030204" pitchFamily="18" charset="0"/>
+                      </a:rPr>
+                      <m:t>=</m:t>
+                    </m:r>
+                    <m:nary>
+                      <m:naryPr>
+                        <m:chr m:val="∑"/>
+                        <m:supHide m:val="on"/>
+                        <m:ctrlPr>
+                          <a:rPr lang="fr-BE" b="0" i="1" smtClean="0">
+                            <a:latin typeface="Cambria Math" panose="02040503050406030204" pitchFamily="18" charset="0"/>
+                          </a:rPr>
+                        </m:ctrlPr>
+                      </m:naryPr>
+                      <m:sub>
+                        <m:r>
+                          <m:rPr>
+                            <m:brk m:alnAt="7"/>
+                          </m:rPr>
+                          <a:rPr lang="fr-BE" b="0" i="1" smtClean="0">
+                            <a:latin typeface="Cambria Math" panose="02040503050406030204" pitchFamily="18" charset="0"/>
+                          </a:rPr>
+                          <m:t>𝑖</m:t>
+                        </m:r>
+                        <m:r>
+                          <m:rPr>
+                            <m:brk m:alnAt="7"/>
+                          </m:rPr>
+                          <a:rPr lang="fr-BE" b="0" i="1" smtClean="0">
+                            <a:latin typeface="Cambria Math" panose="02040503050406030204" pitchFamily="18" charset="0"/>
+                            <a:ea typeface="Cambria Math" panose="02040503050406030204" pitchFamily="18" charset="0"/>
+                          </a:rPr>
+                          <m:t>≤</m:t>
+                        </m:r>
+                        <m:r>
+                          <m:rPr>
+                            <m:brk m:alnAt="7"/>
+                          </m:rPr>
+                          <a:rPr lang="fr-BE" b="0" i="1" smtClean="0">
+                            <a:latin typeface="Cambria Math" panose="02040503050406030204" pitchFamily="18" charset="0"/>
+                            <a:ea typeface="Cambria Math" panose="02040503050406030204" pitchFamily="18" charset="0"/>
+                          </a:rPr>
+                          <m:t>𝑡</m:t>
+                        </m:r>
+                      </m:sub>
+                      <m:sup/>
+                      <m:e>
+                        <m:sSubSup>
+                          <m:sSubSupPr>
+                            <m:ctrlPr>
+                              <a:rPr lang="en-GB" i="1" smtClean="0">
+                                <a:latin typeface="Cambria Math" panose="02040503050406030204" pitchFamily="18" charset="0"/>
+                                <a:ea typeface="Cambria Math" panose="02040503050406030204" pitchFamily="18" charset="0"/>
+                              </a:rPr>
+                            </m:ctrlPr>
+                          </m:sSubSupPr>
+                          <m:e>
+                            <m:r>
+                              <a:rPr lang="en-GB" i="1" smtClean="0">
+                                <a:latin typeface="Cambria Math" panose="02040503050406030204" pitchFamily="18" charset="0"/>
+                                <a:ea typeface="Cambria Math" panose="02040503050406030204" pitchFamily="18" charset="0"/>
+                              </a:rPr>
+                              <m:t>𝜉</m:t>
+                            </m:r>
+                          </m:e>
+                          <m:sub>
+                            <m:r>
+                              <a:rPr lang="fr-BE" b="0" i="1" smtClean="0">
+                                <a:latin typeface="Cambria Math" panose="02040503050406030204" pitchFamily="18" charset="0"/>
+                              </a:rPr>
+                              <m:t>𝑠</m:t>
+                            </m:r>
+                            <m:r>
+                              <a:rPr lang="fr-BE" b="0" i="1" smtClean="0">
+                                <a:latin typeface="Cambria Math" panose="02040503050406030204" pitchFamily="18" charset="0"/>
+                              </a:rPr>
+                              <m:t>,</m:t>
+                            </m:r>
+                            <m:r>
+                              <a:rPr lang="fr-BE" b="0" i="1" smtClean="0">
+                                <a:latin typeface="Cambria Math" panose="02040503050406030204" pitchFamily="18" charset="0"/>
+                              </a:rPr>
+                              <m:t>𝑖</m:t>
+                            </m:r>
+                          </m:sub>
+                          <m:sup>
+                            <m:r>
+                              <a:rPr lang="fr-BE" b="0" i="1" smtClean="0">
+                                <a:latin typeface="Cambria Math" panose="02040503050406030204" pitchFamily="18" charset="0"/>
+                              </a:rPr>
+                              <m:t>−</m:t>
+                            </m:r>
+                          </m:sup>
+                        </m:sSubSup>
+                        <m:sSub>
+                          <m:sSubPr>
+                            <m:ctrlPr>
+                              <a:rPr lang="fr-BE" i="1">
+                                <a:latin typeface="Cambria Math" panose="02040503050406030204" pitchFamily="18" charset="0"/>
+                                <a:ea typeface="Cambria Math" panose="02040503050406030204" pitchFamily="18" charset="0"/>
+                              </a:rPr>
+                            </m:ctrlPr>
+                          </m:sSubPr>
+                          <m:e>
+                            <m:r>
+                              <a:rPr lang="fr-BE" i="1">
+                                <a:latin typeface="Cambria Math" panose="02040503050406030204" pitchFamily="18" charset="0"/>
+                                <a:ea typeface="Cambria Math" panose="02040503050406030204" pitchFamily="18" charset="0"/>
+                              </a:rPr>
+                              <m:t>𝜀</m:t>
+                            </m:r>
+                          </m:e>
+                          <m:sub>
+                            <m:r>
+                              <a:rPr lang="fr-BE" b="0" i="1" smtClean="0">
+                                <a:latin typeface="Cambria Math" panose="02040503050406030204" pitchFamily="18" charset="0"/>
+                                <a:ea typeface="Cambria Math" panose="02040503050406030204" pitchFamily="18" charset="0"/>
+                              </a:rPr>
+                              <m:t>𝑖</m:t>
+                            </m:r>
+                          </m:sub>
+                        </m:sSub>
+                      </m:e>
+                    </m:nary>
+                    <m:r>
+                      <a:rPr lang="fr-BE" b="0" i="1" smtClean="0">
+                        <a:latin typeface="Cambria Math" panose="02040503050406030204" pitchFamily="18" charset="0"/>
+                      </a:rPr>
+                      <m:t>+</m:t>
+                    </m:r>
+                    <m:nary>
+                      <m:naryPr>
+                        <m:chr m:val="∑"/>
+                        <m:supHide m:val="on"/>
+                        <m:ctrlPr>
+                          <a:rPr lang="fr-BE" i="1">
+                            <a:latin typeface="Cambria Math" panose="02040503050406030204" pitchFamily="18" charset="0"/>
+                          </a:rPr>
+                        </m:ctrlPr>
+                      </m:naryPr>
+                      <m:sub>
+                        <m:r>
+                          <m:rPr>
+                            <m:brk m:alnAt="7"/>
+                          </m:rPr>
+                          <a:rPr lang="fr-BE" i="1">
+                            <a:latin typeface="Cambria Math" panose="02040503050406030204" pitchFamily="18" charset="0"/>
+                          </a:rPr>
+                          <m:t>𝑖</m:t>
+                        </m:r>
+                        <m:r>
+                          <m:rPr>
+                            <m:brk m:alnAt="7"/>
+                          </m:rPr>
+                          <a:rPr lang="fr-BE" b="0" i="1" smtClean="0">
+                            <a:latin typeface="Cambria Math" panose="02040503050406030204" pitchFamily="18" charset="0"/>
+                          </a:rPr>
+                          <m:t>&gt;</m:t>
+                        </m:r>
+                        <m:r>
+                          <m:rPr>
+                            <m:brk m:alnAt="7"/>
+                          </m:rPr>
+                          <a:rPr lang="fr-BE" i="1">
+                            <a:latin typeface="Cambria Math" panose="02040503050406030204" pitchFamily="18" charset="0"/>
+                            <a:ea typeface="Cambria Math" panose="02040503050406030204" pitchFamily="18" charset="0"/>
+                          </a:rPr>
+                          <m:t>𝑡</m:t>
+                        </m:r>
+                      </m:sub>
+                      <m:sup/>
+                      <m:e>
+                        <m:sSubSup>
+                          <m:sSubSupPr>
+                            <m:ctrlPr>
+                              <a:rPr lang="en-GB" i="1">
+                                <a:latin typeface="Cambria Math" panose="02040503050406030204" pitchFamily="18" charset="0"/>
+                                <a:ea typeface="Cambria Math" panose="02040503050406030204" pitchFamily="18" charset="0"/>
+                              </a:rPr>
+                            </m:ctrlPr>
+                          </m:sSubSupPr>
+                          <m:e>
+                            <m:r>
+                              <a:rPr lang="en-GB" i="1">
+                                <a:latin typeface="Cambria Math" panose="02040503050406030204" pitchFamily="18" charset="0"/>
+                                <a:ea typeface="Cambria Math" panose="02040503050406030204" pitchFamily="18" charset="0"/>
+                              </a:rPr>
+                              <m:t>𝜉</m:t>
+                            </m:r>
+                          </m:e>
+                          <m:sub>
+                            <m:r>
+                              <a:rPr lang="fr-BE" i="1">
+                                <a:latin typeface="Cambria Math" panose="02040503050406030204" pitchFamily="18" charset="0"/>
+                              </a:rPr>
+                              <m:t>𝑠</m:t>
+                            </m:r>
+                            <m:r>
+                              <a:rPr lang="fr-BE" i="1">
+                                <a:latin typeface="Cambria Math" panose="02040503050406030204" pitchFamily="18" charset="0"/>
+                              </a:rPr>
+                              <m:t>,</m:t>
+                            </m:r>
+                            <m:r>
+                              <a:rPr lang="fr-BE" i="1">
+                                <a:latin typeface="Cambria Math" panose="02040503050406030204" pitchFamily="18" charset="0"/>
+                              </a:rPr>
+                              <m:t>𝑖</m:t>
+                            </m:r>
+                          </m:sub>
+                          <m:sup>
+                            <m:r>
+                              <a:rPr lang="fr-BE" b="0" i="1" smtClean="0">
+                                <a:latin typeface="Cambria Math" panose="02040503050406030204" pitchFamily="18" charset="0"/>
+                              </a:rPr>
+                              <m:t>+</m:t>
+                            </m:r>
+                          </m:sup>
+                        </m:sSubSup>
+                        <m:sSub>
+                          <m:sSubPr>
+                            <m:ctrlPr>
+                              <a:rPr lang="fr-BE" i="1">
+                                <a:latin typeface="Cambria Math" panose="02040503050406030204" pitchFamily="18" charset="0"/>
+                                <a:ea typeface="Cambria Math" panose="02040503050406030204" pitchFamily="18" charset="0"/>
+                              </a:rPr>
+                            </m:ctrlPr>
+                          </m:sSubPr>
+                          <m:e>
+                            <m:r>
+                              <a:rPr lang="fr-BE" i="1">
+                                <a:latin typeface="Cambria Math" panose="02040503050406030204" pitchFamily="18" charset="0"/>
+                                <a:ea typeface="Cambria Math" panose="02040503050406030204" pitchFamily="18" charset="0"/>
+                              </a:rPr>
+                              <m:t>𝜀</m:t>
+                            </m:r>
+                          </m:e>
+                          <m:sub>
+                            <m:r>
+                              <a:rPr lang="fr-BE" i="1">
+                                <a:latin typeface="Cambria Math" panose="02040503050406030204" pitchFamily="18" charset="0"/>
+                                <a:ea typeface="Cambria Math" panose="02040503050406030204" pitchFamily="18" charset="0"/>
+                              </a:rPr>
+                              <m:t>𝑖</m:t>
+                            </m:r>
+                          </m:sub>
+                        </m:sSub>
+                      </m:e>
+                    </m:nary>
+                  </m:oMath>
+                </a14:m>
+                <a:endParaRPr lang="en-GB" dirty="0"/>
+              </a:p>
+              <a:p>
+                <a14:m>
+                  <m:oMath xmlns:m="http://schemas.openxmlformats.org/officeDocument/2006/math">
+                    <m:acc>
+                      <m:accPr>
+                        <m:chr m:val="̂"/>
+                        <m:ctrlPr>
+                          <a:rPr lang="fr-BE" i="1">
+                            <a:solidFill>
+                              <a:schemeClr val="bg2">
+                                <a:lumMod val="60000"/>
+                                <a:lumOff val="40000"/>
+                              </a:schemeClr>
+                            </a:solidFill>
+                            <a:latin typeface="Cambria Math" panose="02040503050406030204" pitchFamily="18" charset="0"/>
+                          </a:rPr>
+                        </m:ctrlPr>
+                      </m:accPr>
+                      <m:e>
+                        <m:sSub>
+                          <m:sSubPr>
+                            <m:ctrlPr>
+                              <a:rPr lang="fr-BE" i="1">
+                                <a:solidFill>
+                                  <a:schemeClr val="bg2">
+                                    <a:lumMod val="60000"/>
+                                    <a:lumOff val="40000"/>
+                                  </a:schemeClr>
+                                </a:solidFill>
+                                <a:latin typeface="Cambria Math" panose="02040503050406030204" pitchFamily="18" charset="0"/>
+                              </a:rPr>
+                            </m:ctrlPr>
+                          </m:sSubPr>
+                          <m:e>
+                            <m:r>
+                              <a:rPr lang="fr-BE" i="1">
+                                <a:solidFill>
+                                  <a:schemeClr val="bg2">
+                                    <a:lumMod val="60000"/>
+                                    <a:lumOff val="40000"/>
+                                  </a:schemeClr>
+                                </a:solidFill>
+                                <a:latin typeface="Cambria Math" panose="02040503050406030204" pitchFamily="18" charset="0"/>
+                              </a:rPr>
+                              <m:t>𝑠</m:t>
+                            </m:r>
+                          </m:e>
+                          <m:sub>
+                            <m:r>
+                              <a:rPr lang="fr-BE" i="1">
+                                <a:solidFill>
+                                  <a:schemeClr val="bg2">
+                                    <a:lumMod val="60000"/>
+                                    <a:lumOff val="40000"/>
+                                  </a:schemeClr>
+                                </a:solidFill>
+                                <a:latin typeface="Cambria Math" panose="02040503050406030204" pitchFamily="18" charset="0"/>
+                              </a:rPr>
+                              <m:t>𝑡</m:t>
+                            </m:r>
+                            <m:r>
+                              <a:rPr lang="fr-BE" b="0" i="1" smtClean="0">
+                                <a:solidFill>
+                                  <a:schemeClr val="bg2">
+                                    <a:lumMod val="60000"/>
+                                    <a:lumOff val="40000"/>
+                                  </a:schemeClr>
+                                </a:solidFill>
+                                <a:latin typeface="Cambria Math" panose="02040503050406030204" pitchFamily="18" charset="0"/>
+                              </a:rPr>
+                              <m:t>|</m:t>
+                            </m:r>
+                            <m:r>
+                              <a:rPr lang="fr-BE" b="0" i="1" smtClean="0">
+                                <a:solidFill>
+                                  <a:schemeClr val="bg2">
+                                    <a:lumMod val="60000"/>
+                                    <a:lumOff val="40000"/>
+                                  </a:schemeClr>
+                                </a:solidFill>
+                                <a:latin typeface="Cambria Math" panose="02040503050406030204" pitchFamily="18" charset="0"/>
+                              </a:rPr>
+                              <m:t>𝑡</m:t>
+                            </m:r>
+                          </m:sub>
+                        </m:sSub>
+                      </m:e>
+                    </m:acc>
+                    <m:r>
+                      <a:rPr lang="fr-BE" i="1">
+                        <a:solidFill>
+                          <a:schemeClr val="bg2">
+                            <a:lumMod val="60000"/>
+                            <a:lumOff val="40000"/>
+                          </a:schemeClr>
+                        </a:solidFill>
+                        <a:latin typeface="Cambria Math" panose="02040503050406030204" pitchFamily="18" charset="0"/>
+                      </a:rPr>
+                      <m:t>=</m:t>
+                    </m:r>
+                    <m:nary>
+                      <m:naryPr>
+                        <m:chr m:val="∑"/>
+                        <m:supHide m:val="on"/>
+                        <m:ctrlPr>
+                          <a:rPr lang="fr-BE" i="1">
+                            <a:solidFill>
+                              <a:schemeClr val="bg2">
+                                <a:lumMod val="60000"/>
+                                <a:lumOff val="40000"/>
+                              </a:schemeClr>
+                            </a:solidFill>
+                            <a:latin typeface="Cambria Math" panose="02040503050406030204" pitchFamily="18" charset="0"/>
+                          </a:rPr>
+                        </m:ctrlPr>
+                      </m:naryPr>
+                      <m:sub>
+                        <m:r>
+                          <m:rPr>
+                            <m:brk m:alnAt="7"/>
+                          </m:rPr>
+                          <a:rPr lang="fr-BE" i="1">
+                            <a:solidFill>
+                              <a:schemeClr val="bg2">
+                                <a:lumMod val="60000"/>
+                                <a:lumOff val="40000"/>
+                              </a:schemeClr>
+                            </a:solidFill>
+                            <a:latin typeface="Cambria Math" panose="02040503050406030204" pitchFamily="18" charset="0"/>
+                          </a:rPr>
+                          <m:t>𝑖</m:t>
+                        </m:r>
+                        <m:r>
+                          <m:rPr>
+                            <m:brk m:alnAt="7"/>
+                          </m:rPr>
+                          <a:rPr lang="fr-BE" i="1">
+                            <a:solidFill>
+                              <a:schemeClr val="bg2">
+                                <a:lumMod val="60000"/>
+                                <a:lumOff val="40000"/>
+                              </a:schemeClr>
+                            </a:solidFill>
+                            <a:latin typeface="Cambria Math" panose="02040503050406030204" pitchFamily="18" charset="0"/>
+                            <a:ea typeface="Cambria Math" panose="02040503050406030204" pitchFamily="18" charset="0"/>
+                          </a:rPr>
+                          <m:t>≤</m:t>
+                        </m:r>
+                        <m:r>
+                          <m:rPr>
+                            <m:brk m:alnAt="7"/>
+                          </m:rPr>
+                          <a:rPr lang="fr-BE" i="1">
+                            <a:solidFill>
+                              <a:schemeClr val="bg2">
+                                <a:lumMod val="60000"/>
+                                <a:lumOff val="40000"/>
+                              </a:schemeClr>
+                            </a:solidFill>
+                            <a:latin typeface="Cambria Math" panose="02040503050406030204" pitchFamily="18" charset="0"/>
+                            <a:ea typeface="Cambria Math" panose="02040503050406030204" pitchFamily="18" charset="0"/>
+                          </a:rPr>
+                          <m:t>𝑡</m:t>
+                        </m:r>
+                      </m:sub>
+                      <m:sup/>
+                      <m:e>
+                        <m:sSubSup>
+                          <m:sSubSupPr>
+                            <m:ctrlPr>
+                              <a:rPr lang="en-GB" i="1">
+                                <a:solidFill>
+                                  <a:schemeClr val="bg2">
+                                    <a:lumMod val="60000"/>
+                                    <a:lumOff val="40000"/>
+                                  </a:schemeClr>
+                                </a:solidFill>
+                                <a:latin typeface="Cambria Math" panose="02040503050406030204" pitchFamily="18" charset="0"/>
+                                <a:ea typeface="Cambria Math" panose="02040503050406030204" pitchFamily="18" charset="0"/>
+                              </a:rPr>
+                            </m:ctrlPr>
+                          </m:sSubSupPr>
+                          <m:e>
+                            <m:r>
+                              <a:rPr lang="en-GB" i="1">
+                                <a:solidFill>
+                                  <a:schemeClr val="bg2">
+                                    <a:lumMod val="60000"/>
+                                    <a:lumOff val="40000"/>
+                                  </a:schemeClr>
+                                </a:solidFill>
+                                <a:latin typeface="Cambria Math" panose="02040503050406030204" pitchFamily="18" charset="0"/>
+                                <a:ea typeface="Cambria Math" panose="02040503050406030204" pitchFamily="18" charset="0"/>
+                              </a:rPr>
+                              <m:t>𝜉</m:t>
+                            </m:r>
+                          </m:e>
+                          <m:sub>
+                            <m:r>
+                              <a:rPr lang="fr-BE" i="1">
+                                <a:solidFill>
+                                  <a:schemeClr val="bg2">
+                                    <a:lumMod val="60000"/>
+                                    <a:lumOff val="40000"/>
+                                  </a:schemeClr>
+                                </a:solidFill>
+                                <a:latin typeface="Cambria Math" panose="02040503050406030204" pitchFamily="18" charset="0"/>
+                              </a:rPr>
+                              <m:t>𝑠</m:t>
+                            </m:r>
+                            <m:r>
+                              <a:rPr lang="fr-BE" i="1">
+                                <a:solidFill>
+                                  <a:schemeClr val="bg2">
+                                    <a:lumMod val="60000"/>
+                                    <a:lumOff val="40000"/>
+                                  </a:schemeClr>
+                                </a:solidFill>
+                                <a:latin typeface="Cambria Math" panose="02040503050406030204" pitchFamily="18" charset="0"/>
+                              </a:rPr>
+                              <m:t>,</m:t>
+                            </m:r>
+                            <m:r>
+                              <a:rPr lang="fr-BE" i="1">
+                                <a:solidFill>
+                                  <a:schemeClr val="bg2">
+                                    <a:lumMod val="60000"/>
+                                    <a:lumOff val="40000"/>
+                                  </a:schemeClr>
+                                </a:solidFill>
+                                <a:latin typeface="Cambria Math" panose="02040503050406030204" pitchFamily="18" charset="0"/>
+                              </a:rPr>
+                              <m:t>𝑖</m:t>
+                            </m:r>
+                          </m:sub>
+                          <m:sup>
+                            <m:r>
+                              <a:rPr lang="fr-BE" i="1">
+                                <a:solidFill>
+                                  <a:schemeClr val="bg2">
+                                    <a:lumMod val="60000"/>
+                                    <a:lumOff val="40000"/>
+                                  </a:schemeClr>
+                                </a:solidFill>
+                                <a:latin typeface="Cambria Math" panose="02040503050406030204" pitchFamily="18" charset="0"/>
+                              </a:rPr>
+                              <m:t>−</m:t>
+                            </m:r>
+                          </m:sup>
+                        </m:sSubSup>
+                        <m:sSub>
+                          <m:sSubPr>
+                            <m:ctrlPr>
+                              <a:rPr lang="fr-BE" i="1">
+                                <a:solidFill>
+                                  <a:schemeClr val="bg2">
+                                    <a:lumMod val="60000"/>
+                                    <a:lumOff val="40000"/>
+                                  </a:schemeClr>
+                                </a:solidFill>
+                                <a:latin typeface="Cambria Math" panose="02040503050406030204" pitchFamily="18" charset="0"/>
+                                <a:ea typeface="Cambria Math" panose="02040503050406030204" pitchFamily="18" charset="0"/>
+                              </a:rPr>
+                            </m:ctrlPr>
+                          </m:sSubPr>
+                          <m:e>
+                            <m:r>
+                              <a:rPr lang="fr-BE" i="1">
+                                <a:solidFill>
+                                  <a:schemeClr val="bg2">
+                                    <a:lumMod val="60000"/>
+                                    <a:lumOff val="40000"/>
+                                  </a:schemeClr>
+                                </a:solidFill>
+                                <a:latin typeface="Cambria Math" panose="02040503050406030204" pitchFamily="18" charset="0"/>
+                                <a:ea typeface="Cambria Math" panose="02040503050406030204" pitchFamily="18" charset="0"/>
+                              </a:rPr>
+                              <m:t>𝜀</m:t>
+                            </m:r>
+                          </m:e>
+                          <m:sub>
+                            <m:r>
+                              <a:rPr lang="fr-BE" i="1">
+                                <a:solidFill>
+                                  <a:schemeClr val="bg2">
+                                    <a:lumMod val="60000"/>
+                                    <a:lumOff val="40000"/>
+                                  </a:schemeClr>
+                                </a:solidFill>
+                                <a:latin typeface="Cambria Math" panose="02040503050406030204" pitchFamily="18" charset="0"/>
+                                <a:ea typeface="Cambria Math" panose="02040503050406030204" pitchFamily="18" charset="0"/>
+                              </a:rPr>
+                              <m:t>𝑖</m:t>
+                            </m:r>
+                          </m:sub>
+                        </m:sSub>
+                      </m:e>
+                    </m:nary>
+                  </m:oMath>
+                </a14:m>
+                <a:r>
+                  <a:rPr lang="en-GB" dirty="0">
+                    <a:solidFill>
+                      <a:schemeClr val="bg2">
+                        <a:lumMod val="60000"/>
+                        <a:lumOff val="40000"/>
+                      </a:schemeClr>
+                    </a:solidFill>
+                  </a:rPr>
+                  <a:t> (concurrent estimator)</a:t>
+                </a:r>
+                <a:r>
+                  <a:rPr lang="en-GB" dirty="0"/>
+                  <a:t>	,</a:t>
+                </a:r>
+                <a:r>
+                  <a:rPr lang="fr-BE" dirty="0"/>
+                  <a:t> </a:t>
+                </a:r>
+                <a14:m>
+                  <m:oMath xmlns:m="http://schemas.openxmlformats.org/officeDocument/2006/math">
+                    <m:sSub>
+                      <m:sSubPr>
+                        <m:ctrlPr>
+                          <a:rPr lang="fr-BE" i="1">
+                            <a:solidFill>
+                              <a:srgbClr val="FF0000"/>
+                            </a:solidFill>
+                            <a:latin typeface="Cambria Math" panose="02040503050406030204" pitchFamily="18" charset="0"/>
+                          </a:rPr>
+                        </m:ctrlPr>
+                      </m:sSubPr>
+                      <m:e>
+                        <m:r>
+                          <a:rPr lang="fr-BE" i="1">
+                            <a:solidFill>
+                              <a:srgbClr val="FF0000"/>
+                            </a:solidFill>
+                            <a:latin typeface="Cambria Math" panose="02040503050406030204" pitchFamily="18" charset="0"/>
+                          </a:rPr>
+                          <m:t>𝑟</m:t>
+                        </m:r>
+                      </m:e>
+                      <m:sub>
+                        <m:r>
+                          <a:rPr lang="fr-BE" i="1">
+                            <a:solidFill>
+                              <a:srgbClr val="FF0000"/>
+                            </a:solidFill>
+                            <a:latin typeface="Cambria Math" panose="02040503050406030204" pitchFamily="18" charset="0"/>
+                          </a:rPr>
+                          <m:t>𝑡</m:t>
+                        </m:r>
+                      </m:sub>
+                    </m:sSub>
+                    <m:r>
+                      <a:rPr lang="fr-BE" i="1">
+                        <a:solidFill>
+                          <a:srgbClr val="FF0000"/>
+                        </a:solidFill>
+                        <a:latin typeface="Cambria Math" panose="02040503050406030204" pitchFamily="18" charset="0"/>
+                      </a:rPr>
+                      <m:t>=</m:t>
+                    </m:r>
+                    <m:nary>
+                      <m:naryPr>
+                        <m:chr m:val="∑"/>
+                        <m:supHide m:val="on"/>
+                        <m:ctrlPr>
+                          <a:rPr lang="fr-BE" i="1">
+                            <a:solidFill>
+                              <a:srgbClr val="FF0000"/>
+                            </a:solidFill>
+                            <a:latin typeface="Cambria Math" panose="02040503050406030204" pitchFamily="18" charset="0"/>
+                          </a:rPr>
+                        </m:ctrlPr>
+                      </m:naryPr>
+                      <m:sub>
+                        <m:r>
+                          <m:rPr>
+                            <m:brk m:alnAt="7"/>
+                          </m:rPr>
+                          <a:rPr lang="fr-BE" i="1">
+                            <a:solidFill>
+                              <a:srgbClr val="FF0000"/>
+                            </a:solidFill>
+                            <a:latin typeface="Cambria Math" panose="02040503050406030204" pitchFamily="18" charset="0"/>
+                          </a:rPr>
+                          <m:t>𝑖</m:t>
+                        </m:r>
+                        <m:r>
+                          <m:rPr>
+                            <m:brk m:alnAt="7"/>
+                          </m:rPr>
+                          <a:rPr lang="fr-BE" i="1">
+                            <a:solidFill>
+                              <a:srgbClr val="FF0000"/>
+                            </a:solidFill>
+                            <a:latin typeface="Cambria Math" panose="02040503050406030204" pitchFamily="18" charset="0"/>
+                          </a:rPr>
+                          <m:t>&gt;</m:t>
+                        </m:r>
+                        <m:r>
+                          <m:rPr>
+                            <m:brk m:alnAt="7"/>
+                          </m:rPr>
+                          <a:rPr lang="fr-BE" b="0" i="1" smtClean="0">
+                            <a:solidFill>
+                              <a:srgbClr val="FF0000"/>
+                            </a:solidFill>
+                            <a:latin typeface="Cambria Math" panose="02040503050406030204" pitchFamily="18" charset="0"/>
+                          </a:rPr>
+                          <m:t>𝑡</m:t>
+                        </m:r>
+                      </m:sub>
+                      <m:sup/>
+                      <m:e>
+                        <m:sSubSup>
+                          <m:sSubSupPr>
+                            <m:ctrlPr>
+                              <a:rPr lang="en-GB" i="1">
+                                <a:solidFill>
+                                  <a:srgbClr val="FF0000"/>
+                                </a:solidFill>
+                                <a:latin typeface="Cambria Math" panose="02040503050406030204" pitchFamily="18" charset="0"/>
+                                <a:ea typeface="Cambria Math" panose="02040503050406030204" pitchFamily="18" charset="0"/>
+                              </a:rPr>
+                            </m:ctrlPr>
+                          </m:sSubSupPr>
+                          <m:e>
+                            <m:r>
+                              <a:rPr lang="en-GB" i="1">
+                                <a:solidFill>
+                                  <a:srgbClr val="FF0000"/>
+                                </a:solidFill>
+                                <a:latin typeface="Cambria Math" panose="02040503050406030204" pitchFamily="18" charset="0"/>
+                                <a:ea typeface="Cambria Math" panose="02040503050406030204" pitchFamily="18" charset="0"/>
+                              </a:rPr>
+                              <m:t>𝜉</m:t>
+                            </m:r>
+                          </m:e>
+                          <m:sub>
+                            <m:r>
+                              <a:rPr lang="fr-BE" i="1">
+                                <a:solidFill>
+                                  <a:srgbClr val="FF0000"/>
+                                </a:solidFill>
+                                <a:latin typeface="Cambria Math" panose="02040503050406030204" pitchFamily="18" charset="0"/>
+                              </a:rPr>
+                              <m:t>𝑠</m:t>
+                            </m:r>
+                            <m:r>
+                              <a:rPr lang="fr-BE" i="1">
+                                <a:solidFill>
+                                  <a:srgbClr val="FF0000"/>
+                                </a:solidFill>
+                                <a:latin typeface="Cambria Math" panose="02040503050406030204" pitchFamily="18" charset="0"/>
+                              </a:rPr>
+                              <m:t>,</m:t>
+                            </m:r>
+                            <m:r>
+                              <a:rPr lang="fr-BE" i="1">
+                                <a:solidFill>
+                                  <a:srgbClr val="FF0000"/>
+                                </a:solidFill>
+                                <a:latin typeface="Cambria Math" panose="02040503050406030204" pitchFamily="18" charset="0"/>
+                              </a:rPr>
+                              <m:t>𝑖</m:t>
+                            </m:r>
+                          </m:sub>
+                          <m:sup>
+                            <m:r>
+                              <a:rPr lang="fr-BE" i="1">
+                                <a:solidFill>
+                                  <a:srgbClr val="FF0000"/>
+                                </a:solidFill>
+                                <a:latin typeface="Cambria Math" panose="02040503050406030204" pitchFamily="18" charset="0"/>
+                              </a:rPr>
+                              <m:t>+</m:t>
+                            </m:r>
+                          </m:sup>
+                        </m:sSubSup>
+                        <m:sSub>
+                          <m:sSubPr>
+                            <m:ctrlPr>
+                              <a:rPr lang="fr-BE" i="1">
+                                <a:solidFill>
+                                  <a:srgbClr val="FF0000"/>
+                                </a:solidFill>
+                                <a:latin typeface="Cambria Math" panose="02040503050406030204" pitchFamily="18" charset="0"/>
+                                <a:ea typeface="Cambria Math" panose="02040503050406030204" pitchFamily="18" charset="0"/>
+                              </a:rPr>
+                            </m:ctrlPr>
+                          </m:sSubPr>
+                          <m:e>
+                            <m:r>
+                              <a:rPr lang="fr-BE" i="1">
+                                <a:solidFill>
+                                  <a:srgbClr val="FF0000"/>
+                                </a:solidFill>
+                                <a:latin typeface="Cambria Math" panose="02040503050406030204" pitchFamily="18" charset="0"/>
+                                <a:ea typeface="Cambria Math" panose="02040503050406030204" pitchFamily="18" charset="0"/>
+                              </a:rPr>
+                              <m:t>𝜀</m:t>
+                            </m:r>
+                          </m:e>
+                          <m:sub>
+                            <m:r>
+                              <a:rPr lang="fr-BE" i="1">
+                                <a:solidFill>
+                                  <a:srgbClr val="FF0000"/>
+                                </a:solidFill>
+                                <a:latin typeface="Cambria Math" panose="02040503050406030204" pitchFamily="18" charset="0"/>
+                                <a:ea typeface="Cambria Math" panose="02040503050406030204" pitchFamily="18" charset="0"/>
+                              </a:rPr>
+                              <m:t>𝑖</m:t>
+                            </m:r>
+                          </m:sub>
+                        </m:sSub>
+                      </m:e>
+                    </m:nary>
+                  </m:oMath>
+                </a14:m>
+                <a:r>
+                  <a:rPr lang="en-GB" dirty="0">
+                    <a:solidFill>
+                      <a:srgbClr val="FF0000"/>
+                    </a:solidFill>
+                  </a:rPr>
+                  <a:t> (revisions)</a:t>
+                </a:r>
+                <a:endParaRPr lang="en-GB" dirty="0"/>
+              </a:p>
+            </p:txBody>
+          </p:sp>
+        </mc:Choice>
+        <mc:Fallback>
+          <p:sp>
+            <p:nvSpPr>
+              <p:cNvPr id="4" name="Espace réservé du contenu 3">
+                <a:extLst>
+                  <a:ext uri="{FF2B5EF4-FFF2-40B4-BE49-F238E27FC236}">
+                    <a16:creationId xmlns:a16="http://schemas.microsoft.com/office/drawing/2014/main" id="{A0144878-1963-39E6-F73A-50144BFC825C}"/>
+                  </a:ext>
+                </a:extLst>
+              </p:cNvPr>
+              <p:cNvSpPr>
+                <a:spLocks noGrp="1" noRot="1" noChangeAspect="1" noMove="1" noResize="1" noEditPoints="1" noAdjustHandles="1" noChangeArrowheads="1" noChangeShapeType="1" noTextEdit="1"/>
+              </p:cNvSpPr>
+              <p:nvPr>
+                <p:ph sz="half" idx="2"/>
+              </p:nvPr>
+            </p:nvSpPr>
+            <p:spPr>
+              <a:xfrm>
+                <a:off x="1102952" y="1826790"/>
+                <a:ext cx="9150430" cy="3861316"/>
+              </a:xfrm>
+              <a:blipFill>
+                <a:blip r:embed="rId2"/>
+                <a:stretch>
+                  <a:fillRect l="-865" t="-1417" b="-13386"/>
+                </a:stretch>
+              </a:blipFill>
+              <a:ln>
+                <a:solidFill>
+                  <a:schemeClr val="tx1"/>
+                </a:solidFill>
+              </a:ln>
+            </p:spPr>
+            <p:txBody>
+              <a:bodyPr/>
+              <a:lstStyle/>
+              <a:p>
+                <a:r>
+                  <a:rPr lang="en-GB">
+                    <a:noFill/>
+                  </a:rPr>
+                  <a:t> </a:t>
+                </a:r>
+              </a:p>
+            </p:txBody>
+          </p:sp>
+        </mc:Fallback>
+      </mc:AlternateContent>
+    </p:spTree>
+    <p:extLst>
+      <p:ext uri="{BB962C8B-B14F-4D97-AF65-F5344CB8AC3E}">
+        <p14:creationId xmlns:p14="http://schemas.microsoft.com/office/powerpoint/2010/main" val="4277266476"/>
+      </p:ext>
+    </p:extLst>
+  </p:cSld>
+  <p:clrMapOvr>
+    <a:masterClrMapping/>
+  </p:clrMapOvr>
+</p:sld>
+</file>
+
+<file path=ppt/slides/slide22.xml><?xml version="1.0" encoding="utf-8"?>
+<p:sld xmlns:a="http://schemas.openxmlformats.org/drawingml/2006/main" xmlns:r="http://schemas.openxmlformats.org/officeDocument/2006/relationships" xmlns:p="http://schemas.openxmlformats.org/presentationml/2006/main">
+  <p:cSld>
+    <p:spTree>
+      <p:nvGrpSpPr>
+        <p:cNvPr id="1" name=""/>
+        <p:cNvGrpSpPr/>
+        <p:nvPr/>
+      </p:nvGrpSpPr>
+      <p:grpSpPr>
+        <a:xfrm>
+          <a:off x="0" y="0"/>
+          <a:ext cx="0" cy="0"/>
+          <a:chOff x="0" y="0"/>
+          <a:chExt cx="0" cy="0"/>
+        </a:xfrm>
+      </p:grpSpPr>
+      <p:sp>
+        <p:nvSpPr>
           <p:cNvPr id="2" name="Title 1">
             <a:extLst>
               <a:ext uri="{FF2B5EF4-FFF2-40B4-BE49-F238E27FC236}">
@@ -14419,7 +18258,7 @@
           <a:p>
             <a:fld id="{F12E9969-9346-4095-A7C3-836AAB82C09A}" type="slidenum">
               <a:rPr lang="en-GB" noProof="0" smtClean="0"/>
-              <a:t>20</a:t>
+              <a:t>22</a:t>
             </a:fld>
             <a:endParaRPr lang="en-GB" noProof="0" dirty="0"/>
           </a:p>
@@ -14645,7 +18484,7 @@
 </p:sld>
 </file>
 
-<file path=ppt/slides/slide21.xml><?xml version="1.0" encoding="utf-8"?>
+<file path=ppt/slides/slide23.xml><?xml version="1.0" encoding="utf-8"?>
 <p:sld xmlns:a="http://schemas.openxmlformats.org/drawingml/2006/main" xmlns:r="http://schemas.openxmlformats.org/officeDocument/2006/relationships" xmlns:p="http://schemas.openxmlformats.org/presentationml/2006/main">
   <p:cSld>
     <p:spTree>
@@ -14714,7 +18553,7 @@
           <a:p>
             <a:fld id="{F12E9969-9346-4095-A7C3-836AAB82C09A}" type="slidenum">
               <a:rPr lang="en-GB" noProof="0" smtClean="0"/>
-              <a:t>21</a:t>
+              <a:t>23</a:t>
             </a:fld>
             <a:endParaRPr lang="en-GB" noProof="0" dirty="0"/>
           </a:p>
@@ -14796,7 +18635,7 @@
 </p:sld>
 </file>
 
-<file path=ppt/slides/slide22.xml><?xml version="1.0" encoding="utf-8"?>
+<file path=ppt/slides/slide24.xml><?xml version="1.0" encoding="utf-8"?>
 <p:sld xmlns:a="http://schemas.openxmlformats.org/drawingml/2006/main" xmlns:r="http://schemas.openxmlformats.org/officeDocument/2006/relationships" xmlns:p="http://schemas.openxmlformats.org/presentationml/2006/main">
   <p:cSld>
     <p:spTree>
@@ -14865,7 +18704,7 @@
           <a:p>
             <a:fld id="{F12E9969-9346-4095-A7C3-836AAB82C09A}" type="slidenum">
               <a:rPr lang="en-GB" noProof="0" smtClean="0"/>
-              <a:t>22</a:t>
+              <a:t>24</a:t>
             </a:fld>
             <a:endParaRPr lang="en-GB" noProof="0" dirty="0"/>
           </a:p>
@@ -16059,7 +19898,7 @@
 </p:sld>
 </file>
 
-<file path=ppt/slides/slide23.xml><?xml version="1.0" encoding="utf-8"?>
+<file path=ppt/slides/slide25.xml><?xml version="1.0" encoding="utf-8"?>
 <p:sld xmlns:a="http://schemas.openxmlformats.org/drawingml/2006/main" xmlns:r="http://schemas.openxmlformats.org/officeDocument/2006/relationships" xmlns:p="http://schemas.openxmlformats.org/presentationml/2006/main">
   <p:cSld>
     <p:spTree>
@@ -16130,7 +19969,7 @@
           <a:p>
             <a:fld id="{F12E9969-9346-4095-A7C3-836AAB82C09A}" type="slidenum">
               <a:rPr lang="en-GB" noProof="0" smtClean="0"/>
-              <a:t>23</a:t>
+              <a:t>25</a:t>
             </a:fld>
             <a:endParaRPr lang="en-GB" noProof="0" dirty="0"/>
           </a:p>
@@ -16212,7 +20051,7 @@
 </p:sld>
 </file>
 
-<file path=ppt/slides/slide24.xml><?xml version="1.0" encoding="utf-8"?>
+<file path=ppt/slides/slide26.xml><?xml version="1.0" encoding="utf-8"?>
 <p:sld xmlns:a="http://schemas.openxmlformats.org/drawingml/2006/main" xmlns:r="http://schemas.openxmlformats.org/officeDocument/2006/relationships" xmlns:p="http://schemas.openxmlformats.org/presentationml/2006/main">
   <p:cSld>
     <p:spTree>
@@ -16282,7 +20121,7 @@
           <a:p>
             <a:fld id="{F12E9969-9346-4095-A7C3-836AAB82C09A}" type="slidenum">
               <a:rPr lang="en-GB" noProof="0" smtClean="0"/>
-              <a:t>24</a:t>
+              <a:t>26</a:t>
             </a:fld>
             <a:endParaRPr lang="en-GB" noProof="0" dirty="0"/>
           </a:p>
@@ -16399,7 +20238,7 @@
 </p:sld>
 </file>
 
-<file path=ppt/slides/slide25.xml><?xml version="1.0" encoding="utf-8"?>
+<file path=ppt/slides/slide27.xml><?xml version="1.0" encoding="utf-8"?>
 <p:sld xmlns:a="http://schemas.openxmlformats.org/drawingml/2006/main" xmlns:r="http://schemas.openxmlformats.org/officeDocument/2006/relationships" xmlns:p="http://schemas.openxmlformats.org/presentationml/2006/main">
   <p:cSld>
     <p:spTree>
@@ -16468,7 +20307,7 @@
           <a:p>
             <a:fld id="{F12E9969-9346-4095-A7C3-836AAB82C09A}" type="slidenum">
               <a:rPr lang="en-GB" noProof="0" smtClean="0"/>
-              <a:t>25</a:t>
+              <a:t>27</a:t>
             </a:fld>
             <a:endParaRPr lang="en-GB" noProof="0" dirty="0"/>
           </a:p>
@@ -16550,7 +20389,7 @@
 </p:sld>
 </file>
 
-<file path=ppt/slides/slide26.xml><?xml version="1.0" encoding="utf-8"?>
+<file path=ppt/slides/slide28.xml><?xml version="1.0" encoding="utf-8"?>
 <p:sld xmlns:a="http://schemas.openxmlformats.org/drawingml/2006/main" xmlns:r="http://schemas.openxmlformats.org/officeDocument/2006/relationships" xmlns:p="http://schemas.openxmlformats.org/presentationml/2006/main">
   <p:cSld>
     <p:spTree>
@@ -16685,7 +20524,7 @@
           <a:p>
             <a:fld id="{F12E9969-9346-4095-A7C3-836AAB82C09A}" type="slidenum">
               <a:rPr lang="en-GB" noProof="0" smtClean="0"/>
-              <a:t>26</a:t>
+              <a:t>28</a:t>
             </a:fld>
             <a:endParaRPr lang="en-GB" noProof="0" dirty="0"/>
           </a:p>
@@ -16734,7 +20573,7 @@
 </p:sld>
 </file>
 
-<file path=ppt/slides/slide27.xml><?xml version="1.0" encoding="utf-8"?>
+<file path=ppt/slides/slide29.xml><?xml version="1.0" encoding="utf-8"?>
 <p:sld xmlns:a="http://schemas.openxmlformats.org/drawingml/2006/main" xmlns:r="http://schemas.openxmlformats.org/officeDocument/2006/relationships" xmlns:p="http://schemas.openxmlformats.org/presentationml/2006/main">
   <p:cSld>
     <p:spTree>
@@ -16791,7 +20630,7 @@
           <a:p>
             <a:fld id="{F12E9969-9346-4095-A7C3-836AAB82C09A}" type="slidenum">
               <a:rPr lang="en-GB" noProof="0" smtClean="0"/>
-              <a:t>27</a:t>
+              <a:t>29</a:t>
             </a:fld>
             <a:endParaRPr lang="en-GB" noProof="0" dirty="0"/>
           </a:p>
@@ -18176,7 +22015,160 @@
 </p:sld>
 </file>
 
-<file path=ppt/slides/slide28.xml><?xml version="1.0" encoding="utf-8"?>
+<file path=ppt/slides/slide3.xml><?xml version="1.0" encoding="utf-8"?>
+<p:sld xmlns:a="http://schemas.openxmlformats.org/drawingml/2006/main" xmlns:r="http://schemas.openxmlformats.org/officeDocument/2006/relationships" xmlns:p="http://schemas.openxmlformats.org/presentationml/2006/main">
+  <p:cSld>
+    <p:spTree>
+      <p:nvGrpSpPr>
+        <p:cNvPr id="1" name=""/>
+        <p:cNvGrpSpPr/>
+        <p:nvPr/>
+      </p:nvGrpSpPr>
+      <p:grpSpPr>
+        <a:xfrm>
+          <a:off x="0" y="0"/>
+          <a:ext cx="0" cy="0"/>
+          <a:chOff x="0" y="0"/>
+          <a:chExt cx="0" cy="0"/>
+        </a:xfrm>
+      </p:grpSpPr>
+      <p:sp>
+        <p:nvSpPr>
+          <p:cNvPr id="2" name="Title 1">
+            <a:extLst>
+              <a:ext uri="{FF2B5EF4-FFF2-40B4-BE49-F238E27FC236}">
+                <a16:creationId xmlns:a16="http://schemas.microsoft.com/office/drawing/2014/main" id="{3A2E236B-9B13-249F-1DE2-18A26DA62431}"/>
+              </a:ext>
+            </a:extLst>
+          </p:cNvPr>
+          <p:cNvSpPr>
+            <a:spLocks noGrp="1"/>
+          </p:cNvSpPr>
+          <p:nvPr>
+            <p:ph type="title"/>
+          </p:nvPr>
+        </p:nvSpPr>
+        <p:spPr/>
+        <p:txBody>
+          <a:bodyPr/>
+          <a:lstStyle/>
+          <a:p>
+            <a:pPr algn="l"/>
+            <a:r>
+              <a:rPr lang="en-GB" noProof="0" dirty="0"/>
+              <a:t>Always keep in mind…</a:t>
+            </a:r>
+          </a:p>
+        </p:txBody>
+      </p:sp>
+      <p:sp>
+        <p:nvSpPr>
+          <p:cNvPr id="6" name="Slide Number Placeholder 5">
+            <a:extLst>
+              <a:ext uri="{FF2B5EF4-FFF2-40B4-BE49-F238E27FC236}">
+                <a16:creationId xmlns:a16="http://schemas.microsoft.com/office/drawing/2014/main" id="{DF008DB6-3CC7-2B7B-6E0D-4D494AFCD42C}"/>
+              </a:ext>
+            </a:extLst>
+          </p:cNvPr>
+          <p:cNvSpPr>
+            <a:spLocks noGrp="1"/>
+          </p:cNvSpPr>
+          <p:nvPr>
+            <p:ph type="sldNum" idx="12"/>
+          </p:nvPr>
+        </p:nvSpPr>
+        <p:spPr/>
+        <p:txBody>
+          <a:bodyPr/>
+          <a:lstStyle/>
+          <a:p>
+            <a:fld id="{F12E9969-9346-4095-A7C3-836AAB82C09A}" type="slidenum">
+              <a:rPr lang="en-GB" noProof="0" smtClean="0"/>
+              <a:t>3</a:t>
+            </a:fld>
+            <a:endParaRPr lang="en-GB" noProof="0" dirty="0"/>
+          </a:p>
+        </p:txBody>
+      </p:sp>
+      <p:pic>
+        <p:nvPicPr>
+          <p:cNvPr id="7" name="Content Placeholder 6">
+            <a:extLst>
+              <a:ext uri="{FF2B5EF4-FFF2-40B4-BE49-F238E27FC236}">
+                <a16:creationId xmlns:a16="http://schemas.microsoft.com/office/drawing/2014/main" id="{0E4F6847-6455-88FF-3DB1-01D8AE52438F}"/>
+              </a:ext>
+            </a:extLst>
+          </p:cNvPr>
+          <p:cNvPicPr>
+            <a:picLocks noGrp="1" noChangeAspect="1"/>
+          </p:cNvPicPr>
+          <p:nvPr>
+            <p:ph sz="half" idx="2"/>
+          </p:nvPr>
+        </p:nvPicPr>
+        <p:blipFill>
+          <a:blip r:embed="rId2"/>
+          <a:stretch>
+            <a:fillRect/>
+          </a:stretch>
+        </p:blipFill>
+        <p:spPr>
+          <a:xfrm>
+            <a:off x="2179638" y="1854994"/>
+            <a:ext cx="8096250" cy="3810000"/>
+          </a:xfrm>
+          <a:prstGeom prst="rect">
+            <a:avLst/>
+          </a:prstGeom>
+        </p:spPr>
+      </p:pic>
+      <p:sp>
+        <p:nvSpPr>
+          <p:cNvPr id="5" name="Footer Placeholder 4">
+            <a:extLst>
+              <a:ext uri="{FF2B5EF4-FFF2-40B4-BE49-F238E27FC236}">
+                <a16:creationId xmlns:a16="http://schemas.microsoft.com/office/drawing/2014/main" id="{62CE0615-59F6-C6EE-84E2-3ADFD4859225}"/>
+              </a:ext>
+            </a:extLst>
+          </p:cNvPr>
+          <p:cNvSpPr>
+            <a:spLocks noGrp="1"/>
+          </p:cNvSpPr>
+          <p:nvPr>
+            <p:ph type="ftr" sz="quarter" idx="4294967295"/>
+          </p:nvPr>
+        </p:nvSpPr>
+        <p:spPr>
+          <a:xfrm>
+            <a:off x="0" y="0"/>
+            <a:ext cx="0" cy="0"/>
+          </a:xfrm>
+        </p:spPr>
+        <p:txBody>
+          <a:bodyPr/>
+          <a:lstStyle/>
+          <a:p>
+            <a:r>
+              <a:rPr lang="en-GB" noProof="0" dirty="0"/>
+              <a:t>Model-based decomposition</a:t>
+            </a:r>
+          </a:p>
+        </p:txBody>
+      </p:sp>
+    </p:spTree>
+    <p:extLst>
+      <p:ext uri="{BB962C8B-B14F-4D97-AF65-F5344CB8AC3E}">
+        <p14:creationId xmlns:p14="http://schemas.microsoft.com/office/powerpoint/2010/main" val="4129781176"/>
+      </p:ext>
+    </p:extLst>
+  </p:cSld>
+  <p:clrMapOvr>
+    <a:masterClrMapping/>
+  </p:clrMapOvr>
+</p:sld>
+</file>
+
+<file path=ppt/slides/slide30.xml><?xml version="1.0" encoding="utf-8"?>
 <p:sld xmlns:a="http://schemas.openxmlformats.org/drawingml/2006/main" xmlns:r="http://schemas.openxmlformats.org/officeDocument/2006/relationships" xmlns:p="http://schemas.openxmlformats.org/presentationml/2006/main">
   <p:cSld>
     <p:spTree>
@@ -18232,7 +22224,7 @@
           <a:p>
             <a:fld id="{F12E9969-9346-4095-A7C3-836AAB82C09A}" type="slidenum">
               <a:rPr lang="en-GB" noProof="0" smtClean="0"/>
-              <a:t>28</a:t>
+              <a:t>30</a:t>
             </a:fld>
             <a:endParaRPr lang="en-GB" noProof="0" dirty="0"/>
           </a:p>
@@ -18554,7 +22546,7 @@
 </p:sld>
 </file>
 
-<file path=ppt/slides/slide29.xml><?xml version="1.0" encoding="utf-8"?>
+<file path=ppt/slides/slide31.xml><?xml version="1.0" encoding="utf-8"?>
 <p:sld xmlns:a="http://schemas.openxmlformats.org/drawingml/2006/main" xmlns:r="http://schemas.openxmlformats.org/officeDocument/2006/relationships" xmlns:p="http://schemas.openxmlformats.org/presentationml/2006/main">
   <p:cSld>
     <p:spTree>
@@ -18610,7 +22602,7 @@
           <a:p>
             <a:fld id="{F12E9969-9346-4095-A7C3-836AAB82C09A}" type="slidenum">
               <a:rPr lang="en-GB" noProof="0" smtClean="0"/>
-              <a:t>29</a:t>
+              <a:t>31</a:t>
             </a:fld>
             <a:endParaRPr lang="en-GB" noProof="0" dirty="0"/>
           </a:p>
@@ -18758,160 +22750,7 @@
 </p:sld>
 </file>
 
-<file path=ppt/slides/slide3.xml><?xml version="1.0" encoding="utf-8"?>
-<p:sld xmlns:a="http://schemas.openxmlformats.org/drawingml/2006/main" xmlns:r="http://schemas.openxmlformats.org/officeDocument/2006/relationships" xmlns:p="http://schemas.openxmlformats.org/presentationml/2006/main">
-  <p:cSld>
-    <p:spTree>
-      <p:nvGrpSpPr>
-        <p:cNvPr id="1" name=""/>
-        <p:cNvGrpSpPr/>
-        <p:nvPr/>
-      </p:nvGrpSpPr>
-      <p:grpSpPr>
-        <a:xfrm>
-          <a:off x="0" y="0"/>
-          <a:ext cx="0" cy="0"/>
-          <a:chOff x="0" y="0"/>
-          <a:chExt cx="0" cy="0"/>
-        </a:xfrm>
-      </p:grpSpPr>
-      <p:sp>
-        <p:nvSpPr>
-          <p:cNvPr id="2" name="Title 1">
-            <a:extLst>
-              <a:ext uri="{FF2B5EF4-FFF2-40B4-BE49-F238E27FC236}">
-                <a16:creationId xmlns:a16="http://schemas.microsoft.com/office/drawing/2014/main" id="{3A2E236B-9B13-249F-1DE2-18A26DA62431}"/>
-              </a:ext>
-            </a:extLst>
-          </p:cNvPr>
-          <p:cNvSpPr>
-            <a:spLocks noGrp="1"/>
-          </p:cNvSpPr>
-          <p:nvPr>
-            <p:ph type="title"/>
-          </p:nvPr>
-        </p:nvSpPr>
-        <p:spPr/>
-        <p:txBody>
-          <a:bodyPr/>
-          <a:lstStyle/>
-          <a:p>
-            <a:pPr algn="l"/>
-            <a:r>
-              <a:rPr lang="en-GB" noProof="0" dirty="0"/>
-              <a:t>Always keep in mind…</a:t>
-            </a:r>
-          </a:p>
-        </p:txBody>
-      </p:sp>
-      <p:sp>
-        <p:nvSpPr>
-          <p:cNvPr id="6" name="Slide Number Placeholder 5">
-            <a:extLst>
-              <a:ext uri="{FF2B5EF4-FFF2-40B4-BE49-F238E27FC236}">
-                <a16:creationId xmlns:a16="http://schemas.microsoft.com/office/drawing/2014/main" id="{DF008DB6-3CC7-2B7B-6E0D-4D494AFCD42C}"/>
-              </a:ext>
-            </a:extLst>
-          </p:cNvPr>
-          <p:cNvSpPr>
-            <a:spLocks noGrp="1"/>
-          </p:cNvSpPr>
-          <p:nvPr>
-            <p:ph type="sldNum" idx="12"/>
-          </p:nvPr>
-        </p:nvSpPr>
-        <p:spPr/>
-        <p:txBody>
-          <a:bodyPr/>
-          <a:lstStyle/>
-          <a:p>
-            <a:fld id="{F12E9969-9346-4095-A7C3-836AAB82C09A}" type="slidenum">
-              <a:rPr lang="en-GB" noProof="0" smtClean="0"/>
-              <a:t>3</a:t>
-            </a:fld>
-            <a:endParaRPr lang="en-GB" noProof="0" dirty="0"/>
-          </a:p>
-        </p:txBody>
-      </p:sp>
-      <p:pic>
-        <p:nvPicPr>
-          <p:cNvPr id="7" name="Content Placeholder 6">
-            <a:extLst>
-              <a:ext uri="{FF2B5EF4-FFF2-40B4-BE49-F238E27FC236}">
-                <a16:creationId xmlns:a16="http://schemas.microsoft.com/office/drawing/2014/main" id="{0E4F6847-6455-88FF-3DB1-01D8AE52438F}"/>
-              </a:ext>
-            </a:extLst>
-          </p:cNvPr>
-          <p:cNvPicPr>
-            <a:picLocks noGrp="1" noChangeAspect="1"/>
-          </p:cNvPicPr>
-          <p:nvPr>
-            <p:ph sz="half" idx="2"/>
-          </p:nvPr>
-        </p:nvPicPr>
-        <p:blipFill>
-          <a:blip r:embed="rId2"/>
-          <a:stretch>
-            <a:fillRect/>
-          </a:stretch>
-        </p:blipFill>
-        <p:spPr>
-          <a:xfrm>
-            <a:off x="2179638" y="1854994"/>
-            <a:ext cx="8096250" cy="3810000"/>
-          </a:xfrm>
-          <a:prstGeom prst="rect">
-            <a:avLst/>
-          </a:prstGeom>
-        </p:spPr>
-      </p:pic>
-      <p:sp>
-        <p:nvSpPr>
-          <p:cNvPr id="5" name="Footer Placeholder 4">
-            <a:extLst>
-              <a:ext uri="{FF2B5EF4-FFF2-40B4-BE49-F238E27FC236}">
-                <a16:creationId xmlns:a16="http://schemas.microsoft.com/office/drawing/2014/main" id="{62CE0615-59F6-C6EE-84E2-3ADFD4859225}"/>
-              </a:ext>
-            </a:extLst>
-          </p:cNvPr>
-          <p:cNvSpPr>
-            <a:spLocks noGrp="1"/>
-          </p:cNvSpPr>
-          <p:nvPr>
-            <p:ph type="ftr" sz="quarter" idx="4294967295"/>
-          </p:nvPr>
-        </p:nvSpPr>
-        <p:spPr>
-          <a:xfrm>
-            <a:off x="0" y="0"/>
-            <a:ext cx="0" cy="0"/>
-          </a:xfrm>
-        </p:spPr>
-        <p:txBody>
-          <a:bodyPr/>
-          <a:lstStyle/>
-          <a:p>
-            <a:r>
-              <a:rPr lang="en-GB" noProof="0" dirty="0"/>
-              <a:t>Model-based decomposition</a:t>
-            </a:r>
-          </a:p>
-        </p:txBody>
-      </p:sp>
-    </p:spTree>
-    <p:extLst>
-      <p:ext uri="{BB962C8B-B14F-4D97-AF65-F5344CB8AC3E}">
-        <p14:creationId xmlns:p14="http://schemas.microsoft.com/office/powerpoint/2010/main" val="4129781176"/>
-      </p:ext>
-    </p:extLst>
-  </p:cSld>
-  <p:clrMapOvr>
-    <a:masterClrMapping/>
-  </p:clrMapOvr>
-</p:sld>
-</file>
-
-<file path=ppt/slides/slide30.xml><?xml version="1.0" encoding="utf-8"?>
+<file path=ppt/slides/slide32.xml><?xml version="1.0" encoding="utf-8"?>
 <p:sld xmlns:a="http://schemas.openxmlformats.org/drawingml/2006/main" xmlns:r="http://schemas.openxmlformats.org/officeDocument/2006/relationships" xmlns:p="http://schemas.openxmlformats.org/presentationml/2006/main">
   <p:cSld>
     <p:spTree>
@@ -19039,7 +22878,7 @@
           <a:p>
             <a:fld id="{F12E9969-9346-4095-A7C3-836AAB82C09A}" type="slidenum">
               <a:rPr lang="en-GB" noProof="0" smtClean="0"/>
-              <a:t>30</a:t>
+              <a:t>32</a:t>
             </a:fld>
             <a:endParaRPr lang="en-GB" noProof="0" dirty="0"/>
           </a:p>
@@ -19058,7 +22897,7 @@
 </p:sld>
 </file>
 
-<file path=ppt/slides/slide31.xml><?xml version="1.0" encoding="utf-8"?>
+<file path=ppt/slides/slide33.xml><?xml version="1.0" encoding="utf-8"?>
 <p:sld xmlns:a="http://schemas.openxmlformats.org/drawingml/2006/main" xmlns:r="http://schemas.openxmlformats.org/officeDocument/2006/relationships" xmlns:p="http://schemas.openxmlformats.org/presentationml/2006/main">
   <p:cSld>
     <p:spTree>
@@ -19115,7 +22954,7 @@
           <a:p>
             <a:fld id="{F12E9969-9346-4095-A7C3-836AAB82C09A}" type="slidenum">
               <a:rPr lang="en-GB" noProof="0" smtClean="0"/>
-              <a:t>31</a:t>
+              <a:t>33</a:t>
             </a:fld>
             <a:endParaRPr lang="en-GB" noProof="0" dirty="0"/>
           </a:p>
@@ -19306,7 +23145,7 @@
 </p:sld>
 </file>
 
-<file path=ppt/slides/slide32.xml><?xml version="1.0" encoding="utf-8"?>
+<file path=ppt/slides/slide34.xml><?xml version="1.0" encoding="utf-8"?>
 <p:sld xmlns:a="http://schemas.openxmlformats.org/drawingml/2006/main" xmlns:r="http://schemas.openxmlformats.org/officeDocument/2006/relationships" xmlns:p="http://schemas.openxmlformats.org/presentationml/2006/main">
   <p:cSld>
     <p:spTree>
@@ -19375,7 +23214,7 @@
           <a:p>
             <a:fld id="{F12E9969-9346-4095-A7C3-836AAB82C09A}" type="slidenum">
               <a:rPr lang="en-GB" noProof="0" smtClean="0"/>
-              <a:t>32</a:t>
+              <a:t>34</a:t>
             </a:fld>
             <a:endParaRPr lang="en-GB" noProof="0" dirty="0"/>
           </a:p>
@@ -19553,7 +23392,7 @@
 </p:sld>
 </file>
 
-<file path=ppt/slides/slide33.xml><?xml version="1.0" encoding="utf-8"?>
+<file path=ppt/slides/slide35.xml><?xml version="1.0" encoding="utf-8"?>
 <p:sld xmlns:a="http://schemas.openxmlformats.org/drawingml/2006/main" xmlns:r="http://schemas.openxmlformats.org/officeDocument/2006/relationships" xmlns:p="http://schemas.openxmlformats.org/presentationml/2006/main">
   <p:cSld>
     <p:spTree>
@@ -19644,7 +23483,7 @@
             <a:fld id="{00000000-1234-1234-1234-123412341234}" type="slidenum">
               <a:rPr lang="en-GB" noProof="0" smtClean="0"/>
               <a:pPr/>
-              <a:t>33</a:t>
+              <a:t>35</a:t>
             </a:fld>
             <a:endParaRPr lang="en-GB" noProof="0" dirty="0"/>
           </a:p>
@@ -26965,6 +30804,17 @@
 </file>
 
 <file path=customXml/item1.xml><?xml version="1.0" encoding="utf-8"?>
+<p:properties xmlns:p="http://schemas.microsoft.com/office/2006/metadata/properties" xmlns:xsi="http://www.w3.org/2001/XMLSchema-instance" xmlns:pc="http://schemas.microsoft.com/office/infopath/2007/PartnerControls">
+  <documentManagement>
+    <lcf76f155ced4ddcb4097134ff3c332f xmlns="0e422b70-e85d-4377-8ee0-b6227433d381">
+      <Terms xmlns="http://schemas.microsoft.com/office/infopath/2007/PartnerControls"/>
+    </lcf76f155ced4ddcb4097134ff3c332f>
+    <TaxCatchAll xmlns="199f642e-5af9-486c-ac06-f366742ef41a"/>
+  </documentManagement>
+</p:properties>
+</file>
+
+<file path=customXml/item2.xml><?xml version="1.0" encoding="utf-8"?>
 <ct:contentTypeSchema xmlns:ct="http://schemas.microsoft.com/office/2006/metadata/contentType" xmlns:ma="http://schemas.microsoft.com/office/2006/metadata/properties/metaAttributes" ct:_="" ma:_="" ma:contentTypeName="Document" ma:contentTypeID="0x010100E6AA5C57F8EADE4E9CD6BB064C0C3195" ma:contentTypeVersion="16" ma:contentTypeDescription="Create a new document." ma:contentTypeScope="" ma:versionID="bb51c19a58f458ddcddd050a07659236">
   <xsd:schema xmlns:xsd="http://www.w3.org/2001/XMLSchema" xmlns:xs="http://www.w3.org/2001/XMLSchema" xmlns:p="http://schemas.microsoft.com/office/2006/metadata/properties" xmlns:ns2="0e422b70-e85d-4377-8ee0-b6227433d381" xmlns:ns3="199f642e-5af9-486c-ac06-f366742ef41a" targetNamespace="http://schemas.microsoft.com/office/2006/metadata/properties" ma:root="true" ma:fieldsID="0ee7a3bac0352a48a43420936abd968a" ns2:_="" ns3:_="">
     <xsd:import namespace="0e422b70-e85d-4377-8ee0-b6227433d381"/>
@@ -27205,7 +31055,7 @@
 </ct:contentTypeSchema>
 </file>
 
-<file path=customXml/item2.xml><?xml version="1.0" encoding="utf-8"?>
+<file path=customXml/item3.xml><?xml version="1.0" encoding="utf-8"?>
 <?mso-contentType ?>
 <FormTemplates xmlns="http://schemas.microsoft.com/sharepoint/v3/contenttype/forms">
   <Display>DocumentLibraryForm</Display>
@@ -27214,18 +31064,24 @@
 </FormTemplates>
 </file>
 
-<file path=customXml/item3.xml><?xml version="1.0" encoding="utf-8"?>
-<p:properties xmlns:p="http://schemas.microsoft.com/office/2006/metadata/properties" xmlns:xsi="http://www.w3.org/2001/XMLSchema-instance" xmlns:pc="http://schemas.microsoft.com/office/infopath/2007/PartnerControls">
-  <documentManagement>
-    <lcf76f155ced4ddcb4097134ff3c332f xmlns="0e422b70-e85d-4377-8ee0-b6227433d381">
-      <Terms xmlns="http://schemas.microsoft.com/office/infopath/2007/PartnerControls"/>
-    </lcf76f155ced4ddcb4097134ff3c332f>
-    <TaxCatchAll xmlns="199f642e-5af9-486c-ac06-f366742ef41a"/>
-  </documentManagement>
-</p:properties>
+<file path=customXml/itemProps1.xml><?xml version="1.0" encoding="utf-8"?>
+<ds:datastoreItem xmlns:ds="http://schemas.openxmlformats.org/officeDocument/2006/customXml" ds:itemID="{2D6C293B-B8B4-4284-A17E-9F9E4C32B25A}">
+  <ds:schemaRefs>
+    <ds:schemaRef ds:uri="http://schemas.microsoft.com/office/2006/documentManagement/types"/>
+    <ds:schemaRef ds:uri="http://purl.org/dc/elements/1.1/"/>
+    <ds:schemaRef ds:uri="http://purl.org/dc/terms/"/>
+    <ds:schemaRef ds:uri="http://purl.org/dc/dcmitype/"/>
+    <ds:schemaRef ds:uri="0e422b70-e85d-4377-8ee0-b6227433d381"/>
+    <ds:schemaRef ds:uri="http://schemas.microsoft.com/office/infopath/2007/PartnerControls"/>
+    <ds:schemaRef ds:uri="199f642e-5af9-486c-ac06-f366742ef41a"/>
+    <ds:schemaRef ds:uri="http://schemas.openxmlformats.org/package/2006/metadata/core-properties"/>
+    <ds:schemaRef ds:uri="http://schemas.microsoft.com/office/2006/metadata/properties"/>
+    <ds:schemaRef ds:uri="http://www.w3.org/XML/1998/namespace"/>
+  </ds:schemaRefs>
+</ds:datastoreItem>
 </file>
 
-<file path=customXml/itemProps1.xml><?xml version="1.0" encoding="utf-8"?>
+<file path=customXml/itemProps2.xml><?xml version="1.0" encoding="utf-8"?>
 <ds:datastoreItem xmlns:ds="http://schemas.openxmlformats.org/officeDocument/2006/customXml" ds:itemID="{04B464EA-1576-49DD-9675-1E3399D4D196}">
   <ds:schemaRefs>
     <ds:schemaRef ds:uri="http://schemas.microsoft.com/office/2006/metadata/contentType"/>
@@ -27244,27 +31100,10 @@
 </ds:datastoreItem>
 </file>
 
-<file path=customXml/itemProps2.xml><?xml version="1.0" encoding="utf-8"?>
+<file path=customXml/itemProps3.xml><?xml version="1.0" encoding="utf-8"?>
 <ds:datastoreItem xmlns:ds="http://schemas.openxmlformats.org/officeDocument/2006/customXml" ds:itemID="{67DD9E9F-9EEB-4105-B29B-819486C2855A}">
   <ds:schemaRefs>
     <ds:schemaRef ds:uri="http://schemas.microsoft.com/sharepoint/v3/contenttype/forms"/>
   </ds:schemaRefs>
 </ds:datastoreItem>
-</file>
-
-<file path=customXml/itemProps3.xml><?xml version="1.0" encoding="utf-8"?>
-<ds:datastoreItem xmlns:ds="http://schemas.openxmlformats.org/officeDocument/2006/customXml" ds:itemID="{2D6C293B-B8B4-4284-A17E-9F9E4C32B25A}">
-  <ds:schemaRefs>
-    <ds:schemaRef ds:uri="http://schemas.microsoft.com/office/2006/documentManagement/types"/>
-    <ds:schemaRef ds:uri="http://purl.org/dc/elements/1.1/"/>
-    <ds:schemaRef ds:uri="http://purl.org/dc/terms/"/>
-    <ds:schemaRef ds:uri="http://purl.org/dc/dcmitype/"/>
-    <ds:schemaRef ds:uri="0e422b70-e85d-4377-8ee0-b6227433d381"/>
-    <ds:schemaRef ds:uri="http://schemas.microsoft.com/office/infopath/2007/PartnerControls"/>
-    <ds:schemaRef ds:uri="199f642e-5af9-486c-ac06-f366742ef41a"/>
-    <ds:schemaRef ds:uri="http://schemas.openxmlformats.org/package/2006/metadata/core-properties"/>
-    <ds:schemaRef ds:uri="http://schemas.microsoft.com/office/2006/metadata/properties"/>
-    <ds:schemaRef ds:uri="http://www.w3.org/XML/1998/namespace"/>
-  </ds:schemaRefs>
-</ds:datastoreItem>
 </file>
--- a/3.2 SEATS.pptx
+++ b/3.2 SEATS.pptx
@@ -295,7 +295,7 @@
       <p15:notesGuideLst xmlns:p15="http://schemas.microsoft.com/office/powerpoint/2012/main"/>
     </p:ext>
     <p:ext uri="http://customooxmlschemas.google.com/">
-      <go:slidesCustomData xmlns="" xmlns:go="http://customooxmlschemas.google.com/" xmlns:ahyp="http://schemas.microsoft.com/office/drawing/2018/hyperlinkcolor" xmlns:p15="http://schemas.microsoft.com/office/powerpoint/2012/main" xmlns:p14="http://schemas.microsoft.com/office/powerpoint/2010/main" xmlns:com="http://schemas.openxmlformats.org/drawingml/2006/compatibility" xmlns:pvml="urn:schemas-microsoft-com:office:powerpoint" xmlns:v="urn:schemas-microsoft-com:vml" xmlns:o="urn:schemas-microsoft-com:office:office" xmlns:dgm="http://schemas.openxmlformats.org/drawingml/2006/diagram" xmlns:c="http://schemas.openxmlformats.org/drawingml/2006/chart" xmlns:mv="urn:schemas-microsoft-com:mac:vml" xmlns:mc="http://schemas.openxmlformats.org/markup-compatibility/2006" r:id="rId59" roundtripDataSignature="AMtx7mh3YP3xexYcFoahXa2ehi0H5V4Zaw=="/>
+      <go:slidesCustomData xmlns:mc="http://schemas.openxmlformats.org/markup-compatibility/2006" xmlns:mv="urn:schemas-microsoft-com:mac:vml" xmlns:c="http://schemas.openxmlformats.org/drawingml/2006/chart" xmlns:dgm="http://schemas.openxmlformats.org/drawingml/2006/diagram" xmlns:o="urn:schemas-microsoft-com:office:office" xmlns:v="urn:schemas-microsoft-com:vml" xmlns:pvml="urn:schemas-microsoft-com:office:powerpoint" xmlns:com="http://schemas.openxmlformats.org/drawingml/2006/compatibility" xmlns:p14="http://schemas.microsoft.com/office/powerpoint/2010/main" xmlns:p15="http://schemas.microsoft.com/office/powerpoint/2012/main" xmlns:ahyp="http://schemas.microsoft.com/office/drawing/2018/hyperlinkcolor" xmlns:go="http://customooxmlschemas.google.com/" xmlns="" r:id="rId59" roundtripDataSignature="AMtx7mh3YP3xexYcFoahXa2ehi0H5V4Zaw=="/>
     </p:ext>
   </p:extLst>
 </p:presentation>
@@ -403,7 +403,7 @@
           <a:p>
             <a:fld id="{0CBFB8CE-488C-4A7E-87F2-3AF6127C51C1}" type="datetimeFigureOut">
               <a:rPr lang="en-IE" smtClean="0"/>
-              <a:t>30/09/2026</a:t>
+              <a:t>05/10/2026</a:t>
             </a:fld>
             <a:endParaRPr lang="en-IE"/>
           </a:p>
@@ -6515,8 +6515,8 @@
           </a:p>
         </p:txBody>
       </p:sp>
-      <mc:AlternateContent xmlns:mc="http://schemas.openxmlformats.org/markup-compatibility/2006">
-        <mc:Choice xmlns:a14="http://schemas.microsoft.com/office/drawing/2010/main" Requires="a14">
+      <mc:AlternateContent xmlns:mc="http://schemas.openxmlformats.org/markup-compatibility/2006" xmlns:a14="http://schemas.microsoft.com/office/drawing/2010/main">
+        <mc:Choice Requires="a14">
           <p:sp>
             <p:nvSpPr>
               <p:cNvPr id="9" name="Rounded Rectangle 8"/>
@@ -6624,7 +6624,7 @@
             </p:txBody>
           </p:sp>
         </mc:Choice>
-        <mc:Fallback>
+        <mc:Fallback xmlns="">
           <p:sp>
             <p:nvSpPr>
               <p:cNvPr id="9" name="Rounded Rectangle 8"/>
@@ -6663,8 +6663,8 @@
           </p:sp>
         </mc:Fallback>
       </mc:AlternateContent>
-      <mc:AlternateContent xmlns:mc="http://schemas.openxmlformats.org/markup-compatibility/2006">
-        <mc:Choice xmlns:a14="http://schemas.microsoft.com/office/drawing/2010/main" Requires="a14">
+      <mc:AlternateContent xmlns:mc="http://schemas.openxmlformats.org/markup-compatibility/2006" xmlns:a14="http://schemas.microsoft.com/office/drawing/2010/main">
+        <mc:Choice Requires="a14">
           <p:sp>
             <p:nvSpPr>
               <p:cNvPr id="10" name="Rounded Rectangle 9"/>
@@ -6774,7 +6774,7 @@
             </p:txBody>
           </p:sp>
         </mc:Choice>
-        <mc:Fallback>
+        <mc:Fallback xmlns="">
           <p:sp>
             <p:nvSpPr>
               <p:cNvPr id="10" name="Rounded Rectangle 9"/>
@@ -6813,8 +6813,8 @@
           </p:sp>
         </mc:Fallback>
       </mc:AlternateContent>
-      <mc:AlternateContent xmlns:mc="http://schemas.openxmlformats.org/markup-compatibility/2006">
-        <mc:Choice xmlns:a14="http://schemas.microsoft.com/office/drawing/2010/main" Requires="a14">
+      <mc:AlternateContent xmlns:mc="http://schemas.openxmlformats.org/markup-compatibility/2006" xmlns:a14="http://schemas.microsoft.com/office/drawing/2010/main">
+        <mc:Choice Requires="a14">
           <p:sp>
             <p:nvSpPr>
               <p:cNvPr id="13" name="Rounded Rectangle 12"/>
@@ -6924,7 +6924,7 @@
             </p:txBody>
           </p:sp>
         </mc:Choice>
-        <mc:Fallback>
+        <mc:Fallback xmlns="">
           <p:sp>
             <p:nvSpPr>
               <p:cNvPr id="13" name="Rounded Rectangle 12"/>
@@ -6963,8 +6963,8 @@
           </p:sp>
         </mc:Fallback>
       </mc:AlternateContent>
-      <mc:AlternateContent xmlns:mc="http://schemas.openxmlformats.org/markup-compatibility/2006">
-        <mc:Choice xmlns:a14="http://schemas.microsoft.com/office/drawing/2010/main" Requires="a14">
+      <mc:AlternateContent xmlns:mc="http://schemas.openxmlformats.org/markup-compatibility/2006" xmlns:a14="http://schemas.microsoft.com/office/drawing/2010/main">
+        <mc:Choice Requires="a14">
           <p:sp>
             <p:nvSpPr>
               <p:cNvPr id="14" name="Rounded Rectangle 13"/>
@@ -7074,7 +7074,7 @@
             </p:txBody>
           </p:sp>
         </mc:Choice>
-        <mc:Fallback>
+        <mc:Fallback xmlns="">
           <p:sp>
             <p:nvSpPr>
               <p:cNvPr id="14" name="Rounded Rectangle 13"/>
@@ -7455,8 +7455,8 @@
           </a:fontRef>
         </p:style>
       </p:cxnSp>
-      <mc:AlternateContent xmlns:mc="http://schemas.openxmlformats.org/markup-compatibility/2006">
-        <mc:Choice xmlns:a14="http://schemas.microsoft.com/office/drawing/2010/main" Requires="a14">
+      <mc:AlternateContent xmlns:mc="http://schemas.openxmlformats.org/markup-compatibility/2006" xmlns:a14="http://schemas.microsoft.com/office/drawing/2010/main">
+        <mc:Choice Requires="a14">
           <p:sp>
             <p:nvSpPr>
               <p:cNvPr id="39" name="TextBox 38"/>
@@ -7544,7 +7544,7 @@
             </p:txBody>
           </p:sp>
         </mc:Choice>
-        <mc:Fallback>
+        <mc:Fallback xmlns="">
           <p:sp>
             <p:nvSpPr>
               <p:cNvPr id="39" name="TextBox 38"/>
@@ -7736,8 +7736,8 @@
           </a:p>
         </p:txBody>
       </p:sp>
-      <mc:AlternateContent xmlns:mc="http://schemas.openxmlformats.org/markup-compatibility/2006">
-        <mc:Choice xmlns:a14="http://schemas.microsoft.com/office/drawing/2010/main" Requires="a14">
+      <mc:AlternateContent xmlns:mc="http://schemas.openxmlformats.org/markup-compatibility/2006" xmlns:a14="http://schemas.microsoft.com/office/drawing/2010/main">
+        <mc:Choice Requires="a14">
           <p:sp>
             <p:nvSpPr>
               <p:cNvPr id="8" name="Rounded Rectangle 7"/>
@@ -7801,7 +7801,7 @@
             </p:txBody>
           </p:sp>
         </mc:Choice>
-        <mc:Fallback>
+        <mc:Fallback xmlns="">
           <p:sp>
             <p:nvSpPr>
               <p:cNvPr id="8" name="Rounded Rectangle 7"/>
@@ -7840,8 +7840,8 @@
           </p:sp>
         </mc:Fallback>
       </mc:AlternateContent>
-      <mc:AlternateContent xmlns:mc="http://schemas.openxmlformats.org/markup-compatibility/2006">
-        <mc:Choice xmlns:a14="http://schemas.microsoft.com/office/drawing/2010/main" Requires="a14">
+      <mc:AlternateContent xmlns:mc="http://schemas.openxmlformats.org/markup-compatibility/2006" xmlns:a14="http://schemas.microsoft.com/office/drawing/2010/main">
+        <mc:Choice Requires="a14">
           <p:sp>
             <p:nvSpPr>
               <p:cNvPr id="9" name="Rounded Rectangle 8"/>
@@ -7905,7 +7905,7 @@
             </p:txBody>
           </p:sp>
         </mc:Choice>
-        <mc:Fallback>
+        <mc:Fallback xmlns="">
           <p:sp>
             <p:nvSpPr>
               <p:cNvPr id="9" name="Rounded Rectangle 8"/>
@@ -8144,8 +8144,8 @@
           </a:p>
         </p:txBody>
       </p:sp>
-      <mc:AlternateContent xmlns:mc="http://schemas.openxmlformats.org/markup-compatibility/2006">
-        <mc:Choice xmlns:a14="http://schemas.microsoft.com/office/drawing/2010/main" Requires="a14">
+      <mc:AlternateContent xmlns:mc="http://schemas.openxmlformats.org/markup-compatibility/2006" xmlns:a14="http://schemas.microsoft.com/office/drawing/2010/main">
+        <mc:Choice Requires="a14">
           <p:sp>
             <p:nvSpPr>
               <p:cNvPr id="15" name="Rounded Rectangle 14"/>
@@ -8270,7 +8270,7 @@
             </p:txBody>
           </p:sp>
         </mc:Choice>
-        <mc:Fallback>
+        <mc:Fallback xmlns="">
           <p:sp>
             <p:nvSpPr>
               <p:cNvPr id="15" name="Rounded Rectangle 14"/>
@@ -8462,8 +8462,8 @@
           </a:fontRef>
         </p:style>
       </p:cxnSp>
-      <mc:AlternateContent xmlns:mc="http://schemas.openxmlformats.org/markup-compatibility/2006">
-        <mc:Choice xmlns:a14="http://schemas.microsoft.com/office/drawing/2010/main" Requires="a14">
+      <mc:AlternateContent xmlns:mc="http://schemas.openxmlformats.org/markup-compatibility/2006" xmlns:a14="http://schemas.microsoft.com/office/drawing/2010/main">
+        <mc:Choice Requires="a14">
           <p:sp>
             <p:nvSpPr>
               <p:cNvPr id="20" name="Rounded Rectangle 19"/>
@@ -8549,7 +8549,7 @@
             </p:txBody>
           </p:sp>
         </mc:Choice>
-        <mc:Fallback>
+        <mc:Fallback xmlns="">
           <p:sp>
             <p:nvSpPr>
               <p:cNvPr id="20" name="Rounded Rectangle 19"/>
@@ -8664,8 +8664,8 @@
           </a:fontRef>
         </p:style>
       </p:cxnSp>
-      <mc:AlternateContent xmlns:mc="http://schemas.openxmlformats.org/markup-compatibility/2006">
-        <mc:Choice xmlns:a14="http://schemas.microsoft.com/office/drawing/2010/main" Requires="a14">
+      <mc:AlternateContent xmlns:mc="http://schemas.openxmlformats.org/markup-compatibility/2006" xmlns:a14="http://schemas.microsoft.com/office/drawing/2010/main">
+        <mc:Choice Requires="a14">
           <p:sp>
             <p:nvSpPr>
               <p:cNvPr id="23" name="Rounded Rectangle 22"/>
@@ -8788,7 +8788,7 @@
             </p:txBody>
           </p:sp>
         </mc:Choice>
-        <mc:Fallback>
+        <mc:Fallback xmlns="">
           <p:sp>
             <p:nvSpPr>
               <p:cNvPr id="23" name="Rounded Rectangle 22"/>
@@ -8832,8 +8832,8 @@
           </p:sp>
         </mc:Fallback>
       </mc:AlternateContent>
-      <mc:AlternateContent xmlns:mc="http://schemas.openxmlformats.org/markup-compatibility/2006">
-        <mc:Choice xmlns:a14="http://schemas.microsoft.com/office/drawing/2010/main" Requires="a14">
+      <mc:AlternateContent xmlns:mc="http://schemas.openxmlformats.org/markup-compatibility/2006" xmlns:a14="http://schemas.microsoft.com/office/drawing/2010/main">
+        <mc:Choice Requires="a14">
           <p:sp>
             <p:nvSpPr>
               <p:cNvPr id="24" name="Rounded Rectangle 23"/>
@@ -8977,7 +8977,7 @@
             </p:txBody>
           </p:sp>
         </mc:Choice>
-        <mc:Fallback>
+        <mc:Fallback xmlns="">
           <p:sp>
             <p:nvSpPr>
               <p:cNvPr id="24" name="Rounded Rectangle 23"/>
@@ -9108,8 +9108,8 @@
           </a:p>
         </p:txBody>
       </p:sp>
-      <mc:AlternateContent xmlns:mc="http://schemas.openxmlformats.org/markup-compatibility/2006">
-        <mc:Choice xmlns:a14="http://schemas.microsoft.com/office/drawing/2010/main" Requires="a14">
+      <mc:AlternateContent xmlns:mc="http://schemas.openxmlformats.org/markup-compatibility/2006" xmlns:a14="http://schemas.microsoft.com/office/drawing/2010/main">
+        <mc:Choice Requires="a14">
           <p:sp>
             <p:nvSpPr>
               <p:cNvPr id="30" name="Rounded Rectangle 23">
@@ -9330,7 +9330,7 @@
             </p:txBody>
           </p:sp>
         </mc:Choice>
-        <mc:Fallback>
+        <mc:Fallback xmlns="">
           <p:sp>
             <p:nvSpPr>
               <p:cNvPr id="30" name="Rounded Rectangle 23">
@@ -9500,8 +9500,8 @@
           </a:p>
         </p:txBody>
       </p:sp>
-      <mc:AlternateContent xmlns:mc="http://schemas.openxmlformats.org/markup-compatibility/2006">
-        <mc:Choice xmlns:a14="http://schemas.microsoft.com/office/drawing/2010/main" Requires="a14">
+      <mc:AlternateContent xmlns:mc="http://schemas.openxmlformats.org/markup-compatibility/2006" xmlns:a14="http://schemas.microsoft.com/office/drawing/2010/main">
+        <mc:Choice Requires="a14">
           <p:sp>
             <p:nvSpPr>
               <p:cNvPr id="3" name="Content Placeholder 2"/>
@@ -10319,7 +10319,7 @@
             </p:txBody>
           </p:sp>
         </mc:Choice>
-        <mc:Fallback>
+        <mc:Fallback xmlns="">
           <p:sp>
             <p:nvSpPr>
               <p:cNvPr id="3" name="Content Placeholder 2"/>
@@ -10493,8 +10493,8 @@
           <a:chExt cx="0" cy="0"/>
         </a:xfrm>
       </p:grpSpPr>
-      <mc:AlternateContent xmlns:mc="http://schemas.openxmlformats.org/markup-compatibility/2006">
-        <mc:Choice xmlns:a14="http://schemas.microsoft.com/office/drawing/2010/main" Requires="a14">
+      <mc:AlternateContent xmlns:mc="http://schemas.openxmlformats.org/markup-compatibility/2006" xmlns:a14="http://schemas.microsoft.com/office/drawing/2010/main">
+        <mc:Choice Requires="a14">
           <p:sp>
             <p:nvSpPr>
               <p:cNvPr id="3" name="Content Placeholder 2"/>
@@ -10930,7 +10930,7 @@
             </p:txBody>
           </p:sp>
         </mc:Choice>
-        <mc:Fallback>
+        <mc:Fallback xmlns="">
           <p:sp>
             <p:nvSpPr>
               <p:cNvPr id="3" name="Content Placeholder 2"/>
@@ -11698,8 +11698,8 @@
           </a:extLst>
         </p:spPr>
       </p:pic>
-      <mc:AlternateContent xmlns:mc="http://schemas.openxmlformats.org/markup-compatibility/2006">
-        <mc:Choice xmlns:a14="http://schemas.microsoft.com/office/drawing/2010/main" Requires="a14">
+      <mc:AlternateContent xmlns:mc="http://schemas.openxmlformats.org/markup-compatibility/2006" xmlns:a14="http://schemas.microsoft.com/office/drawing/2010/main">
+        <mc:Choice Requires="a14">
           <p:sp>
             <p:nvSpPr>
               <p:cNvPr id="7" name="TextBox 6"/>
@@ -11883,7 +11883,7 @@
             </p:txBody>
           </p:sp>
         </mc:Choice>
-        <mc:Fallback>
+        <mc:Fallback xmlns="">
           <p:sp>
             <p:nvSpPr>
               <p:cNvPr id="7" name="TextBox 6"/>
@@ -11922,8 +11922,8 @@
           </p:sp>
         </mc:Fallback>
       </mc:AlternateContent>
-      <mc:AlternateContent xmlns:mc="http://schemas.openxmlformats.org/markup-compatibility/2006">
-        <mc:Choice xmlns:a14="http://schemas.microsoft.com/office/drawing/2010/main" Requires="a14">
+      <mc:AlternateContent xmlns:mc="http://schemas.openxmlformats.org/markup-compatibility/2006" xmlns:a14="http://schemas.microsoft.com/office/drawing/2010/main">
+        <mc:Choice Requires="a14">
           <p:sp>
             <p:nvSpPr>
               <p:cNvPr id="12" name="TextBox 11"/>
@@ -12138,7 +12138,7 @@
             </p:txBody>
           </p:sp>
         </mc:Choice>
-        <mc:Fallback>
+        <mc:Fallback xmlns="">
           <p:sp>
             <p:nvSpPr>
               <p:cNvPr id="12" name="TextBox 11"/>
@@ -13356,8 +13356,8 @@
           </a:p>
         </p:txBody>
       </p:sp>
-      <mc:AlternateContent xmlns:mc="http://schemas.openxmlformats.org/markup-compatibility/2006">
-        <mc:Choice xmlns:a14="http://schemas.microsoft.com/office/drawing/2010/main" Requires="a14">
+      <mc:AlternateContent xmlns:mc="http://schemas.openxmlformats.org/markup-compatibility/2006" xmlns:a14="http://schemas.microsoft.com/office/drawing/2010/main">
+        <mc:Choice Requires="a14">
           <p:sp>
             <p:nvSpPr>
               <p:cNvPr id="22" name="TextBox 21">
@@ -13578,7 +13578,7 @@
             </p:txBody>
           </p:sp>
         </mc:Choice>
-        <mc:Fallback>
+        <mc:Fallback xmlns="">
           <p:sp>
             <p:nvSpPr>
               <p:cNvPr id="22" name="TextBox 21">
@@ -13623,8 +13623,8 @@
           </p:sp>
         </mc:Fallback>
       </mc:AlternateContent>
-      <mc:AlternateContent xmlns:mc="http://schemas.openxmlformats.org/markup-compatibility/2006">
-        <mc:Choice xmlns:a14="http://schemas.microsoft.com/office/drawing/2010/main" Requires="a14">
+      <mc:AlternateContent xmlns:mc="http://schemas.openxmlformats.org/markup-compatibility/2006" xmlns:a14="http://schemas.microsoft.com/office/drawing/2010/main">
+        <mc:Choice Requires="a14">
           <p:sp>
             <p:nvSpPr>
               <p:cNvPr id="24" name="TextBox 23">
@@ -13805,7 +13805,7 @@
             </p:txBody>
           </p:sp>
         </mc:Choice>
-        <mc:Fallback>
+        <mc:Fallback xmlns="">
           <p:sp>
             <p:nvSpPr>
               <p:cNvPr id="24" name="TextBox 23">
@@ -14108,8 +14108,8 @@
           </a:p>
         </p:txBody>
       </p:sp>
-      <mc:AlternateContent xmlns:mc="http://schemas.openxmlformats.org/markup-compatibility/2006">
-        <mc:Choice xmlns:a14="http://schemas.microsoft.com/office/drawing/2010/main" Requires="a14">
+      <mc:AlternateContent xmlns:mc="http://schemas.openxmlformats.org/markup-compatibility/2006" xmlns:a14="http://schemas.microsoft.com/office/drawing/2010/main">
+        <mc:Choice Requires="a14">
           <p:sp>
             <p:nvSpPr>
               <p:cNvPr id="4" name="Espace réservé du contenu 3">
@@ -14616,7 +14616,7 @@
             </p:txBody>
           </p:sp>
         </mc:Choice>
-        <mc:Fallback>
+        <mc:Fallback xmlns="">
           <p:sp>
             <p:nvSpPr>
               <p:cNvPr id="4" name="Espace réservé du contenu 3">
@@ -14683,8 +14683,8 @@
             </p:nvSpPr>
             <p:spPr>
               <a:xfrm>
-                <a:off x="3519378" y="3608209"/>
-                <a:ext cx="5979948" cy="2473614"/>
+                <a:off x="3519377" y="3608209"/>
+                <a:ext cx="7157587" cy="2473614"/>
               </a:xfrm>
               <a:prstGeom prst="rect">
                 <a:avLst/>
@@ -15606,8 +15606,8 @@
             </p:nvSpPr>
             <p:spPr>
               <a:xfrm>
-                <a:off x="3519378" y="3608209"/>
-                <a:ext cx="5979948" cy="2473614"/>
+                <a:off x="3519377" y="3608209"/>
+                <a:ext cx="7157587" cy="2473614"/>
               </a:xfrm>
               <a:prstGeom prst="rect">
                 <a:avLst/>
@@ -15615,7 +15615,7 @@
               <a:blipFill>
                 <a:blip r:embed="rId3"/>
                 <a:stretch>
-                  <a:fillRect l="-1221" t="-1961"/>
+                  <a:fillRect l="-1020" t="-1961"/>
                 </a:stretch>
               </a:blipFill>
               <a:ln>
@@ -15941,8 +15941,8 @@
           </a:p>
         </p:txBody>
       </p:sp>
-      <mc:AlternateContent xmlns:mc="http://schemas.openxmlformats.org/markup-compatibility/2006">
-        <mc:Choice xmlns:a14="http://schemas.microsoft.com/office/drawing/2010/main" Requires="a14">
+      <mc:AlternateContent xmlns:mc="http://schemas.openxmlformats.org/markup-compatibility/2006" xmlns:a14="http://schemas.microsoft.com/office/drawing/2010/main">
+        <mc:Choice Requires="a14">
           <p:sp>
             <p:nvSpPr>
               <p:cNvPr id="4" name="Espace réservé du contenu 3">
@@ -16088,6 +16088,7 @@
                         <m:ctrlPr>
                           <a:rPr lang="en-GB" b="0" i="1" noProof="0" smtClean="0">
                             <a:latin typeface="Cambria Math" panose="02040503050406030204" pitchFamily="18" charset="0"/>
+                            <a:ea typeface="Cambria Math" panose="02040503050406030204" pitchFamily="18" charset="0"/>
                           </a:rPr>
                         </m:ctrlPr>
                       </m:dPr>
@@ -18010,7 +18011,7 @@
             </p:txBody>
           </p:sp>
         </mc:Choice>
-        <mc:Fallback>
+        <mc:Fallback xmlns="">
           <p:sp>
             <p:nvSpPr>
               <p:cNvPr id="4" name="Espace réservé du contenu 3">
@@ -19967,7 +19968,7 @@
             </a:pPr>
             <a:r>
               <a:rPr lang="en-GB" sz="2400" noProof="0" dirty="0"/>
-              <a:t>Fix the series in the past (5 years revisions)</a:t>
+              <a:t>Fix the SA in the past (5 years revisions)</a:t>
             </a:r>
           </a:p>
           <a:p>
@@ -20376,8 +20377,8 @@
           </a:p>
         </p:txBody>
       </p:sp>
-      <mc:AlternateContent xmlns:mc="http://schemas.openxmlformats.org/markup-compatibility/2006">
-        <mc:Choice xmlns:a14="http://schemas.microsoft.com/office/drawing/2010/main" Requires="a14">
+      <mc:AlternateContent xmlns:mc="http://schemas.openxmlformats.org/markup-compatibility/2006" xmlns:a14="http://schemas.microsoft.com/office/drawing/2010/main">
+        <mc:Choice Requires="a14">
           <p:sp>
             <p:nvSpPr>
               <p:cNvPr id="3" name="Content Placeholder 2">
@@ -21377,7 +21378,7 @@
             </p:txBody>
           </p:sp>
         </mc:Choice>
-        <mc:Fallback>
+        <mc:Fallback xmlns="">
           <p:sp>
             <p:nvSpPr>
               <p:cNvPr id="3" name="Content Placeholder 2">
@@ -21538,8 +21539,8 @@
           </a:p>
         </p:txBody>
       </p:sp>
-      <mc:AlternateContent xmlns:mc="http://schemas.openxmlformats.org/markup-compatibility/2006">
-        <mc:Choice xmlns:a14="http://schemas.microsoft.com/office/drawing/2010/main" Requires="a14">
+      <mc:AlternateContent xmlns:mc="http://schemas.openxmlformats.org/markup-compatibility/2006" xmlns:a14="http://schemas.microsoft.com/office/drawing/2010/main">
+        <mc:Choice Requires="a14">
           <p:sp>
             <p:nvSpPr>
               <p:cNvPr id="3" name="Content Placeholder 2">
@@ -22813,7 +22814,7 @@
             </p:txBody>
           </p:sp>
         </mc:Choice>
-        <mc:Fallback>
+        <mc:Fallback xmlns="">
           <p:sp>
             <p:nvSpPr>
               <p:cNvPr id="3" name="Content Placeholder 2">
@@ -22980,8 +22981,8 @@
           </a:p>
         </p:txBody>
       </p:sp>
-      <mc:AlternateContent xmlns:mc="http://schemas.openxmlformats.org/markup-compatibility/2006">
-        <mc:Choice xmlns:a14="http://schemas.microsoft.com/office/drawing/2010/main" Requires="a14">
+      <mc:AlternateContent xmlns:mc="http://schemas.openxmlformats.org/markup-compatibility/2006" xmlns:a14="http://schemas.microsoft.com/office/drawing/2010/main">
+        <mc:Choice Requires="a14">
           <p:sp>
             <p:nvSpPr>
               <p:cNvPr id="3" name="Content Placeholder 2">
@@ -23795,7 +23796,7 @@
                           <m:rPr>
                             <m:nor/>
                           </m:rPr>
-                          <a:rPr lang="en-GB" sz="2400" noProof="0"/>
+                          <a:rPr lang="en-GB" sz="2400" i="0" noProof="0"/>
                           <m:t> </m:t>
                         </m:r>
                       </m:e>
@@ -23889,7 +23890,7 @@
                           <m:rPr>
                             <m:nor/>
                           </m:rPr>
-                          <a:rPr lang="en-GB" sz="3000" noProof="0"/>
+                          <a:rPr lang="en-GB" sz="3000" i="0" noProof="0"/>
                           <m:t> </m:t>
                         </m:r>
                       </m:e>
@@ -24040,7 +24041,7 @@
             </p:txBody>
           </p:sp>
         </mc:Choice>
-        <mc:Fallback>
+        <mc:Fallback xmlns="">
           <p:sp>
             <p:nvSpPr>
               <p:cNvPr id="3" name="Content Placeholder 2">
@@ -24464,8 +24465,8 @@
           </a:p>
         </p:txBody>
       </p:sp>
-      <mc:AlternateContent xmlns:mc="http://schemas.openxmlformats.org/markup-compatibility/2006">
-        <mc:Choice xmlns:a14="http://schemas.microsoft.com/office/drawing/2010/main" Requires="a14">
+      <mc:AlternateContent xmlns:mc="http://schemas.openxmlformats.org/markup-compatibility/2006" xmlns:a14="http://schemas.microsoft.com/office/drawing/2010/main">
+        <mc:Choice Requires="a14">
           <p:sp>
             <p:nvSpPr>
               <p:cNvPr id="9" name="Rounded Rectangle 8"/>
@@ -24618,7 +24619,7 @@
             </p:txBody>
           </p:sp>
         </mc:Choice>
-        <mc:Fallback>
+        <mc:Fallback xmlns="">
           <p:sp>
             <p:nvSpPr>
               <p:cNvPr id="9" name="Rounded Rectangle 8"/>
@@ -24662,8 +24663,8 @@
           </p:sp>
         </mc:Fallback>
       </mc:AlternateContent>
-      <mc:AlternateContent xmlns:mc="http://schemas.openxmlformats.org/markup-compatibility/2006">
-        <mc:Choice xmlns:a14="http://schemas.microsoft.com/office/drawing/2010/main" Requires="a14">
+      <mc:AlternateContent xmlns:mc="http://schemas.openxmlformats.org/markup-compatibility/2006" xmlns:a14="http://schemas.microsoft.com/office/drawing/2010/main">
+        <mc:Choice Requires="a14">
           <p:sp>
             <p:nvSpPr>
               <p:cNvPr id="10" name="Rounded Rectangle 9"/>
@@ -24773,7 +24774,7 @@
             </p:txBody>
           </p:sp>
         </mc:Choice>
-        <mc:Fallback>
+        <mc:Fallback xmlns="">
           <p:sp>
             <p:nvSpPr>
               <p:cNvPr id="10" name="Rounded Rectangle 9"/>
@@ -24812,8 +24813,8 @@
           </p:sp>
         </mc:Fallback>
       </mc:AlternateContent>
-      <mc:AlternateContent xmlns:mc="http://schemas.openxmlformats.org/markup-compatibility/2006">
-        <mc:Choice xmlns:a14="http://schemas.microsoft.com/office/drawing/2010/main" Requires="a14">
+      <mc:AlternateContent xmlns:mc="http://schemas.openxmlformats.org/markup-compatibility/2006" xmlns:a14="http://schemas.microsoft.com/office/drawing/2010/main">
+        <mc:Choice Requires="a14">
           <p:sp>
             <p:nvSpPr>
               <p:cNvPr id="13" name="Rounded Rectangle 12"/>
@@ -24923,7 +24924,7 @@
             </p:txBody>
           </p:sp>
         </mc:Choice>
-        <mc:Fallback>
+        <mc:Fallback xmlns="">
           <p:sp>
             <p:nvSpPr>
               <p:cNvPr id="13" name="Rounded Rectangle 12"/>
@@ -24962,8 +24963,8 @@
           </p:sp>
         </mc:Fallback>
       </mc:AlternateContent>
-      <mc:AlternateContent xmlns:mc="http://schemas.openxmlformats.org/markup-compatibility/2006">
-        <mc:Choice xmlns:a14="http://schemas.microsoft.com/office/drawing/2010/main" Requires="a14">
+      <mc:AlternateContent xmlns:mc="http://schemas.openxmlformats.org/markup-compatibility/2006" xmlns:a14="http://schemas.microsoft.com/office/drawing/2010/main">
+        <mc:Choice Requires="a14">
           <p:sp>
             <p:nvSpPr>
               <p:cNvPr id="14" name="Rounded Rectangle 13"/>
@@ -25073,7 +25074,7 @@
             </p:txBody>
           </p:sp>
         </mc:Choice>
-        <mc:Fallback>
+        <mc:Fallback xmlns="">
           <p:sp>
             <p:nvSpPr>
               <p:cNvPr id="14" name="Rounded Rectangle 13"/>
@@ -25454,8 +25455,8 @@
           </a:fontRef>
         </p:style>
       </p:cxnSp>
-      <mc:AlternateContent xmlns:mc="http://schemas.openxmlformats.org/markup-compatibility/2006">
-        <mc:Choice xmlns:a14="http://schemas.microsoft.com/office/drawing/2010/main" Requires="a14">
+      <mc:AlternateContent xmlns:mc="http://schemas.openxmlformats.org/markup-compatibility/2006" xmlns:a14="http://schemas.microsoft.com/office/drawing/2010/main">
+        <mc:Choice Requires="a14">
           <p:sp>
             <p:nvSpPr>
               <p:cNvPr id="39" name="TextBox 38"/>
@@ -25583,7 +25584,7 @@
             </p:txBody>
           </p:sp>
         </mc:Choice>
-        <mc:Fallback>
+        <mc:Fallback xmlns="">
           <p:sp>
             <p:nvSpPr>
               <p:cNvPr id="39" name="TextBox 38"/>
@@ -25709,8 +25710,8 @@
           </a:p>
         </p:txBody>
       </p:sp>
-      <mc:AlternateContent xmlns:mc="http://schemas.openxmlformats.org/markup-compatibility/2006">
-        <mc:Choice xmlns:a14="http://schemas.microsoft.com/office/drawing/2010/main" Requires="a14">
+      <mc:AlternateContent xmlns:mc="http://schemas.openxmlformats.org/markup-compatibility/2006" xmlns:a14="http://schemas.microsoft.com/office/drawing/2010/main">
+        <mc:Choice Requires="a14">
           <p:sp>
             <p:nvSpPr>
               <p:cNvPr id="3" name="Content Placeholder 2">
@@ -26682,7 +26683,7 @@
             </p:txBody>
           </p:sp>
         </mc:Choice>
-        <mc:Fallback>
+        <mc:Fallback xmlns="">
           <p:sp>
             <p:nvSpPr>
               <p:cNvPr id="3" name="Content Placeholder 2">
@@ -27644,6 +27645,17 @@
 </file>
 
 <file path=customXml/item1.xml><?xml version="1.0" encoding="utf-8"?>
+<p:properties xmlns:p="http://schemas.microsoft.com/office/2006/metadata/properties" xmlns:xsi="http://www.w3.org/2001/XMLSchema-instance" xmlns:pc="http://schemas.microsoft.com/office/infopath/2007/PartnerControls">
+  <documentManagement>
+    <lcf76f155ced4ddcb4097134ff3c332f xmlns="0e422b70-e85d-4377-8ee0-b6227433d381">
+      <Terms xmlns="http://schemas.microsoft.com/office/infopath/2007/PartnerControls"/>
+    </lcf76f155ced4ddcb4097134ff3c332f>
+    <TaxCatchAll xmlns="199f642e-5af9-486c-ac06-f366742ef41a"/>
+  </documentManagement>
+</p:properties>
+</file>
+
+<file path=customXml/item2.xml><?xml version="1.0" encoding="utf-8"?>
 <ct:contentTypeSchema xmlns:ct="http://schemas.microsoft.com/office/2006/metadata/contentType" xmlns:ma="http://schemas.microsoft.com/office/2006/metadata/properties/metaAttributes" ct:_="" ma:_="" ma:contentTypeName="Document" ma:contentTypeID="0x010100E6AA5C57F8EADE4E9CD6BB064C0C3195" ma:contentTypeVersion="16" ma:contentTypeDescription="Create a new document." ma:contentTypeScope="" ma:versionID="bb51c19a58f458ddcddd050a07659236">
   <xsd:schema xmlns:xsd="http://www.w3.org/2001/XMLSchema" xmlns:xs="http://www.w3.org/2001/XMLSchema" xmlns:p="http://schemas.microsoft.com/office/2006/metadata/properties" xmlns:ns2="0e422b70-e85d-4377-8ee0-b6227433d381" xmlns:ns3="199f642e-5af9-486c-ac06-f366742ef41a" targetNamespace="http://schemas.microsoft.com/office/2006/metadata/properties" ma:root="true" ma:fieldsID="0ee7a3bac0352a48a43420936abd968a" ns2:_="" ns3:_="">
     <xsd:import namespace="0e422b70-e85d-4377-8ee0-b6227433d381"/>
@@ -27884,17 +27896,6 @@
 </ct:contentTypeSchema>
 </file>
 
-<file path=customXml/item2.xml><?xml version="1.0" encoding="utf-8"?>
-<p:properties xmlns:p="http://schemas.microsoft.com/office/2006/metadata/properties" xmlns:xsi="http://www.w3.org/2001/XMLSchema-instance" xmlns:pc="http://schemas.microsoft.com/office/infopath/2007/PartnerControls">
-  <documentManagement>
-    <lcf76f155ced4ddcb4097134ff3c332f xmlns="0e422b70-e85d-4377-8ee0-b6227433d381">
-      <Terms xmlns="http://schemas.microsoft.com/office/infopath/2007/PartnerControls"/>
-    </lcf76f155ced4ddcb4097134ff3c332f>
-    <TaxCatchAll xmlns="199f642e-5af9-486c-ac06-f366742ef41a"/>
-  </documentManagement>
-</p:properties>
-</file>
-
 <file path=customXml/item3.xml><?xml version="1.0" encoding="utf-8"?>
 <?mso-contentType ?>
 <FormTemplates xmlns="http://schemas.microsoft.com/sharepoint/v3/contenttype/forms">
@@ -27905,6 +27906,23 @@
 </file>
 
 <file path=customXml/itemProps1.xml><?xml version="1.0" encoding="utf-8"?>
+<ds:datastoreItem xmlns:ds="http://schemas.openxmlformats.org/officeDocument/2006/customXml" ds:itemID="{2D6C293B-B8B4-4284-A17E-9F9E4C32B25A}">
+  <ds:schemaRefs>
+    <ds:schemaRef ds:uri="http://schemas.microsoft.com/office/2006/documentManagement/types"/>
+    <ds:schemaRef ds:uri="http://purl.org/dc/elements/1.1/"/>
+    <ds:schemaRef ds:uri="http://purl.org/dc/terms/"/>
+    <ds:schemaRef ds:uri="http://purl.org/dc/dcmitype/"/>
+    <ds:schemaRef ds:uri="0e422b70-e85d-4377-8ee0-b6227433d381"/>
+    <ds:schemaRef ds:uri="http://schemas.microsoft.com/office/infopath/2007/PartnerControls"/>
+    <ds:schemaRef ds:uri="199f642e-5af9-486c-ac06-f366742ef41a"/>
+    <ds:schemaRef ds:uri="http://schemas.openxmlformats.org/package/2006/metadata/core-properties"/>
+    <ds:schemaRef ds:uri="http://schemas.microsoft.com/office/2006/metadata/properties"/>
+    <ds:schemaRef ds:uri="http://www.w3.org/XML/1998/namespace"/>
+  </ds:schemaRefs>
+</ds:datastoreItem>
+</file>
+
+<file path=customXml/itemProps2.xml><?xml version="1.0" encoding="utf-8"?>
 <ds:datastoreItem xmlns:ds="http://schemas.openxmlformats.org/officeDocument/2006/customXml" ds:itemID="{04B464EA-1576-49DD-9675-1E3399D4D196}">
   <ds:schemaRefs>
     <ds:schemaRef ds:uri="http://schemas.microsoft.com/office/2006/metadata/contentType"/>
@@ -27923,23 +27941,6 @@
 </ds:datastoreItem>
 </file>
 
-<file path=customXml/itemProps2.xml><?xml version="1.0" encoding="utf-8"?>
-<ds:datastoreItem xmlns:ds="http://schemas.openxmlformats.org/officeDocument/2006/customXml" ds:itemID="{2D6C293B-B8B4-4284-A17E-9F9E4C32B25A}">
-  <ds:schemaRefs>
-    <ds:schemaRef ds:uri="http://schemas.microsoft.com/office/2006/documentManagement/types"/>
-    <ds:schemaRef ds:uri="http://purl.org/dc/elements/1.1/"/>
-    <ds:schemaRef ds:uri="http://purl.org/dc/terms/"/>
-    <ds:schemaRef ds:uri="http://purl.org/dc/dcmitype/"/>
-    <ds:schemaRef ds:uri="0e422b70-e85d-4377-8ee0-b6227433d381"/>
-    <ds:schemaRef ds:uri="http://schemas.microsoft.com/office/infopath/2007/PartnerControls"/>
-    <ds:schemaRef ds:uri="199f642e-5af9-486c-ac06-f366742ef41a"/>
-    <ds:schemaRef ds:uri="http://schemas.openxmlformats.org/package/2006/metadata/core-properties"/>
-    <ds:schemaRef ds:uri="http://schemas.microsoft.com/office/2006/metadata/properties"/>
-    <ds:schemaRef ds:uri="http://www.w3.org/XML/1998/namespace"/>
-  </ds:schemaRefs>
-</ds:datastoreItem>
-</file>
-
 <file path=customXml/itemProps3.xml><?xml version="1.0" encoding="utf-8"?>
 <ds:datastoreItem xmlns:ds="http://schemas.openxmlformats.org/officeDocument/2006/customXml" ds:itemID="{67DD9E9F-9EEB-4105-B29B-819486C2855A}">
   <ds:schemaRefs>
